--- a/CostVision-3D-CAD-Viewer-Study-and-Roadmap.pptx
+++ b/CostVision-3D-CAD-Viewer-Study-and-Roadmap.pptx
@@ -2238,7 +2238,7 @@
             <a:avLst/>
           </a:prstGeom>
           <a:solidFill>
-            <a:srgbClr val="22D3EE"/>
+            <a:srgbClr val="2DD4BF"/>
           </a:solidFill>
           <a:ln/>
         </p:spPr>
@@ -2444,7 +2444,7 @@
             </a:avLst>
           </a:prstGeom>
           <a:solidFill>
-            <a:srgbClr val="22D3EE"/>
+            <a:srgbClr val="2DD4BF"/>
           </a:solidFill>
           <a:ln/>
         </p:spPr>
@@ -2620,7 +2620,7 @@
             <a:avLst/>
           </a:prstGeom>
           <a:solidFill>
-            <a:srgbClr val="22D3EE"/>
+            <a:srgbClr val="2DD4BF"/>
           </a:solidFill>
           <a:ln/>
         </p:spPr>
@@ -2688,7 +2688,7 @@
           </a:solidFill>
           <a:ln w="12700">
             <a:solidFill>
-              <a:srgbClr val="22D3EE"/>
+              <a:srgbClr val="2DD4BF"/>
             </a:solidFill>
             <a:prstDash val="solid"/>
           </a:ln>
@@ -2721,7 +2721,7 @@
             <a:r>
               <a:rPr lang="en-US" sz="1000" b="1" dirty="0">
                 <a:solidFill>
-                  <a:srgbClr val="22D3EE"/>
+                  <a:srgbClr val="2DD4BF"/>
                 </a:solidFill>
                 <a:latin typeface="Calibri" pitchFamily="34" charset="0"/>
                 <a:ea typeface="Calibri" pitchFamily="34" charset="-122"/>
@@ -2754,7 +2754,7 @@
           </a:solidFill>
           <a:ln w="12700">
             <a:solidFill>
-              <a:srgbClr val="3B82F6"/>
+              <a:srgbClr val="38BDF8"/>
             </a:solidFill>
             <a:prstDash val="solid"/>
           </a:ln>
@@ -2787,7 +2787,7 @@
             <a:r>
               <a:rPr lang="en-US" sz="1000" b="1" dirty="0">
                 <a:solidFill>
-                  <a:srgbClr val="3B82F6"/>
+                  <a:srgbClr val="38BDF8"/>
                 </a:solidFill>
                 <a:latin typeface="Calibri" pitchFamily="34" charset="0"/>
                 <a:ea typeface="Calibri" pitchFamily="34" charset="-122"/>
@@ -2820,7 +2820,7 @@
           </a:solidFill>
           <a:ln w="12700">
             <a:solidFill>
-              <a:srgbClr val="8B5CF6"/>
+              <a:srgbClr val="A78BFA"/>
             </a:solidFill>
             <a:prstDash val="solid"/>
           </a:ln>
@@ -2853,7 +2853,7 @@
             <a:r>
               <a:rPr lang="en-US" sz="1000" b="1" dirty="0">
                 <a:solidFill>
-                  <a:srgbClr val="8B5CF6"/>
+                  <a:srgbClr val="A78BFA"/>
                 </a:solidFill>
                 <a:latin typeface="Calibri" pitchFamily="34" charset="0"/>
                 <a:ea typeface="Calibri" pitchFamily="34" charset="-122"/>
@@ -2886,7 +2886,7 @@
           </a:solidFill>
           <a:ln w="12700">
             <a:solidFill>
-              <a:srgbClr val="10B981"/>
+              <a:srgbClr val="34D399"/>
             </a:solidFill>
             <a:prstDash val="solid"/>
           </a:ln>
@@ -2919,7 +2919,7 @@
             <a:r>
               <a:rPr lang="en-US" sz="1000" b="1" dirty="0">
                 <a:solidFill>
-                  <a:srgbClr val="10B981"/>
+                  <a:srgbClr val="34D399"/>
                 </a:solidFill>
                 <a:latin typeface="Calibri" pitchFamily="34" charset="0"/>
                 <a:ea typeface="Calibri" pitchFamily="34" charset="-122"/>
@@ -3032,7 +3032,7 @@
             </a:avLst>
           </a:prstGeom>
           <a:solidFill>
-            <a:srgbClr val="22D3EE"/>
+            <a:srgbClr val="2DD4BF"/>
           </a:solidFill>
           <a:ln/>
         </p:spPr>
@@ -3169,7 +3169,7 @@
             <a:avLst/>
           </a:prstGeom>
           <a:solidFill>
-            <a:srgbClr val="22D3EE"/>
+            <a:srgbClr val="2DD4BF"/>
           </a:solidFill>
           <a:ln/>
         </p:spPr>
@@ -3201,7 +3201,7 @@
             <a:r>
               <a:rPr lang="en-US" sz="1050" b="1" spc="50" kern="0" dirty="0">
                 <a:solidFill>
-                  <a:srgbClr val="22D3EE"/>
+                  <a:srgbClr val="2DD4BF"/>
                 </a:solidFill>
                 <a:latin typeface="Calibri" pitchFamily="34" charset="0"/>
                 <a:ea typeface="Calibri" pitchFamily="34" charset="-122"/>
@@ -3318,7 +3318,7 @@
             <a:r>
               <a:rPr lang="en-US" sz="1150" i="1" dirty="0">
                 <a:solidFill>
-                  <a:srgbClr val="22D3EE"/>
+                  <a:srgbClr val="2DD4BF"/>
                 </a:solidFill>
                 <a:latin typeface="Calibri" pitchFamily="34" charset="0"/>
                 <a:ea typeface="Calibri" pitchFamily="34" charset="-122"/>
@@ -3372,7 +3372,7 @@
             <a:avLst/>
           </a:prstGeom>
           <a:solidFill>
-            <a:srgbClr val="22D3EE"/>
+            <a:srgbClr val="2DD4BF"/>
           </a:solidFill>
           <a:ln/>
         </p:spPr>
@@ -3491,7 +3491,7 @@
             <a:r>
               <a:rPr lang="en-US" sz="900" i="1" dirty="0">
                 <a:solidFill>
-                  <a:srgbClr val="10B981"/>
+                  <a:srgbClr val="34D399"/>
                 </a:solidFill>
                 <a:latin typeface="Calibri" pitchFamily="34" charset="0"/>
                 <a:ea typeface="Calibri" pitchFamily="34" charset="-122"/>
@@ -3545,7 +3545,7 @@
             <a:avLst/>
           </a:prstGeom>
           <a:solidFill>
-            <a:srgbClr val="22D3EE"/>
+            <a:srgbClr val="2DD4BF"/>
           </a:solidFill>
           <a:ln/>
         </p:spPr>
@@ -3664,7 +3664,7 @@
             <a:r>
               <a:rPr lang="en-US" sz="900" i="1" dirty="0">
                 <a:solidFill>
-                  <a:srgbClr val="10B981"/>
+                  <a:srgbClr val="34D399"/>
                 </a:solidFill>
                 <a:latin typeface="Calibri" pitchFamily="34" charset="0"/>
                 <a:ea typeface="Calibri" pitchFamily="34" charset="-122"/>
@@ -3718,7 +3718,7 @@
             <a:avLst/>
           </a:prstGeom>
           <a:solidFill>
-            <a:srgbClr val="22D3EE"/>
+            <a:srgbClr val="2DD4BF"/>
           </a:solidFill>
           <a:ln/>
         </p:spPr>
@@ -3837,7 +3837,7 @@
             <a:r>
               <a:rPr lang="en-US" sz="900" i="1" dirty="0">
                 <a:solidFill>
-                  <a:srgbClr val="10B981"/>
+                  <a:srgbClr val="34D399"/>
                 </a:solidFill>
                 <a:latin typeface="Calibri" pitchFamily="34" charset="0"/>
                 <a:ea typeface="Calibri" pitchFamily="34" charset="-122"/>
@@ -3891,7 +3891,7 @@
             <a:avLst/>
           </a:prstGeom>
           <a:solidFill>
-            <a:srgbClr val="22D3EE"/>
+            <a:srgbClr val="2DD4BF"/>
           </a:solidFill>
           <a:ln/>
         </p:spPr>
@@ -4010,7 +4010,7 @@
             <a:r>
               <a:rPr lang="en-US" sz="900" i="1" dirty="0">
                 <a:solidFill>
-                  <a:srgbClr val="10B981"/>
+                  <a:srgbClr val="34D399"/>
                 </a:solidFill>
                 <a:latin typeface="Calibri" pitchFamily="34" charset="0"/>
                 <a:ea typeface="Calibri" pitchFamily="34" charset="-122"/>
@@ -4064,7 +4064,7 @@
             <a:avLst/>
           </a:prstGeom>
           <a:solidFill>
-            <a:srgbClr val="22D3EE"/>
+            <a:srgbClr val="2DD4BF"/>
           </a:solidFill>
           <a:ln/>
         </p:spPr>
@@ -4183,7 +4183,7 @@
             <a:r>
               <a:rPr lang="en-US" sz="900" i="1" dirty="0">
                 <a:solidFill>
-                  <a:srgbClr val="10B981"/>
+                  <a:srgbClr val="34D399"/>
                 </a:solidFill>
                 <a:latin typeface="Calibri" pitchFamily="34" charset="0"/>
                 <a:ea typeface="Calibri" pitchFamily="34" charset="-122"/>
@@ -4257,7 +4257,7 @@
             </a:avLst>
           </a:prstGeom>
           <a:solidFill>
-            <a:srgbClr val="22D3EE"/>
+            <a:srgbClr val="2DD4BF"/>
           </a:solidFill>
           <a:ln/>
         </p:spPr>
@@ -4394,7 +4394,7 @@
             <a:avLst/>
           </a:prstGeom>
           <a:solidFill>
-            <a:srgbClr val="22D3EE"/>
+            <a:srgbClr val="2DD4BF"/>
           </a:solidFill>
           <a:ln/>
         </p:spPr>
@@ -4426,7 +4426,7 @@
             <a:r>
               <a:rPr lang="en-US" sz="1050" b="1" spc="50" kern="0" dirty="0">
                 <a:solidFill>
-                  <a:srgbClr val="22D3EE"/>
+                  <a:srgbClr val="2DD4BF"/>
                 </a:solidFill>
                 <a:latin typeface="Calibri" pitchFamily="34" charset="0"/>
                 <a:ea typeface="Calibri" pitchFamily="34" charset="-122"/>
@@ -4558,7 +4558,7 @@
             <a:avLst/>
           </a:prstGeom>
           <a:solidFill>
-            <a:srgbClr val="3B82F6"/>
+            <a:srgbClr val="38BDF8"/>
           </a:solidFill>
           <a:ln/>
         </p:spPr>
@@ -4686,7 +4686,7 @@
             <a:avLst/>
           </a:prstGeom>
           <a:solidFill>
-            <a:srgbClr val="3B82F6"/>
+            <a:srgbClr val="38BDF8"/>
           </a:solidFill>
           <a:ln/>
         </p:spPr>
@@ -4814,7 +4814,7 @@
             <a:avLst/>
           </a:prstGeom>
           <a:solidFill>
-            <a:srgbClr val="8B5CF6"/>
+            <a:srgbClr val="A78BFA"/>
           </a:solidFill>
           <a:ln/>
         </p:spPr>
@@ -4942,7 +4942,7 @@
             <a:avLst/>
           </a:prstGeom>
           <a:solidFill>
-            <a:srgbClr val="8B5CF6"/>
+            <a:srgbClr val="A78BFA"/>
           </a:solidFill>
           <a:ln/>
         </p:spPr>
@@ -5070,7 +5070,7 @@
             <a:avLst/>
           </a:prstGeom>
           <a:solidFill>
-            <a:srgbClr val="10B981"/>
+            <a:srgbClr val="34D399"/>
           </a:solidFill>
           <a:ln/>
         </p:spPr>
@@ -5198,7 +5198,7 @@
             <a:avLst/>
           </a:prstGeom>
           <a:solidFill>
-            <a:srgbClr val="22D3EE"/>
+            <a:srgbClr val="2DD4BF"/>
           </a:solidFill>
           <a:ln/>
         </p:spPr>
@@ -5305,7 +5305,7 @@
           </a:solidFill>
           <a:ln w="9525">
             <a:solidFill>
-              <a:srgbClr val="22D3EE"/>
+              <a:srgbClr val="2DD4BF"/>
             </a:solidFill>
             <a:prstDash val="solid"/>
           </a:ln>
@@ -5338,7 +5338,7 @@
             <a:r>
               <a:rPr lang="en-US" sz="1050" b="1" dirty="0">
                 <a:solidFill>
-                  <a:srgbClr val="22D3EE"/>
+                  <a:srgbClr val="2DD4BF"/>
                 </a:solidFill>
                 <a:latin typeface="Calibri" pitchFamily="34" charset="0"/>
                 <a:ea typeface="Calibri" pitchFamily="34" charset="-122"/>
@@ -5426,7 +5426,7 @@
             </a:avLst>
           </a:prstGeom>
           <a:solidFill>
-            <a:srgbClr val="22D3EE"/>
+            <a:srgbClr val="2DD4BF"/>
           </a:solidFill>
           <a:ln/>
         </p:spPr>
@@ -5563,7 +5563,7 @@
             <a:avLst/>
           </a:prstGeom>
           <a:solidFill>
-            <a:srgbClr val="22D3EE"/>
+            <a:srgbClr val="2DD4BF"/>
           </a:solidFill>
           <a:ln/>
         </p:spPr>
@@ -5595,7 +5595,7 @@
             <a:r>
               <a:rPr lang="en-US" sz="1050" b="1" spc="50" kern="0" dirty="0">
                 <a:solidFill>
-                  <a:srgbClr val="22D3EE"/>
+                  <a:srgbClr val="2DD4BF"/>
                 </a:solidFill>
                 <a:latin typeface="Calibri" pitchFamily="34" charset="0"/>
                 <a:ea typeface="Calibri" pitchFamily="34" charset="-122"/>
@@ -5727,7 +5727,7 @@
             <a:avLst/>
           </a:prstGeom>
           <a:solidFill>
-            <a:srgbClr val="8B5CF6"/>
+            <a:srgbClr val="A78BFA"/>
           </a:solidFill>
           <a:ln/>
         </p:spPr>
@@ -5759,7 +5759,7 @@
             <a:r>
               <a:rPr lang="en-US" sz="1300" b="1" dirty="0">
                 <a:solidFill>
-                  <a:srgbClr val="8B5CF6"/>
+                  <a:srgbClr val="A78BFA"/>
                 </a:solidFill>
                 <a:latin typeface="Calibri" pitchFamily="34" charset="0"/>
                 <a:ea typeface="Calibri" pitchFamily="34" charset="-122"/>
@@ -5786,7 +5786,7 @@
             <a:avLst/>
           </a:prstGeom>
           <a:solidFill>
-            <a:srgbClr val="8B5CF6"/>
+            <a:srgbClr val="A78BFA"/>
           </a:solidFill>
           <a:ln/>
         </p:spPr>
@@ -5848,7 +5848,7 @@
             <a:avLst/>
           </a:prstGeom>
           <a:solidFill>
-            <a:srgbClr val="8B5CF6"/>
+            <a:srgbClr val="A78BFA"/>
           </a:solidFill>
           <a:ln/>
         </p:spPr>
@@ -5910,7 +5910,7 @@
             <a:avLst/>
           </a:prstGeom>
           <a:solidFill>
-            <a:srgbClr val="8B5CF6"/>
+            <a:srgbClr val="A78BFA"/>
           </a:solidFill>
           <a:ln/>
         </p:spPr>
@@ -5972,7 +5972,7 @@
             <a:avLst/>
           </a:prstGeom>
           <a:solidFill>
-            <a:srgbClr val="8B5CF6"/>
+            <a:srgbClr val="A78BFA"/>
           </a:solidFill>
           <a:ln/>
         </p:spPr>
@@ -6034,7 +6034,7 @@
             <a:avLst/>
           </a:prstGeom>
           <a:solidFill>
-            <a:srgbClr val="8B5CF6"/>
+            <a:srgbClr val="A78BFA"/>
           </a:solidFill>
           <a:ln/>
         </p:spPr>
@@ -6096,7 +6096,7 @@
             <a:avLst/>
           </a:prstGeom>
           <a:solidFill>
-            <a:srgbClr val="8B5CF6"/>
+            <a:srgbClr val="A78BFA"/>
           </a:solidFill>
           <a:ln/>
         </p:spPr>
@@ -6185,7 +6185,7 @@
             <a:avLst/>
           </a:prstGeom>
           <a:solidFill>
-            <a:srgbClr val="F59E0B"/>
+            <a:srgbClr val="FBBF24"/>
           </a:solidFill>
           <a:ln/>
         </p:spPr>
@@ -6217,7 +6217,7 @@
             <a:r>
               <a:rPr lang="en-US" sz="1300" b="1" dirty="0">
                 <a:solidFill>
-                  <a:srgbClr val="F59E0B"/>
+                  <a:srgbClr val="FBBF24"/>
                 </a:solidFill>
                 <a:latin typeface="Calibri" pitchFamily="34" charset="0"/>
                 <a:ea typeface="Calibri" pitchFamily="34" charset="-122"/>
@@ -6364,7 +6364,7 @@
             <a:r>
               <a:rPr lang="en-US" sz="950" dirty="0">
                 <a:solidFill>
-                  <a:srgbClr val="F59E0B"/>
+                  <a:srgbClr val="FBBF24"/>
                 </a:solidFill>
                 <a:latin typeface="Calibri" pitchFamily="34" charset="0"/>
                 <a:ea typeface="Calibri" pitchFamily="34" charset="-122"/>
@@ -6469,7 +6469,7 @@
             <a:r>
               <a:rPr lang="en-US" sz="950" dirty="0">
                 <a:solidFill>
-                  <a:srgbClr val="F59E0B"/>
+                  <a:srgbClr val="FBBF24"/>
                 </a:solidFill>
                 <a:latin typeface="Calibri" pitchFamily="34" charset="0"/>
                 <a:ea typeface="Calibri" pitchFamily="34" charset="-122"/>
@@ -6574,7 +6574,7 @@
             <a:r>
               <a:rPr lang="en-US" sz="950" dirty="0">
                 <a:solidFill>
-                  <a:srgbClr val="F59E0B"/>
+                  <a:srgbClr val="FBBF24"/>
                 </a:solidFill>
                 <a:latin typeface="Calibri" pitchFamily="34" charset="0"/>
                 <a:ea typeface="Calibri" pitchFamily="34" charset="-122"/>
@@ -6679,7 +6679,7 @@
             <a:r>
               <a:rPr lang="en-US" sz="950" dirty="0">
                 <a:solidFill>
-                  <a:srgbClr val="F59E0B"/>
+                  <a:srgbClr val="FBBF24"/>
                 </a:solidFill>
                 <a:latin typeface="Calibri" pitchFamily="34" charset="0"/>
                 <a:ea typeface="Calibri" pitchFamily="34" charset="-122"/>
@@ -6753,7 +6753,7 @@
             </a:avLst>
           </a:prstGeom>
           <a:solidFill>
-            <a:srgbClr val="22D3EE"/>
+            <a:srgbClr val="2DD4BF"/>
           </a:solidFill>
           <a:ln/>
         </p:spPr>
@@ -6890,7 +6890,7 @@
             <a:avLst/>
           </a:prstGeom>
           <a:solidFill>
-            <a:srgbClr val="22D3EE"/>
+            <a:srgbClr val="2DD4BF"/>
           </a:solidFill>
           <a:ln/>
         </p:spPr>
@@ -6922,7 +6922,7 @@
             <a:r>
               <a:rPr lang="en-US" sz="1050" b="1" spc="50" kern="0" dirty="0">
                 <a:solidFill>
-                  <a:srgbClr val="22D3EE"/>
+                  <a:srgbClr val="2DD4BF"/>
                 </a:solidFill>
                 <a:latin typeface="Calibri" pitchFamily="34" charset="0"/>
                 <a:ea typeface="Calibri" pitchFamily="34" charset="-122"/>
@@ -7054,7 +7054,7 @@
             <a:avLst/>
           </a:prstGeom>
           <a:solidFill>
-            <a:srgbClr val="22D3EE"/>
+            <a:srgbClr val="2DD4BF"/>
           </a:solidFill>
           <a:ln/>
         </p:spPr>
@@ -7211,7 +7211,7 @@
             <a:avLst/>
           </a:prstGeom>
           <a:solidFill>
-            <a:srgbClr val="8B5CF6"/>
+            <a:srgbClr val="A78BFA"/>
           </a:solidFill>
           <a:ln/>
         </p:spPr>
@@ -7368,7 +7368,7 @@
             <a:avLst/>
           </a:prstGeom>
           <a:solidFill>
-            <a:srgbClr val="F59E0B"/>
+            <a:srgbClr val="FBBF24"/>
           </a:solidFill>
           <a:ln/>
         </p:spPr>
@@ -7400,7 +7400,7 @@
             <a:r>
               <a:rPr lang="en-US" sz="1200" b="1" dirty="0">
                 <a:solidFill>
-                  <a:srgbClr val="F59E0B"/>
+                  <a:srgbClr val="FBBF24"/>
                 </a:solidFill>
                 <a:latin typeface="Calibri" pitchFamily="34" charset="0"/>
                 <a:ea typeface="Calibri" pitchFamily="34" charset="-122"/>
@@ -7516,7 +7516,7 @@
             </a:avLst>
           </a:prstGeom>
           <a:solidFill>
-            <a:srgbClr val="22D3EE"/>
+            <a:srgbClr val="2DD4BF"/>
           </a:solidFill>
           <a:ln/>
         </p:spPr>
@@ -7653,7 +7653,7 @@
             <a:avLst/>
           </a:prstGeom>
           <a:solidFill>
-            <a:srgbClr val="22D3EE"/>
+            <a:srgbClr val="2DD4BF"/>
           </a:solidFill>
           <a:ln/>
         </p:spPr>
@@ -7685,7 +7685,7 @@
             <a:r>
               <a:rPr lang="en-US" sz="1050" b="1" spc="50" kern="0" dirty="0">
                 <a:solidFill>
-                  <a:srgbClr val="22D3EE"/>
+                  <a:srgbClr val="2DD4BF"/>
                 </a:solidFill>
                 <a:latin typeface="Calibri" pitchFamily="34" charset="0"/>
                 <a:ea typeface="Calibri" pitchFamily="34" charset="-122"/>
@@ -7796,7 +7796,7 @@
           </a:solidFill>
           <a:ln w="12700">
             <a:solidFill>
-              <a:srgbClr val="22D3EE"/>
+              <a:srgbClr val="2DD4BF"/>
             </a:solidFill>
             <a:prstDash val="solid"/>
           </a:ln>
@@ -7817,7 +7817,7 @@
             <a:avLst/>
           </a:prstGeom>
           <a:solidFill>
-            <a:srgbClr val="22D3EE"/>
+            <a:srgbClr val="2DD4BF"/>
           </a:solidFill>
           <a:ln/>
         </p:spPr>
@@ -7849,7 +7849,7 @@
             <a:r>
               <a:rPr lang="en-US" sz="1500" b="1" dirty="0">
                 <a:solidFill>
-                  <a:srgbClr val="22D3EE"/>
+                  <a:srgbClr val="2DD4BF"/>
                 </a:solidFill>
                 <a:latin typeface="Calibri" pitchFamily="34" charset="0"/>
                 <a:ea typeface="Calibri" pitchFamily="34" charset="-122"/>
@@ -7876,7 +7876,7 @@
             <a:avLst/>
           </a:prstGeom>
           <a:solidFill>
-            <a:srgbClr val="22D3EE"/>
+            <a:srgbClr val="2DD4BF"/>
           </a:solidFill>
           <a:ln/>
         </p:spPr>
@@ -7938,7 +7938,7 @@
             <a:avLst/>
           </a:prstGeom>
           <a:solidFill>
-            <a:srgbClr val="22D3EE"/>
+            <a:srgbClr val="2DD4BF"/>
           </a:solidFill>
           <a:ln/>
         </p:spPr>
@@ -8000,7 +8000,7 @@
             <a:avLst/>
           </a:prstGeom>
           <a:solidFill>
-            <a:srgbClr val="22D3EE"/>
+            <a:srgbClr val="2DD4BF"/>
           </a:solidFill>
           <a:ln/>
         </p:spPr>
@@ -8062,7 +8062,7 @@
             <a:avLst/>
           </a:prstGeom>
           <a:solidFill>
-            <a:srgbClr val="22D3EE"/>
+            <a:srgbClr val="2DD4BF"/>
           </a:solidFill>
           <a:ln/>
         </p:spPr>
@@ -8124,7 +8124,7 @@
             <a:avLst/>
           </a:prstGeom>
           <a:solidFill>
-            <a:srgbClr val="22D3EE"/>
+            <a:srgbClr val="2DD4BF"/>
           </a:solidFill>
           <a:ln/>
         </p:spPr>
@@ -8186,7 +8186,7 @@
             <a:avLst/>
           </a:prstGeom>
           <a:solidFill>
-            <a:srgbClr val="22D3EE"/>
+            <a:srgbClr val="2DD4BF"/>
           </a:solidFill>
           <a:ln/>
         </p:spPr>
@@ -8254,7 +8254,7 @@
           </a:solidFill>
           <a:ln w="12700">
             <a:solidFill>
-              <a:srgbClr val="3B82F6"/>
+              <a:srgbClr val="38BDF8"/>
             </a:solidFill>
             <a:prstDash val="solid"/>
           </a:ln>
@@ -8275,7 +8275,7 @@
             <a:avLst/>
           </a:prstGeom>
           <a:solidFill>
-            <a:srgbClr val="3B82F6"/>
+            <a:srgbClr val="38BDF8"/>
           </a:solidFill>
           <a:ln/>
         </p:spPr>
@@ -8307,7 +8307,7 @@
             <a:r>
               <a:rPr lang="en-US" sz="1500" b="1" dirty="0">
                 <a:solidFill>
-                  <a:srgbClr val="3B82F6"/>
+                  <a:srgbClr val="38BDF8"/>
                 </a:solidFill>
                 <a:latin typeface="Calibri" pitchFamily="34" charset="0"/>
                 <a:ea typeface="Calibri" pitchFamily="34" charset="-122"/>
@@ -8334,7 +8334,7 @@
             <a:avLst/>
           </a:prstGeom>
           <a:solidFill>
-            <a:srgbClr val="3B82F6"/>
+            <a:srgbClr val="38BDF8"/>
           </a:solidFill>
           <a:ln/>
         </p:spPr>
@@ -8396,7 +8396,7 @@
             <a:avLst/>
           </a:prstGeom>
           <a:solidFill>
-            <a:srgbClr val="3B82F6"/>
+            <a:srgbClr val="38BDF8"/>
           </a:solidFill>
           <a:ln/>
         </p:spPr>
@@ -8458,7 +8458,7 @@
             <a:avLst/>
           </a:prstGeom>
           <a:solidFill>
-            <a:srgbClr val="3B82F6"/>
+            <a:srgbClr val="38BDF8"/>
           </a:solidFill>
           <a:ln/>
         </p:spPr>
@@ -8520,7 +8520,7 @@
             <a:avLst/>
           </a:prstGeom>
           <a:solidFill>
-            <a:srgbClr val="3B82F6"/>
+            <a:srgbClr val="38BDF8"/>
           </a:solidFill>
           <a:ln/>
         </p:spPr>
@@ -8582,7 +8582,7 @@
             <a:avLst/>
           </a:prstGeom>
           <a:solidFill>
-            <a:srgbClr val="3B82F6"/>
+            <a:srgbClr val="38BDF8"/>
           </a:solidFill>
           <a:ln/>
         </p:spPr>
@@ -8644,7 +8644,7 @@
             <a:avLst/>
           </a:prstGeom>
           <a:solidFill>
-            <a:srgbClr val="3B82F6"/>
+            <a:srgbClr val="38BDF8"/>
           </a:solidFill>
           <a:ln/>
         </p:spPr>
@@ -8753,7 +8753,7 @@
             </a:avLst>
           </a:prstGeom>
           <a:solidFill>
-            <a:srgbClr val="22D3EE"/>
+            <a:srgbClr val="2DD4BF"/>
           </a:solidFill>
           <a:ln/>
         </p:spPr>
@@ -8890,7 +8890,7 @@
             <a:avLst/>
           </a:prstGeom>
           <a:solidFill>
-            <a:srgbClr val="22D3EE"/>
+            <a:srgbClr val="2DD4BF"/>
           </a:solidFill>
           <a:ln/>
         </p:spPr>
@@ -8922,7 +8922,7 @@
             <a:r>
               <a:rPr lang="en-US" sz="1050" b="1" spc="50" kern="0" dirty="0">
                 <a:solidFill>
-                  <a:srgbClr val="22D3EE"/>
+                  <a:srgbClr val="2DD4BF"/>
                 </a:solidFill>
                 <a:latin typeface="Calibri" pitchFamily="34" charset="0"/>
                 <a:ea typeface="Calibri" pitchFamily="34" charset="-122"/>
@@ -9054,7 +9054,7 @@
             <a:avLst/>
           </a:prstGeom>
           <a:solidFill>
-            <a:srgbClr val="10B981"/>
+            <a:srgbClr val="34D399"/>
           </a:solidFill>
           <a:ln/>
         </p:spPr>
@@ -9182,7 +9182,7 @@
             <a:avLst/>
           </a:prstGeom>
           <a:solidFill>
-            <a:srgbClr val="22D3EE"/>
+            <a:srgbClr val="2DD4BF"/>
           </a:solidFill>
           <a:ln/>
         </p:spPr>
@@ -9310,7 +9310,7 @@
             <a:avLst/>
           </a:prstGeom>
           <a:solidFill>
-            <a:srgbClr val="3B82F6"/>
+            <a:srgbClr val="38BDF8"/>
           </a:solidFill>
           <a:ln/>
         </p:spPr>
@@ -9438,7 +9438,7 @@
             <a:avLst/>
           </a:prstGeom>
           <a:solidFill>
-            <a:srgbClr val="8B5CF6"/>
+            <a:srgbClr val="A78BFA"/>
           </a:solidFill>
           <a:ln/>
         </p:spPr>
@@ -9566,7 +9566,7 @@
             <a:avLst/>
           </a:prstGeom>
           <a:solidFill>
-            <a:srgbClr val="F59E0B"/>
+            <a:srgbClr val="FBBF24"/>
           </a:solidFill>
           <a:ln/>
         </p:spPr>
@@ -9694,7 +9694,7 @@
             <a:avLst/>
           </a:prstGeom>
           <a:solidFill>
-            <a:srgbClr val="10B981"/>
+            <a:srgbClr val="34D399"/>
           </a:solidFill>
           <a:ln/>
         </p:spPr>
@@ -9801,7 +9801,7 @@
           </a:solidFill>
           <a:ln w="12700">
             <a:solidFill>
-              <a:srgbClr val="10B981"/>
+              <a:srgbClr val="34D399"/>
             </a:solidFill>
             <a:prstDash val="solid"/>
           </a:ln>
@@ -9822,7 +9822,7 @@
             <a:avLst/>
           </a:prstGeom>
           <a:solidFill>
-            <a:srgbClr val="10B981"/>
+            <a:srgbClr val="34D399"/>
           </a:solidFill>
           <a:ln/>
         </p:spPr>
@@ -9854,7 +9854,7 @@
             <a:r>
               <a:rPr lang="en-US" sz="1300" b="1" dirty="0">
                 <a:solidFill>
-                  <a:srgbClr val="10B981"/>
+                  <a:srgbClr val="34D399"/>
                 </a:solidFill>
                 <a:latin typeface="Calibri" pitchFamily="34" charset="0"/>
                 <a:ea typeface="Calibri" pitchFamily="34" charset="-122"/>
@@ -9987,7 +9987,7 @@
             </a:avLst>
           </a:prstGeom>
           <a:solidFill>
-            <a:srgbClr val="22D3EE"/>
+            <a:srgbClr val="2DD4BF"/>
           </a:solidFill>
           <a:ln/>
         </p:spPr>
@@ -10124,7 +10124,7 @@
             <a:avLst/>
           </a:prstGeom>
           <a:solidFill>
-            <a:srgbClr val="22D3EE"/>
+            <a:srgbClr val="2DD4BF"/>
           </a:solidFill>
           <a:ln/>
         </p:spPr>
@@ -10156,7 +10156,7 @@
             <a:r>
               <a:rPr lang="en-US" sz="1050" b="1" spc="50" kern="0" dirty="0">
                 <a:solidFill>
-                  <a:srgbClr val="22D3EE"/>
+                  <a:srgbClr val="2DD4BF"/>
                 </a:solidFill>
                 <a:latin typeface="Calibri" pitchFamily="34" charset="0"/>
                 <a:ea typeface="Calibri" pitchFamily="34" charset="-122"/>
@@ -10339,7 +10339,7 @@
             <a:r>
               <a:rPr lang="en-US" sz="950" b="1" dirty="0">
                 <a:solidFill>
-                  <a:srgbClr val="22D3EE"/>
+                  <a:srgbClr val="2DD4BF"/>
                 </a:solidFill>
                 <a:latin typeface="Calibri" pitchFamily="34" charset="0"/>
                 <a:ea typeface="Calibri" pitchFamily="34" charset="-122"/>
@@ -10405,7 +10405,7 @@
             <a:r>
               <a:rPr lang="en-US" sz="950" b="1" dirty="0">
                 <a:solidFill>
-                  <a:srgbClr val="3B82F6"/>
+                  <a:srgbClr val="38BDF8"/>
                 </a:solidFill>
                 <a:latin typeface="Calibri" pitchFamily="34" charset="0"/>
                 <a:ea typeface="Calibri" pitchFamily="34" charset="-122"/>
@@ -10510,7 +10510,7 @@
             <a:r>
               <a:rPr lang="en-US" sz="950" b="1" dirty="0">
                 <a:solidFill>
-                  <a:srgbClr val="3B82F6"/>
+                  <a:srgbClr val="38BDF8"/>
                 </a:solidFill>
                 <a:latin typeface="Calibri" pitchFamily="34" charset="0"/>
                 <a:ea typeface="Calibri" pitchFamily="34" charset="-122"/>
@@ -10615,7 +10615,7 @@
             <a:r>
               <a:rPr lang="en-US" sz="950" b="1" dirty="0">
                 <a:solidFill>
-                  <a:srgbClr val="3B82F6"/>
+                  <a:srgbClr val="38BDF8"/>
                 </a:solidFill>
                 <a:latin typeface="Calibri" pitchFamily="34" charset="0"/>
                 <a:ea typeface="Calibri" pitchFamily="34" charset="-122"/>
@@ -10720,7 +10720,7 @@
             <a:r>
               <a:rPr lang="en-US" sz="950" b="1" dirty="0">
                 <a:solidFill>
-                  <a:srgbClr val="3B82F6"/>
+                  <a:srgbClr val="38BDF8"/>
                 </a:solidFill>
                 <a:latin typeface="Calibri" pitchFamily="34" charset="0"/>
                 <a:ea typeface="Calibri" pitchFamily="34" charset="-122"/>
@@ -10825,7 +10825,7 @@
             <a:r>
               <a:rPr lang="en-US" sz="950" b="1" dirty="0">
                 <a:solidFill>
-                  <a:srgbClr val="3B82F6"/>
+                  <a:srgbClr val="38BDF8"/>
                 </a:solidFill>
                 <a:latin typeface="Calibri" pitchFamily="34" charset="0"/>
                 <a:ea typeface="Calibri" pitchFamily="34" charset="-122"/>
@@ -10930,7 +10930,7 @@
             <a:r>
               <a:rPr lang="en-US" sz="950" b="1" dirty="0">
                 <a:solidFill>
-                  <a:srgbClr val="3B82F6"/>
+                  <a:srgbClr val="38BDF8"/>
                 </a:solidFill>
                 <a:latin typeface="Calibri" pitchFamily="34" charset="0"/>
                 <a:ea typeface="Calibri" pitchFamily="34" charset="-122"/>
@@ -11035,7 +11035,7 @@
             <a:r>
               <a:rPr lang="en-US" sz="950" b="1" dirty="0">
                 <a:solidFill>
-                  <a:srgbClr val="3B82F6"/>
+                  <a:srgbClr val="38BDF8"/>
                 </a:solidFill>
                 <a:latin typeface="Calibri" pitchFamily="34" charset="0"/>
                 <a:ea typeface="Calibri" pitchFamily="34" charset="-122"/>
@@ -11140,7 +11140,7 @@
             <a:r>
               <a:rPr lang="en-US" sz="950" b="1" dirty="0">
                 <a:solidFill>
-                  <a:srgbClr val="3B82F6"/>
+                  <a:srgbClr val="38BDF8"/>
                 </a:solidFill>
                 <a:latin typeface="Calibri" pitchFamily="34" charset="0"/>
                 <a:ea typeface="Calibri" pitchFamily="34" charset="-122"/>
@@ -11245,7 +11245,7 @@
             <a:r>
               <a:rPr lang="en-US" sz="950" b="1" dirty="0">
                 <a:solidFill>
-                  <a:srgbClr val="3B82F6"/>
+                  <a:srgbClr val="38BDF8"/>
                 </a:solidFill>
                 <a:latin typeface="Calibri" pitchFamily="34" charset="0"/>
                 <a:ea typeface="Calibri" pitchFamily="34" charset="-122"/>
@@ -11338,7 +11338,7 @@
             <a:avLst/>
           </a:prstGeom>
           <a:solidFill>
-            <a:srgbClr val="3B82F6"/>
+            <a:srgbClr val="38BDF8"/>
           </a:solidFill>
           <a:ln/>
         </p:spPr>
@@ -11595,7 +11595,7 @@
             <a:avLst/>
           </a:prstGeom>
           <a:solidFill>
-            <a:srgbClr val="10B981"/>
+            <a:srgbClr val="34D399"/>
           </a:solidFill>
           <a:ln/>
         </p:spPr>
@@ -11743,7 +11743,7 @@
             </a:avLst>
           </a:prstGeom>
           <a:solidFill>
-            <a:srgbClr val="22D3EE"/>
+            <a:srgbClr val="2DD4BF"/>
           </a:solidFill>
           <a:ln/>
         </p:spPr>
@@ -11880,7 +11880,7 @@
             <a:avLst/>
           </a:prstGeom>
           <a:solidFill>
-            <a:srgbClr val="22D3EE"/>
+            <a:srgbClr val="2DD4BF"/>
           </a:solidFill>
           <a:ln/>
         </p:spPr>
@@ -11912,7 +11912,7 @@
             <a:r>
               <a:rPr lang="en-US" sz="1050" b="1" spc="50" kern="0" dirty="0">
                 <a:solidFill>
-                  <a:srgbClr val="22D3EE"/>
+                  <a:srgbClr val="2DD4BF"/>
                 </a:solidFill>
                 <a:latin typeface="Calibri" pitchFamily="34" charset="0"/>
                 <a:ea typeface="Calibri" pitchFamily="34" charset="-122"/>
@@ -12044,7 +12044,7 @@
             <a:avLst/>
           </a:prstGeom>
           <a:solidFill>
-            <a:srgbClr val="22D3EE"/>
+            <a:srgbClr val="2DD4BF"/>
           </a:solidFill>
           <a:ln/>
         </p:spPr>
@@ -12064,7 +12064,7 @@
             <a:avLst/>
           </a:prstGeom>
           <a:solidFill>
-            <a:srgbClr val="22D3EE"/>
+            <a:srgbClr val="2DD4BF"/>
           </a:solidFill>
           <a:ln/>
         </p:spPr>
@@ -12231,7 +12231,7 @@
             <a:avLst/>
           </a:prstGeom>
           <a:solidFill>
-            <a:srgbClr val="10B981"/>
+            <a:srgbClr val="34D399"/>
           </a:solidFill>
           <a:ln/>
         </p:spPr>
@@ -12251,7 +12251,7 @@
             <a:avLst/>
           </a:prstGeom>
           <a:solidFill>
-            <a:srgbClr val="10B981"/>
+            <a:srgbClr val="34D399"/>
           </a:solidFill>
           <a:ln/>
         </p:spPr>
@@ -12418,7 +12418,7 @@
             <a:avLst/>
           </a:prstGeom>
           <a:solidFill>
-            <a:srgbClr val="3B82F6"/>
+            <a:srgbClr val="38BDF8"/>
           </a:solidFill>
           <a:ln/>
         </p:spPr>
@@ -12438,7 +12438,7 @@
             <a:avLst/>
           </a:prstGeom>
           <a:solidFill>
-            <a:srgbClr val="3B82F6"/>
+            <a:srgbClr val="38BDF8"/>
           </a:solidFill>
           <a:ln/>
         </p:spPr>
@@ -12605,7 +12605,7 @@
             <a:avLst/>
           </a:prstGeom>
           <a:solidFill>
-            <a:srgbClr val="8B5CF6"/>
+            <a:srgbClr val="A78BFA"/>
           </a:solidFill>
           <a:ln/>
         </p:spPr>
@@ -12625,7 +12625,7 @@
             <a:avLst/>
           </a:prstGeom>
           <a:solidFill>
-            <a:srgbClr val="8B5CF6"/>
+            <a:srgbClr val="A78BFA"/>
           </a:solidFill>
           <a:ln/>
         </p:spPr>
@@ -12812,7 +12812,7 @@
             </a:avLst>
           </a:prstGeom>
           <a:solidFill>
-            <a:srgbClr val="22D3EE"/>
+            <a:srgbClr val="2DD4BF"/>
           </a:solidFill>
           <a:ln/>
         </p:spPr>
@@ -12949,7 +12949,7 @@
             <a:avLst/>
           </a:prstGeom>
           <a:solidFill>
-            <a:srgbClr val="22D3EE"/>
+            <a:srgbClr val="2DD4BF"/>
           </a:solidFill>
           <a:ln/>
         </p:spPr>
@@ -12981,7 +12981,7 @@
             <a:r>
               <a:rPr lang="en-US" sz="1050" b="1" spc="50" kern="0" dirty="0">
                 <a:solidFill>
-                  <a:srgbClr val="22D3EE"/>
+                  <a:srgbClr val="2DD4BF"/>
                 </a:solidFill>
                 <a:latin typeface="Calibri" pitchFamily="34" charset="0"/>
                 <a:ea typeface="Calibri" pitchFamily="34" charset="-122"/>
@@ -13226,7 +13226,7 @@
             <a:r>
               <a:rPr lang="en-US" sz="1600" b="1" dirty="0">
                 <a:solidFill>
-                  <a:srgbClr val="22D3EE"/>
+                  <a:srgbClr val="2DD4BF"/>
                 </a:solidFill>
                 <a:latin typeface="Calibri" pitchFamily="34" charset="0"/>
                 <a:ea typeface="Calibri" pitchFamily="34" charset="-122"/>
@@ -13280,7 +13280,7 @@
             <a:avLst/>
           </a:prstGeom>
           <a:solidFill>
-            <a:srgbClr val="22D3EE"/>
+            <a:srgbClr val="2DD4BF"/>
           </a:solidFill>
           <a:ln/>
         </p:spPr>
@@ -13312,7 +13312,7 @@
             <a:r>
               <a:rPr lang="en-US" sz="1200" b="1" dirty="0">
                 <a:solidFill>
-                  <a:srgbClr val="22D3EE"/>
+                  <a:srgbClr val="2DD4BF"/>
                 </a:solidFill>
                 <a:latin typeface="Calibri" pitchFamily="34" charset="0"/>
                 <a:ea typeface="Calibri" pitchFamily="34" charset="-122"/>
@@ -13393,7 +13393,7 @@
             <a:r>
               <a:rPr lang="en-US" sz="1600" b="1" dirty="0">
                 <a:solidFill>
-                  <a:srgbClr val="22D3EE"/>
+                  <a:srgbClr val="2DD4BF"/>
                 </a:solidFill>
                 <a:latin typeface="Calibri" pitchFamily="34" charset="0"/>
                 <a:ea typeface="Calibri" pitchFamily="34" charset="-122"/>
@@ -13447,7 +13447,7 @@
             <a:avLst/>
           </a:prstGeom>
           <a:solidFill>
-            <a:srgbClr val="3B82F6"/>
+            <a:srgbClr val="38BDF8"/>
           </a:solidFill>
           <a:ln/>
         </p:spPr>
@@ -13479,7 +13479,7 @@
             <a:r>
               <a:rPr lang="en-US" sz="1200" b="1" dirty="0">
                 <a:solidFill>
-                  <a:srgbClr val="3B82F6"/>
+                  <a:srgbClr val="38BDF8"/>
                 </a:solidFill>
                 <a:latin typeface="Calibri" pitchFamily="34" charset="0"/>
                 <a:ea typeface="Calibri" pitchFamily="34" charset="-122"/>
@@ -13560,7 +13560,7 @@
             <a:r>
               <a:rPr lang="en-US" sz="1600" b="1" dirty="0">
                 <a:solidFill>
-                  <a:srgbClr val="22D3EE"/>
+                  <a:srgbClr val="2DD4BF"/>
                 </a:solidFill>
                 <a:latin typeface="Calibri" pitchFamily="34" charset="0"/>
                 <a:ea typeface="Calibri" pitchFamily="34" charset="-122"/>
@@ -13614,7 +13614,7 @@
             <a:avLst/>
           </a:prstGeom>
           <a:solidFill>
-            <a:srgbClr val="F59E0B"/>
+            <a:srgbClr val="FBBF24"/>
           </a:solidFill>
           <a:ln/>
         </p:spPr>
@@ -13646,7 +13646,7 @@
             <a:r>
               <a:rPr lang="en-US" sz="1200" b="1" dirty="0">
                 <a:solidFill>
-                  <a:srgbClr val="F59E0B"/>
+                  <a:srgbClr val="FBBF24"/>
                 </a:solidFill>
                 <a:latin typeface="Calibri" pitchFamily="34" charset="0"/>
                 <a:ea typeface="Calibri" pitchFamily="34" charset="-122"/>
@@ -13727,7 +13727,7 @@
             <a:r>
               <a:rPr lang="en-US" sz="1600" b="1" dirty="0">
                 <a:solidFill>
-                  <a:srgbClr val="22D3EE"/>
+                  <a:srgbClr val="2DD4BF"/>
                 </a:solidFill>
                 <a:latin typeface="Calibri" pitchFamily="34" charset="0"/>
                 <a:ea typeface="Calibri" pitchFamily="34" charset="-122"/>
@@ -13781,7 +13781,7 @@
             <a:avLst/>
           </a:prstGeom>
           <a:solidFill>
-            <a:srgbClr val="10B981"/>
+            <a:srgbClr val="34D399"/>
           </a:solidFill>
           <a:ln/>
         </p:spPr>
@@ -13813,7 +13813,7 @@
             <a:r>
               <a:rPr lang="en-US" sz="1200" b="1" dirty="0">
                 <a:solidFill>
-                  <a:srgbClr val="10B981"/>
+                  <a:srgbClr val="34D399"/>
                 </a:solidFill>
                 <a:latin typeface="Calibri" pitchFamily="34" charset="0"/>
                 <a:ea typeface="Calibri" pitchFamily="34" charset="-122"/>
@@ -13909,7 +13909,7 @@
             <a:avLst/>
           </a:prstGeom>
           <a:solidFill>
-            <a:srgbClr val="22D3EE"/>
+            <a:srgbClr val="2DD4BF"/>
           </a:solidFill>
           <a:ln/>
         </p:spPr>
@@ -14066,7 +14066,7 @@
             <a:avLst/>
           </a:prstGeom>
           <a:solidFill>
-            <a:srgbClr val="3B82F6"/>
+            <a:srgbClr val="38BDF8"/>
           </a:solidFill>
           <a:ln/>
         </p:spPr>
@@ -14243,7 +14243,7 @@
             </a:avLst>
           </a:prstGeom>
           <a:solidFill>
-            <a:srgbClr val="22D3EE"/>
+            <a:srgbClr val="2DD4BF"/>
           </a:solidFill>
           <a:ln/>
         </p:spPr>
@@ -14380,7 +14380,7 @@
             <a:avLst/>
           </a:prstGeom>
           <a:solidFill>
-            <a:srgbClr val="22D3EE"/>
+            <a:srgbClr val="2DD4BF"/>
           </a:solidFill>
           <a:ln/>
         </p:spPr>
@@ -14412,7 +14412,7 @@
             <a:r>
               <a:rPr lang="en-US" sz="1050" b="1" spc="50" kern="0" dirty="0">
                 <a:solidFill>
-                  <a:srgbClr val="22D3EE"/>
+                  <a:srgbClr val="2DD4BF"/>
                 </a:solidFill>
                 <a:latin typeface="Calibri" pitchFamily="34" charset="0"/>
                 <a:ea typeface="Calibri" pitchFamily="34" charset="-122"/>
@@ -14994,7 +14994,7 @@
             <a:avLst/>
           </a:prstGeom>
           <a:solidFill>
-            <a:srgbClr val="22D3EE"/>
+            <a:srgbClr val="2DD4BF"/>
           </a:solidFill>
           <a:ln/>
         </p:spPr>
@@ -15014,7 +15014,7 @@
             <a:avLst/>
           </a:prstGeom>
           <a:solidFill>
-            <a:srgbClr val="F59E0B"/>
+            <a:srgbClr val="FBBF24"/>
           </a:solidFill>
           <a:ln/>
         </p:spPr>
@@ -15034,7 +15034,7 @@
             <a:avLst/>
           </a:prstGeom>
           <a:solidFill>
-            <a:srgbClr val="F59E0B"/>
+            <a:srgbClr val="FBBF24"/>
           </a:solidFill>
           <a:ln/>
         </p:spPr>
@@ -15054,7 +15054,7 @@
             <a:avLst/>
           </a:prstGeom>
           <a:solidFill>
-            <a:srgbClr val="F59E0B"/>
+            <a:srgbClr val="FBBF24"/>
           </a:solidFill>
           <a:ln/>
         </p:spPr>
@@ -15074,7 +15074,7 @@
             <a:avLst/>
           </a:prstGeom>
           <a:solidFill>
-            <a:srgbClr val="22D3EE"/>
+            <a:srgbClr val="2DD4BF"/>
           </a:solidFill>
           <a:ln/>
         </p:spPr>
@@ -15094,7 +15094,7 @@
             <a:avLst/>
           </a:prstGeom>
           <a:solidFill>
-            <a:srgbClr val="F59E0B"/>
+            <a:srgbClr val="FBBF24"/>
           </a:solidFill>
           <a:ln/>
         </p:spPr>
@@ -15180,7 +15180,7 @@
             <a:avLst/>
           </a:prstGeom>
           <a:solidFill>
-            <a:srgbClr val="22D3EE"/>
+            <a:srgbClr val="2DD4BF"/>
           </a:solidFill>
           <a:ln/>
         </p:spPr>
@@ -15200,7 +15200,7 @@
             <a:avLst/>
           </a:prstGeom>
           <a:solidFill>
-            <a:srgbClr val="F59E0B"/>
+            <a:srgbClr val="FBBF24"/>
           </a:solidFill>
           <a:ln/>
         </p:spPr>
@@ -15220,7 +15220,7 @@
             <a:avLst/>
           </a:prstGeom>
           <a:solidFill>
-            <a:srgbClr val="F59E0B"/>
+            <a:srgbClr val="FBBF24"/>
           </a:solidFill>
           <a:ln/>
         </p:spPr>
@@ -15240,7 +15240,7 @@
             <a:avLst/>
           </a:prstGeom>
           <a:solidFill>
-            <a:srgbClr val="22D3EE"/>
+            <a:srgbClr val="2DD4BF"/>
           </a:solidFill>
           <a:ln/>
         </p:spPr>
@@ -15260,7 +15260,7 @@
             <a:avLst/>
           </a:prstGeom>
           <a:solidFill>
-            <a:srgbClr val="22D3EE"/>
+            <a:srgbClr val="2DD4BF"/>
           </a:solidFill>
           <a:ln/>
         </p:spPr>
@@ -15371,7 +15371,7 @@
             <a:avLst/>
           </a:prstGeom>
           <a:solidFill>
-            <a:srgbClr val="F59E0B"/>
+            <a:srgbClr val="FBBF24"/>
           </a:solidFill>
           <a:ln/>
         </p:spPr>
@@ -15391,7 +15391,7 @@
             <a:avLst/>
           </a:prstGeom>
           <a:solidFill>
-            <a:srgbClr val="22D3EE"/>
+            <a:srgbClr val="2DD4BF"/>
           </a:solidFill>
           <a:ln/>
         </p:spPr>
@@ -15436,7 +15436,7 @@
             <a:avLst/>
           </a:prstGeom>
           <a:solidFill>
-            <a:srgbClr val="22D3EE"/>
+            <a:srgbClr val="2DD4BF"/>
           </a:solidFill>
           <a:ln/>
         </p:spPr>
@@ -15481,7 +15481,7 @@
             <a:avLst/>
           </a:prstGeom>
           <a:solidFill>
-            <a:srgbClr val="F59E0B"/>
+            <a:srgbClr val="FBBF24"/>
           </a:solidFill>
           <a:ln/>
         </p:spPr>
@@ -15567,7 +15567,7 @@
             <a:avLst/>
           </a:prstGeom>
           <a:solidFill>
-            <a:srgbClr val="F59E0B"/>
+            <a:srgbClr val="FBBF24"/>
           </a:solidFill>
           <a:ln/>
         </p:spPr>
@@ -15612,7 +15612,7 @@
             <a:avLst/>
           </a:prstGeom>
           <a:solidFill>
-            <a:srgbClr val="22D3EE"/>
+            <a:srgbClr val="2DD4BF"/>
           </a:solidFill>
           <a:ln/>
         </p:spPr>
@@ -15657,7 +15657,7 @@
             <a:avLst/>
           </a:prstGeom>
           <a:solidFill>
-            <a:srgbClr val="F59E0B"/>
+            <a:srgbClr val="FBBF24"/>
           </a:solidFill>
           <a:ln/>
         </p:spPr>
@@ -15677,7 +15677,7 @@
             <a:avLst/>
           </a:prstGeom>
           <a:solidFill>
-            <a:srgbClr val="22D3EE"/>
+            <a:srgbClr val="2DD4BF"/>
           </a:solidFill>
           <a:ln/>
         </p:spPr>
@@ -15763,7 +15763,7 @@
             <a:avLst/>
           </a:prstGeom>
           <a:solidFill>
-            <a:srgbClr val="22D3EE"/>
+            <a:srgbClr val="2DD4BF"/>
           </a:solidFill>
           <a:ln/>
         </p:spPr>
@@ -15833,7 +15833,7 @@
             <a:avLst/>
           </a:prstGeom>
           <a:solidFill>
-            <a:srgbClr val="F59E0B"/>
+            <a:srgbClr val="FBBF24"/>
           </a:solidFill>
           <a:ln/>
         </p:spPr>
@@ -15853,7 +15853,7 @@
             <a:avLst/>
           </a:prstGeom>
           <a:solidFill>
-            <a:srgbClr val="22D3EE"/>
+            <a:srgbClr val="2DD4BF"/>
           </a:solidFill>
           <a:ln/>
         </p:spPr>
@@ -15925,7 +15925,7 @@
             <a:avLst/>
           </a:prstGeom>
           <a:solidFill>
-            <a:srgbClr val="22D3EE"/>
+            <a:srgbClr val="2DD4BF"/>
           </a:solidFill>
           <a:ln/>
         </p:spPr>
@@ -15957,7 +15957,7 @@
             <a:r>
               <a:rPr lang="en-US" sz="1000" b="1" dirty="0">
                 <a:solidFill>
-                  <a:srgbClr val="22D3EE"/>
+                  <a:srgbClr val="2DD4BF"/>
                 </a:solidFill>
                 <a:latin typeface="Calibri" pitchFamily="34" charset="0"/>
                 <a:ea typeface="Calibri" pitchFamily="34" charset="-122"/>
@@ -15984,7 +15984,7 @@
             <a:avLst/>
           </a:prstGeom>
           <a:solidFill>
-            <a:srgbClr val="F59E0B"/>
+            <a:srgbClr val="FBBF24"/>
           </a:solidFill>
           <a:ln/>
         </p:spPr>
@@ -16054,7 +16054,7 @@
             <a:avLst/>
           </a:prstGeom>
           <a:solidFill>
-            <a:srgbClr val="F59E0B"/>
+            <a:srgbClr val="FBBF24"/>
           </a:solidFill>
           <a:ln/>
         </p:spPr>
@@ -16074,7 +16074,7 @@
             <a:avLst/>
           </a:prstGeom>
           <a:solidFill>
-            <a:srgbClr val="22D3EE"/>
+            <a:srgbClr val="2DD4BF"/>
           </a:solidFill>
           <a:ln/>
         </p:spPr>
@@ -16094,7 +16094,7 @@
             <a:avLst/>
           </a:prstGeom>
           <a:solidFill>
-            <a:srgbClr val="22D3EE"/>
+            <a:srgbClr val="2DD4BF"/>
           </a:solidFill>
           <a:ln/>
         </p:spPr>
@@ -16141,7 +16141,7 @@
             <a:avLst/>
           </a:prstGeom>
           <a:solidFill>
-            <a:srgbClr val="10B981"/>
+            <a:srgbClr val="34D399"/>
           </a:solidFill>
           <a:ln/>
         </p:spPr>
@@ -16173,7 +16173,7 @@
             <a:r>
               <a:rPr lang="en-US" sz="1000" b="1" dirty="0">
                 <a:solidFill>
-                  <a:srgbClr val="10B981"/>
+                  <a:srgbClr val="34D399"/>
                 </a:solidFill>
                 <a:latin typeface="Calibri" pitchFamily="34" charset="0"/>
                 <a:ea typeface="Calibri" pitchFamily="34" charset="-122"/>
@@ -16200,7 +16200,7 @@
             <a:avLst/>
           </a:prstGeom>
           <a:solidFill>
-            <a:srgbClr val="22D3EE"/>
+            <a:srgbClr val="2DD4BF"/>
           </a:solidFill>
           <a:ln/>
         </p:spPr>
@@ -16220,7 +16220,7 @@
             <a:avLst/>
           </a:prstGeom>
           <a:solidFill>
-            <a:srgbClr val="22D3EE"/>
+            <a:srgbClr val="2DD4BF"/>
           </a:solidFill>
           <a:ln/>
         </p:spPr>
@@ -16240,7 +16240,7 @@
             <a:avLst/>
           </a:prstGeom>
           <a:solidFill>
-            <a:srgbClr val="22D3EE"/>
+            <a:srgbClr val="2DD4BF"/>
           </a:solidFill>
           <a:ln/>
         </p:spPr>
@@ -16260,7 +16260,7 @@
             <a:avLst/>
           </a:prstGeom>
           <a:solidFill>
-            <a:srgbClr val="22D3EE"/>
+            <a:srgbClr val="2DD4BF"/>
           </a:solidFill>
           <a:ln/>
         </p:spPr>
@@ -16280,7 +16280,7 @@
             <a:avLst/>
           </a:prstGeom>
           <a:solidFill>
-            <a:srgbClr val="22D3EE"/>
+            <a:srgbClr val="2DD4BF"/>
           </a:solidFill>
           <a:ln/>
         </p:spPr>
@@ -16300,7 +16300,7 @@
             <a:avLst/>
           </a:prstGeom>
           <a:solidFill>
-            <a:srgbClr val="22D3EE"/>
+            <a:srgbClr val="2DD4BF"/>
           </a:solidFill>
           <a:ln/>
         </p:spPr>
@@ -16320,7 +16320,7 @@
             <a:avLst/>
           </a:prstGeom>
           <a:solidFill>
-            <a:srgbClr val="22D3EE"/>
+            <a:srgbClr val="2DD4BF"/>
           </a:solidFill>
           <a:ln/>
         </p:spPr>
@@ -16379,7 +16379,7 @@
             <a:avLst/>
           </a:prstGeom>
           <a:solidFill>
-            <a:srgbClr val="F59E0B"/>
+            <a:srgbClr val="FBBF24"/>
           </a:solidFill>
           <a:ln/>
         </p:spPr>
@@ -16588,7 +16588,7 @@
             </a:avLst>
           </a:prstGeom>
           <a:solidFill>
-            <a:srgbClr val="22D3EE"/>
+            <a:srgbClr val="2DD4BF"/>
           </a:solidFill>
           <a:ln/>
         </p:spPr>
@@ -16725,7 +16725,7 @@
             <a:avLst/>
           </a:prstGeom>
           <a:solidFill>
-            <a:srgbClr val="22D3EE"/>
+            <a:srgbClr val="2DD4BF"/>
           </a:solidFill>
           <a:ln/>
         </p:spPr>
@@ -16757,7 +16757,7 @@
             <a:r>
               <a:rPr lang="en-US" sz="1050" b="1" spc="50" kern="0" dirty="0">
                 <a:solidFill>
-                  <a:srgbClr val="22D3EE"/>
+                  <a:srgbClr val="2DD4BF"/>
                 </a:solidFill>
                 <a:latin typeface="Calibri" pitchFamily="34" charset="0"/>
                 <a:ea typeface="Calibri" pitchFamily="34" charset="-122"/>
@@ -16931,7 +16931,7 @@
             <a:avLst/>
           </a:prstGeom>
           <a:solidFill>
-            <a:srgbClr val="22D3EE"/>
+            <a:srgbClr val="2DD4BF"/>
           </a:solidFill>
           <a:ln/>
         </p:spPr>
@@ -17059,7 +17059,7 @@
             <a:avLst/>
           </a:prstGeom>
           <a:solidFill>
-            <a:srgbClr val="3B82F6"/>
+            <a:srgbClr val="38BDF8"/>
           </a:solidFill>
           <a:ln/>
         </p:spPr>
@@ -17187,7 +17187,7 @@
             <a:avLst/>
           </a:prstGeom>
           <a:solidFill>
-            <a:srgbClr val="8B5CF6"/>
+            <a:srgbClr val="A78BFA"/>
           </a:solidFill>
           <a:ln/>
         </p:spPr>
@@ -17315,7 +17315,7 @@
             <a:avLst/>
           </a:prstGeom>
           <a:solidFill>
-            <a:srgbClr val="10B981"/>
+            <a:srgbClr val="34D399"/>
           </a:solidFill>
           <a:ln/>
         </p:spPr>
@@ -17443,7 +17443,7 @@
             <a:avLst/>
           </a:prstGeom>
           <a:solidFill>
-            <a:srgbClr val="F59E0B"/>
+            <a:srgbClr val="FBBF24"/>
           </a:solidFill>
           <a:ln/>
         </p:spPr>
@@ -17571,7 +17571,7 @@
             <a:avLst/>
           </a:prstGeom>
           <a:solidFill>
-            <a:srgbClr val="22D3EE"/>
+            <a:srgbClr val="2DD4BF"/>
           </a:solidFill>
           <a:ln/>
         </p:spPr>
@@ -17719,7 +17719,7 @@
             </a:avLst>
           </a:prstGeom>
           <a:solidFill>
-            <a:srgbClr val="22D3EE"/>
+            <a:srgbClr val="2DD4BF"/>
           </a:solidFill>
           <a:ln/>
         </p:spPr>
@@ -17856,7 +17856,7 @@
             <a:avLst/>
           </a:prstGeom>
           <a:solidFill>
-            <a:srgbClr val="22D3EE"/>
+            <a:srgbClr val="2DD4BF"/>
           </a:solidFill>
           <a:ln/>
         </p:spPr>
@@ -17888,7 +17888,7 @@
             <a:r>
               <a:rPr lang="en-US" sz="1050" b="1" spc="50" kern="0" dirty="0">
                 <a:solidFill>
-                  <a:srgbClr val="22D3EE"/>
+                  <a:srgbClr val="2DD4BF"/>
                 </a:solidFill>
                 <a:latin typeface="Calibri" pitchFamily="34" charset="0"/>
                 <a:ea typeface="Calibri" pitchFamily="34" charset="-122"/>
@@ -18020,7 +18020,7 @@
             <a:avLst/>
           </a:prstGeom>
           <a:solidFill>
-            <a:srgbClr val="10B981"/>
+            <a:srgbClr val="34D399"/>
           </a:solidFill>
           <a:ln/>
         </p:spPr>
@@ -18052,7 +18052,7 @@
             <a:r>
               <a:rPr lang="en-US" sz="1400" b="1" dirty="0">
                 <a:solidFill>
-                  <a:srgbClr val="10B981"/>
+                  <a:srgbClr val="34D399"/>
                 </a:solidFill>
                 <a:latin typeface="Calibri" pitchFamily="34" charset="0"/>
                 <a:ea typeface="Calibri" pitchFamily="34" charset="-122"/>
@@ -18079,7 +18079,7 @@
             <a:avLst/>
           </a:prstGeom>
           <a:solidFill>
-            <a:srgbClr val="10B981"/>
+            <a:srgbClr val="34D399"/>
           </a:solidFill>
           <a:ln/>
         </p:spPr>
@@ -18141,7 +18141,7 @@
             <a:avLst/>
           </a:prstGeom>
           <a:solidFill>
-            <a:srgbClr val="10B981"/>
+            <a:srgbClr val="34D399"/>
           </a:solidFill>
           <a:ln/>
         </p:spPr>
@@ -18203,7 +18203,7 @@
             <a:avLst/>
           </a:prstGeom>
           <a:solidFill>
-            <a:srgbClr val="10B981"/>
+            <a:srgbClr val="34D399"/>
           </a:solidFill>
           <a:ln/>
         </p:spPr>
@@ -18265,7 +18265,7 @@
             <a:avLst/>
           </a:prstGeom>
           <a:solidFill>
-            <a:srgbClr val="10B981"/>
+            <a:srgbClr val="34D399"/>
           </a:solidFill>
           <a:ln/>
         </p:spPr>
@@ -18327,7 +18327,7 @@
             <a:avLst/>
           </a:prstGeom>
           <a:solidFill>
-            <a:srgbClr val="10B981"/>
+            <a:srgbClr val="34D399"/>
           </a:solidFill>
           <a:ln/>
         </p:spPr>
@@ -18389,7 +18389,7 @@
             <a:avLst/>
           </a:prstGeom>
           <a:solidFill>
-            <a:srgbClr val="10B981"/>
+            <a:srgbClr val="34D399"/>
           </a:solidFill>
           <a:ln/>
         </p:spPr>
@@ -18451,7 +18451,7 @@
             <a:avLst/>
           </a:prstGeom>
           <a:solidFill>
-            <a:srgbClr val="10B981"/>
+            <a:srgbClr val="34D399"/>
           </a:solidFill>
           <a:ln/>
         </p:spPr>
@@ -18513,7 +18513,7 @@
             <a:avLst/>
           </a:prstGeom>
           <a:solidFill>
-            <a:srgbClr val="10B981"/>
+            <a:srgbClr val="34D399"/>
           </a:solidFill>
           <a:ln/>
         </p:spPr>
@@ -18602,7 +18602,7 @@
             <a:avLst/>
           </a:prstGeom>
           <a:solidFill>
-            <a:srgbClr val="F59E0B"/>
+            <a:srgbClr val="FBBF24"/>
           </a:solidFill>
           <a:ln/>
         </p:spPr>
@@ -18634,7 +18634,7 @@
             <a:r>
               <a:rPr lang="en-US" sz="1400" b="1" dirty="0">
                 <a:solidFill>
-                  <a:srgbClr val="F59E0B"/>
+                  <a:srgbClr val="FBBF24"/>
                 </a:solidFill>
                 <a:latin typeface="Calibri" pitchFamily="34" charset="0"/>
                 <a:ea typeface="Calibri" pitchFamily="34" charset="-122"/>
@@ -18661,7 +18661,7 @@
             <a:avLst/>
           </a:prstGeom>
           <a:solidFill>
-            <a:srgbClr val="F59E0B"/>
+            <a:srgbClr val="FBBF24"/>
           </a:solidFill>
           <a:ln/>
         </p:spPr>
@@ -18723,7 +18723,7 @@
             <a:avLst/>
           </a:prstGeom>
           <a:solidFill>
-            <a:srgbClr val="22D3EE"/>
+            <a:srgbClr val="2DD4BF"/>
           </a:solidFill>
           <a:ln/>
         </p:spPr>
@@ -18785,7 +18785,7 @@
             <a:avLst/>
           </a:prstGeom>
           <a:solidFill>
-            <a:srgbClr val="F59E0B"/>
+            <a:srgbClr val="FBBF24"/>
           </a:solidFill>
           <a:ln/>
         </p:spPr>
@@ -18847,7 +18847,7 @@
             <a:avLst/>
           </a:prstGeom>
           <a:solidFill>
-            <a:srgbClr val="F59E0B"/>
+            <a:srgbClr val="FBBF24"/>
           </a:solidFill>
           <a:ln/>
         </p:spPr>
@@ -18909,7 +18909,7 @@
             <a:avLst/>
           </a:prstGeom>
           <a:solidFill>
-            <a:srgbClr val="8B5CF6"/>
+            <a:srgbClr val="A78BFA"/>
           </a:solidFill>
           <a:ln/>
         </p:spPr>
@@ -18971,7 +18971,7 @@
             <a:avLst/>
           </a:prstGeom>
           <a:solidFill>
-            <a:srgbClr val="8B5CF6"/>
+            <a:srgbClr val="A78BFA"/>
           </a:solidFill>
           <a:ln/>
         </p:spPr>
@@ -19033,7 +19033,7 @@
             <a:avLst/>
           </a:prstGeom>
           <a:solidFill>
-            <a:srgbClr val="8B5CF6"/>
+            <a:srgbClr val="A78BFA"/>
           </a:solidFill>
           <a:ln/>
         </p:spPr>
@@ -19095,7 +19095,7 @@
             <a:avLst/>
           </a:prstGeom>
           <a:solidFill>
-            <a:srgbClr val="F59E0B"/>
+            <a:srgbClr val="FBBF24"/>
           </a:solidFill>
           <a:ln/>
         </p:spPr>
@@ -19204,7 +19204,7 @@
             </a:avLst>
           </a:prstGeom>
           <a:solidFill>
-            <a:srgbClr val="22D3EE"/>
+            <a:srgbClr val="2DD4BF"/>
           </a:solidFill>
           <a:ln/>
         </p:spPr>
@@ -19341,7 +19341,7 @@
             <a:avLst/>
           </a:prstGeom>
           <a:solidFill>
-            <a:srgbClr val="22D3EE"/>
+            <a:srgbClr val="2DD4BF"/>
           </a:solidFill>
           <a:ln/>
         </p:spPr>
@@ -19373,7 +19373,7 @@
             <a:r>
               <a:rPr lang="en-US" sz="1050" b="1" spc="50" kern="0" dirty="0">
                 <a:solidFill>
-                  <a:srgbClr val="22D3EE"/>
+                  <a:srgbClr val="2DD4BF"/>
                 </a:solidFill>
                 <a:latin typeface="Calibri" pitchFamily="34" charset="0"/>
                 <a:ea typeface="Calibri" pitchFamily="34" charset="-122"/>
@@ -19505,7 +19505,7 @@
             <a:avLst/>
           </a:prstGeom>
           <a:solidFill>
-            <a:srgbClr val="22D3EE"/>
+            <a:srgbClr val="2DD4BF"/>
           </a:solidFill>
           <a:ln/>
         </p:spPr>
@@ -19656,7 +19656,7 @@
             <a:avLst/>
           </a:prstGeom>
           <a:solidFill>
-            <a:srgbClr val="8B5CF6"/>
+            <a:srgbClr val="A78BFA"/>
           </a:solidFill>
           <a:ln/>
         </p:spPr>
@@ -19786,7 +19786,7 @@
           </a:solidFill>
           <a:ln w="12700">
             <a:solidFill>
-              <a:srgbClr val="22D3EE"/>
+              <a:srgbClr val="2DD4BF"/>
             </a:solidFill>
             <a:prstDash val="solid"/>
           </a:ln>
@@ -19822,7 +19822,7 @@
             <a:r>
               <a:rPr lang="en-US" sz="1150" b="1" dirty="0">
                 <a:solidFill>
-                  <a:srgbClr val="22D3EE"/>
+                  <a:srgbClr val="2DD4BF"/>
                 </a:solidFill>
                 <a:latin typeface="Calibri" pitchFamily="34" charset="0"/>
                 <a:ea typeface="Calibri" pitchFamily="34" charset="-122"/>
@@ -19913,7 +19913,7 @@
             </a:avLst>
           </a:prstGeom>
           <a:solidFill>
-            <a:srgbClr val="22D3EE"/>
+            <a:srgbClr val="2DD4BF"/>
           </a:solidFill>
           <a:ln/>
         </p:spPr>
@@ -20050,7 +20050,7 @@
             <a:avLst/>
           </a:prstGeom>
           <a:solidFill>
-            <a:srgbClr val="22D3EE"/>
+            <a:srgbClr val="2DD4BF"/>
           </a:solidFill>
           <a:ln/>
         </p:spPr>
@@ -20082,7 +20082,7 @@
             <a:r>
               <a:rPr lang="en-US" sz="1050" b="1" spc="50" kern="0" dirty="0">
                 <a:solidFill>
-                  <a:srgbClr val="22D3EE"/>
+                  <a:srgbClr val="2DD4BF"/>
                 </a:solidFill>
                 <a:latin typeface="Calibri" pitchFamily="34" charset="0"/>
                 <a:ea typeface="Calibri" pitchFamily="34" charset="-122"/>
@@ -20214,7 +20214,7 @@
             <a:avLst/>
           </a:prstGeom>
           <a:solidFill>
-            <a:srgbClr val="22D3EE"/>
+            <a:srgbClr val="2DD4BF"/>
           </a:solidFill>
           <a:ln/>
         </p:spPr>
@@ -20342,7 +20342,7 @@
             <a:avLst/>
           </a:prstGeom>
           <a:solidFill>
-            <a:srgbClr val="3B82F6"/>
+            <a:srgbClr val="38BDF8"/>
           </a:solidFill>
           <a:ln/>
         </p:spPr>
@@ -20470,7 +20470,7 @@
             <a:avLst/>
           </a:prstGeom>
           <a:solidFill>
-            <a:srgbClr val="8B5CF6"/>
+            <a:srgbClr val="A78BFA"/>
           </a:solidFill>
           <a:ln/>
         </p:spPr>
@@ -20598,7 +20598,7 @@
             <a:avLst/>
           </a:prstGeom>
           <a:solidFill>
-            <a:srgbClr val="10B981"/>
+            <a:srgbClr val="34D399"/>
           </a:solidFill>
           <a:ln/>
         </p:spPr>
@@ -20705,7 +20705,7 @@
           </a:solidFill>
           <a:ln w="9525">
             <a:solidFill>
-              <a:srgbClr val="F59E0B"/>
+              <a:srgbClr val="FBBF24"/>
             </a:solidFill>
             <a:prstDash val="solid"/>
           </a:ln>
@@ -20738,7 +20738,7 @@
             <a:r>
               <a:rPr lang="en-US" sz="1000" b="1" dirty="0">
                 <a:solidFill>
-                  <a:srgbClr val="F59E0B"/>
+                  <a:srgbClr val="FBBF24"/>
                 </a:solidFill>
                 <a:latin typeface="Calibri" pitchFamily="34" charset="0"/>
                 <a:ea typeface="Calibri" pitchFamily="34" charset="-122"/>
@@ -20826,7 +20826,7 @@
             </a:avLst>
           </a:prstGeom>
           <a:solidFill>
-            <a:srgbClr val="22D3EE"/>
+            <a:srgbClr val="2DD4BF"/>
           </a:solidFill>
           <a:ln/>
         </p:spPr>
@@ -20963,7 +20963,7 @@
             <a:avLst/>
           </a:prstGeom>
           <a:solidFill>
-            <a:srgbClr val="22D3EE"/>
+            <a:srgbClr val="2DD4BF"/>
           </a:solidFill>
           <a:ln/>
         </p:spPr>
@@ -20995,7 +20995,7 @@
             <a:r>
               <a:rPr lang="en-US" sz="1050" b="1" spc="50" kern="0" dirty="0">
                 <a:solidFill>
-                  <a:srgbClr val="22D3EE"/>
+                  <a:srgbClr val="2DD4BF"/>
                 </a:solidFill>
                 <a:latin typeface="Calibri" pitchFamily="34" charset="0"/>
                 <a:ea typeface="Calibri" pitchFamily="34" charset="-122"/>
@@ -21127,7 +21127,7 @@
             <a:avLst/>
           </a:prstGeom>
           <a:solidFill>
-            <a:srgbClr val="22D3EE"/>
+            <a:srgbClr val="2DD4BF"/>
           </a:solidFill>
           <a:ln/>
         </p:spPr>
@@ -21273,7 +21273,7 @@
           </a:solidFill>
           <a:ln w="9525">
             <a:solidFill>
-              <a:srgbClr val="22D3EE"/>
+              <a:srgbClr val="2DD4BF"/>
             </a:solidFill>
             <a:prstDash val="solid"/>
           </a:ln>
@@ -21306,7 +21306,7 @@
             <a:r>
               <a:rPr lang="en-US" sz="1000" b="1" dirty="0">
                 <a:solidFill>
-                  <a:srgbClr val="22D3EE"/>
+                  <a:srgbClr val="2DD4BF"/>
                 </a:solidFill>
                 <a:latin typeface="Calibri" pitchFamily="34" charset="0"/>
                 <a:ea typeface="Calibri" pitchFamily="34" charset="-122"/>
@@ -21399,7 +21399,7 @@
             <a:avLst/>
           </a:prstGeom>
           <a:solidFill>
-            <a:srgbClr val="3B82F6"/>
+            <a:srgbClr val="38BDF8"/>
           </a:solidFill>
           <a:ln/>
         </p:spPr>
@@ -21545,7 +21545,7 @@
           </a:solidFill>
           <a:ln w="9525">
             <a:solidFill>
-              <a:srgbClr val="3B82F6"/>
+              <a:srgbClr val="38BDF8"/>
             </a:solidFill>
             <a:prstDash val="solid"/>
           </a:ln>
@@ -21578,7 +21578,7 @@
             <a:r>
               <a:rPr lang="en-US" sz="1000" b="1" dirty="0">
                 <a:solidFill>
-                  <a:srgbClr val="3B82F6"/>
+                  <a:srgbClr val="38BDF8"/>
                 </a:solidFill>
                 <a:latin typeface="Calibri" pitchFamily="34" charset="0"/>
                 <a:ea typeface="Calibri" pitchFamily="34" charset="-122"/>
@@ -21671,7 +21671,7 @@
             <a:avLst/>
           </a:prstGeom>
           <a:solidFill>
-            <a:srgbClr val="8B5CF6"/>
+            <a:srgbClr val="A78BFA"/>
           </a:solidFill>
           <a:ln/>
         </p:spPr>
@@ -21817,7 +21817,7 @@
           </a:solidFill>
           <a:ln w="9525">
             <a:solidFill>
-              <a:srgbClr val="8B5CF6"/>
+              <a:srgbClr val="A78BFA"/>
             </a:solidFill>
             <a:prstDash val="solid"/>
           </a:ln>
@@ -21850,7 +21850,7 @@
             <a:r>
               <a:rPr lang="en-US" sz="1000" b="1" dirty="0">
                 <a:solidFill>
-                  <a:srgbClr val="8B5CF6"/>
+                  <a:srgbClr val="A78BFA"/>
                 </a:solidFill>
                 <a:latin typeface="Calibri" pitchFamily="34" charset="0"/>
                 <a:ea typeface="Calibri" pitchFamily="34" charset="-122"/>
@@ -21943,7 +21943,7 @@
             <a:avLst/>
           </a:prstGeom>
           <a:solidFill>
-            <a:srgbClr val="10B981"/>
+            <a:srgbClr val="34D399"/>
           </a:solidFill>
           <a:ln/>
         </p:spPr>
@@ -22089,7 +22089,7 @@
           </a:solidFill>
           <a:ln w="9525">
             <a:solidFill>
-              <a:srgbClr val="10B981"/>
+              <a:srgbClr val="34D399"/>
             </a:solidFill>
             <a:prstDash val="solid"/>
           </a:ln>
@@ -22122,7 +22122,7 @@
             <a:r>
               <a:rPr lang="en-US" sz="1000" b="1" dirty="0">
                 <a:solidFill>
-                  <a:srgbClr val="10B981"/>
+                  <a:srgbClr val="34D399"/>
                 </a:solidFill>
                 <a:latin typeface="Calibri" pitchFamily="34" charset="0"/>
                 <a:ea typeface="Calibri" pitchFamily="34" charset="-122"/>

--- a/CostVision-3D-CAD-Viewer-Study-and-Roadmap.pptx
+++ b/CostVision-3D-CAD-Viewer-Study-and-Roadmap.pptx
@@ -517,7 +517,7 @@
           <a:p>
             <a:r>
               <a:rPr lang="en-US" dirty="0"/>
-              <a:t>Set the frame in one breath. You looked at a rival should-cost tool and its CAD viewer impressed you — it pulls data straight off the model and it feels like real CAD software. Fair challenge. So I did two things: I audited exactly what our own viewer and geometry engine do today, and I ran verified market research on how the leaders — aPriori, Siemens, and the specialist DFM and drawing-reading tools — actually work. This deck is the honest result: where they're ahead, where we're quietly already strong, and a concrete four-phase plan to close the gap — including the two things you asked for by name, a bigger viewer and a proper CAD-software feel.</a:t>
+              <a:t>This deck started in July as an answer to a fair challenge. Someone had seen a rival should-cost tool and liked its 3D viewer. It felt like real CAD software, and it seemed to pull data straight off the model. So I did two things. I read up on how the leading tools do this, and I went through our own viewer and geometry engine line by line. Since July we have built a good part of that plan. So I've updated the deck to say plainly what is in the tool today and what is still future. One thing to hold on to all the way through. At JLR the AI is switched off. The CAD path runs on measured geometry and plain rules. Where the geometry can't decide something, the tool asks the engineer. Nothing on these slides depends on AI.</a:t>
             </a:r>
             <a:endParaRPr lang="en-US" dirty="0"/>
           </a:p>
@@ -605,7 +605,7 @@
           <a:p>
             <a:r>
               <a:rPr lang="en-US" dirty="0"/>
-              <a:t>Phase zero is where I'd start on Monday, because the return is immediate. Top of the list is your first explicit ask: a bigger, fullscreen viewer — a maximise button, the browser Fullscreen API, a large focus mode and drag-to-resize, so there's finally room to work and to demo. Then three overlays that are almost free because the engine already computes the numbers: paint the wall thickness as a heatmap, shade draft and flag undercuts, and it instantly looks and behaves like a DFM tool. Then a docked feature tree built from the feature table we already have, where clicking a row lights up the face — and the reverse, clicking a cost line in the report highlights the geometry it came from. That last one is quietly powerful: every pound traces to a face. Three of these five are literally just showing work we already did — that's why Phase zero is the highest-leverage slide in the deck.</a:t>
+              <a:t>Phase zero is done, so this slide is really a checklist. The first ask was a bigger viewer. There's now an Expand button that fills the window, and Esc brings you back. To be precise, it fills the browser window rather than switching the whole screen into full-screen mode. Then the three overlays. Wall thickness coloured red for thin and blue for thick. Draft and undercut against a pull direction you choose. And a model tree where clicking a row lights up the faces. Thickness and the tree need a STEP or IGES file, because an STL is just triangles with no face data. Last, the link between the result and the model. Click a face and the matching rows in the result get outlined. If a warning is about specific faces, its show-me button highlights them. It means you can see where a number came from.</a:t>
             </a:r>
             <a:endParaRPr lang="en-US" dirty="0"/>
           </a:p>
@@ -693,7 +693,7 @@
           <a:p>
             <a:r>
               <a:rPr lang="en-US" dirty="0"/>
-              <a:t>Phase one is your second explicit ask made concrete: making it genuinely feel like CAD software. The orientation cube in the corner is the single most recognisable 'this is CAD' signal, so it's first. A real docked feature and model tree — bodies, faces, recognised features, with visibility toggles — gives the professional structure people expect. Exploded view lets you pull an assembly apart and cost each component. Proper multi-plane sectioning with solid caps replaces our single slider. Richer measurement — true face radius, edge length, face-to-face — matches what they'd do in SolidWorks. And the one that ties it to our mission: click a face and see the operation and the pounds it drives. That's the payoff line at the bottom — the viewer stops being a preview and becomes the place engineers actually inspect and understand the cost. That's precisely what impressed you about the rival, and it's a few weeks of focused work, not a rewrite.</a:t>
+              <a:t>Phase one was about making it feel like CAD software, and most of it is in. The orientation cube is in the corner. Click a face of it and the view snaps round. The model tree lists bodies, features and face types, and you can hide bodies. Exploded view pulls a multi-body file apart, and you can move or rotate each component. Section planes work on all three axes at once. What's missing is a solid cap on the cut, so today a sectioned part looks hollow. Measuring is much richer than in July. Distance that snaps to corners and edges, radius from three points, angle, a coordinate read-out, and face-to-face distance. And after a CAD costing, the model is coloured by how much money sits on each face. So the viewer is now somewhere you check the cost. It's still a mesh, though, and it still can't read tolerances.</a:t>
             </a:r>
             <a:endParaRPr lang="en-US" dirty="0"/>
           </a:p>
@@ -781,7 +781,7 @@
           <a:p>
             <a:r>
               <a:rPr lang="en-US" dirty="0"/>
-              <a:t>Phase two is about capturing more so people type less, and it splits in two. On the left, we widen feature recognition beyond today's holes and bosses to fillets, chamfers, slots, ribs, real thread specs, and — importantly — telling machined faces from as-cast ones, plus rescuing the STL path so those uploads aren't cost-blind. Each of those is a field a human no longer fills in. On the right is the real differentiator, and it's the thing Werk24 built a company on: tolerance-driven costing. Today, tolerances only reach us if someone uploads a separate drawing. But OpenCascade's XDE module can read the GD&amp;T straight out of the STEP AP242 file — and tolerances are where cost hides. A tight bore adds a ream or a grind; a fine surface finish adds a polishing op; a flatness callout adds inspection and fixturing; a loose tolerance means a cheaper, faster route. Reading that automatically and mapping it to the process is how you cost a precision part correctly — and almost nobody does it from the 3D model.</a:t>
+              <a:t>Phase two is about capturing more so people type less, and it has only just started. On the left, the engine now finds fillets. It also finds pockets and machined flat faces, but cautiously. They're switched off in the cost until the engineer confirms them, because a wrong pocket adds cost that isn't real. Chamfers, slots, thread specs and rib counts are still to do. So is the STL path. Today, if you upload an STL for a machined part, the tool stops and asks you for a cycle time rather than making one up. On the right is tolerance-driven costing, and this is future work. GD&amp;T means geometric dimensioning and tolerancing. The idea is to read it from the STEP file and let a tight bore add a reaming or grinding step. Today the engineer types the tightest tolerance on the form, and that scales the machining time.</a:t>
             </a:r>
             <a:endParaRPr lang="en-US" dirty="0"/>
           </a:p>
@@ -869,7 +869,7 @@
           <a:p>
             <a:r>
               <a:rPr lang="en-US" dirty="0"/>
-              <a:t>Phase three is the frontier, and I'm putting it last on purpose. Two pieces. First, move the CAD kernel into the browser with occt-import-js so we hold the real geometry, not a server-made mesh — that makes the viewer feel instant and makes every face a true, clickable, costable object. Second, add a graph-neural feature-recognition model of the kind the research validated — the UV-Net and BRepGAT family — which segments machining features per face at benchmark accuracies in the high nineties and catches the compound features our current geometric rules miss. That's what would let us honestly say our recognition rivals aPriori and Siemens. But note the amber box: it's the highest-effort work, and those accuracy numbers are on clean synthetic parts, so it only earns its slot after Phases zero to two have already closed the gap the user can actually see. It's the ceiling, not the floor — and it stays glass-box, because every prediction is just a face a human can verify.</a:t>
+              <a:t>Phase three is research, and I've put it last on purpose. None of it is started. The first idea is to run the CAD kernel inside the browser, so the viewer holds the real faces rather than a mesh the server made. That would make measuring exact and picking a face instant. The second is a learned model that labels machining features face by face. It might catch compound features our rules miss. But I want to be careful here. The accuracy figures in the papers come from clean, synthetic parts. We'd only know whether it helps by testing it on real JLR parts. And it would only ever label features. The money would still be plain arithmetic on rates. At JLR, anything like this would also need AI approval, which we don't have. So this stays a research track until Phase two is done.</a:t>
             </a:r>
             <a:endParaRPr lang="en-US" dirty="0"/>
           </a:p>
@@ -957,7 +957,7 @@
           <a:p>
             <a:r>
               <a:rPr lang="en-US" dirty="0"/>
-              <a:t>This slide is just the two things you asked for, turned into a checklist so we're precise. On the left, 'make it bigger' is really six concrete moves: a maximise button, true browser full-screen, a focus mode that hands the whole workspace to the model, a drag-to-resize handle that remembers your size, panels that reflow so nothing crowds the part, and escape to come back to costing. On the right, 'feel like CAD software' is the orientation cube, a clickable feature tree, the on-model heatmaps, multi-plane sections and exploded view, richer measurement, and clicking a face to see its cost. The left column is Phase zero and the right column is Phases zero and one — so if you approve the plan, both of your asks are in the first fortnight or two of work, not somewhere off in the distance.</a:t>
+              <a:t>This slide takes the two things you asked for and checks them against the tool as it is today. On the left, the bigger viewer. There's an Expand button, Esc brings you back, you can hide the tools bar, drag the toolbar groups into your own order, and resize the model tree. The one thing I'd call not done is true full-screen mode. Today it fills the browser window, which in practice is most of the screen. On the right, the CAD feel. The cube, the model tree, the colour overlays, sections and exploded view, the measuring tools, and cost per face are all in. The honest footnote is the section caps, and that most of the richer features need a STEP or IGES file rather than an STL. So both asks are met. The remaining work is about capture, not the viewer.</a:t>
             </a:r>
             <a:endParaRPr lang="en-US" dirty="0"/>
           </a:p>
@@ -1045,7 +1045,7 @@
           <a:p>
             <a:r>
               <a:rPr lang="en-US" dirty="0"/>
-              <a:t>Let me land it on why this is worth doing and what I'd actually ask for. The benefits stack up in plain terms: more auto-capture means fewer fields typed and faster quotes; capturing a driver instead of typing it removes a place the estimate drifts; on-model DFM catches cost problems at concept while a change is still free; a big CAD-grade viewer wins demos — literally the reaction you had to the competitor; reading tolerances from the model prices precision parts correctly, which is a genuine differentiator; and all of it stays glass-box and on our own secure, learning platform. My recommendation is deliberately modest: approve Phase zero now — the bigger viewer plus painting the data we already compute, one to two weeks — because it delivers both of your asks fastest and de-risks everything after it. Then Phases one and two as a fast-follow, and we green-light the Phase-three research only once the gap you can see is already closed. Small ask, fast proof, compounding payoff. That's the challenge met — happy to start on Phase zero whenever you say go.</a:t>
+              <a:t>Let me finish on why this matters and what I'd do next. The benefits are simple. Every feature we read from the model is a field nobody types, and a measured value can't be mistyped. Thin walls and undercuts show up while a design change is still cheap. And when someone asks where a number came from, you can click the face and show them. I haven't put a time saving or an accuracy figure on any of this, because we haven't measured one. That's the first part of my recommendation. Use what's built on real JLR parts, and log the actual prices you pay, so we find out how close the estimates really are. Then the next build: section caps, chamfers, slots and threads, and a better answer for STL files. Tolerances from the STEP file after that. Phase three stays research until we have a reason to start it.</a:t>
             </a:r>
             <a:endParaRPr lang="en-US" dirty="0"/>
           </a:p>
@@ -1133,7 +1133,7 @@
           <a:p>
             <a:r>
               <a:rPr lang="en-US" dirty="0"/>
-              <a:t>This is the slide that answers the ask directly: what does the tool capture on its own, and where does it go. Left column — every item is measured off the CAD model with nothing typed in; right column — the cost driver it feeds. Volume and weight come straight from the kernel, so material is exact, not guessed; the bounding box sizes the machine and stock; body count gives assembly and BOM scope; the hole-and-boss table becomes drilling operations; wall thickness decides mould and cast feasibility; draft flags undercuts that need tool slides; face areas drive machining and paint area; and there's a first-cut cycle-time estimate. On the right, the real gear we costed — two kilos of gear steel, about twenty-two pounds ex-works from India, all in sterling. And the guardrail underneath: the AI never sets the price. It classifies; the engine does deterministic maths on the geometry, every rate traceable. That's a defensible should-cost, not a black box.</a:t>
+              <a:t>This slide answers the practical question. What does the tool measure on its own, and where does each number go? You can upload STEP, IGES or STL. On the left is what the geometry engine measures, with nothing typed. On the right is the cost input it feeds. Volume and weight give material cost. The bounding box sizes the machine and the stock. The hole table becomes drilling and tapping. Wall thickness helps pick the route, and draft and undercuts drive tooling. For STEP and IGES there's also a machining cycle estimate. The box on the right is the part I like most. When the geometry can't decide, the tool asks you. An STL has no feature table, so it waits for you to type a cycle time. For sheet metal you can add a DXF flat pattern, and the measured blank is used. Thirteen commodities work this way, with no AI.</a:t>
             </a:r>
             <a:endParaRPr lang="en-US" dirty="0"/>
           </a:p>
@@ -1221,7 +1221,7 @@
           <a:p>
             <a:r>
               <a:rPr lang="en-US" dirty="0"/>
-              <a:t>Four takeaways if you remember nothing else. One: the whole industry works the same way — recognise features off the raw geometry, turn them into cost drivers, and keep a human in the loop only to CORRECT the recognition, never to re-type the part. Two — and this surprised me in a good way — we're already strong at the hard part: our engine measures holes, depths, walls, draft and setups and pushes them into the cost. Three: what makes their viewers feel premium isn't magic, it's DFM analysis painted directly on the model, plus a canvas big enough to work in. Four: the plan is bounded and staged — quick wins first, and several of those are just SHOWING data we already compute. This isn't a moonshot; it's mostly finishing what we started.</a:t>
+              <a:t>If you remember four things, make it these. One, the leading tools all work the same way. They find features on the solid model, the B-rep, which just means the exact faces and edges of the part. They turn those features into cost drivers, and a person corrects the result rather than retyping the part. Two, we already had the hard part. Our geometry engine measures the part, and rules turn those measurements into cost inputs. When the geometry can't settle something, like the process route or the material family, the tool asks you. Three, the thing that makes a viewer feel like CAD software is analysis drawn on the model. Most of that is now built. Four, what is left is deeper capture: tolerances from the file, more feature types, and a better answer for STL files. Those are still roadmap, and I'll be clear about that on each slide.</a:t>
             </a:r>
             <a:endParaRPr lang="en-US" dirty="0"/>
           </a:p>
@@ -1309,7 +1309,7 @@
           <a:p>
             <a:r>
               <a:rPr lang="en-US" dirty="0"/>
-              <a:t>This is the mental model for the whole deck. Read left to right: a 3D model comes in; automatic feature recognition reads the geometry and finds the holes, pockets, bends, ribs, undercuts; those features map onto cost drivers — routing, operations, tooling; a human steps in only to fix a mis-read feature, not to re-enter the part; and out comes a bottom-up should-cost. The two cards are the proof, in the vendors' own words. aPriori extracts 'geometric cost drivers' straight off the B-rep — and the tell is that it costs from STEP and Parasolid, which have no feature history, so it MUST be reading raw topology. Siemens ships commodity modules that recognise ribs, undercuts and bends and hand them straight to their costing engine. Note the honest caveat in both: the human corrects the recognition. Nobody is fully hands-off — and that's exactly our glass-box philosophy.</a:t>
+              <a:t>This is the mental model for the rest of the deck. Read it left to right. A 3D model comes in. Software finds the features, the holes, pockets, bends, ribs and undercuts. People call this AFR, automatic feature recognition. Each feature maps to a cost driver, like an operation or a tool. A person steps in only to fix a feature that was read wrong. Out comes a cost you can explain line by line. The two cards are how aPriori and Siemens describe their own tools in public. I haven't tested either of them hands-on, so treat this as their account, not mine. The part I find useful is that both keep a person in the loop to correct the recognition. Nobody claims to be fully hands-off. That matches how we work: the tool measures, and when it isn't sure, it asks.</a:t>
             </a:r>
             <a:endParaRPr lang="en-US" dirty="0"/>
           </a:p>
@@ -1397,7 +1397,7 @@
           <a:p>
             <a:r>
               <a:rPr lang="en-US" dirty="0"/>
-              <a:t>This is the map. Columns are the six capabilities that matter; each row is a tool; a full cyan dot means strong, amber means partial, hollow means limited or absent. A few honest reads. The costing leaders — aPriori, Siemens, MTI Costimator — are strong on B-rep feature recognition and auto-to-cost, which is the expensive part. The best VIEWER experience actually comes from a pure viewer, 3D-Tool, whose on-model heatmaps set the bar. Werk24 owns tolerance and GD&amp;T capture, but from 2D drawings, not the 3D model. Now find our two rows. 'CostVision today' — look where we already have full dots: auto-to-cost and web-native. That's rare; most rivals are desktop. Our hollow dots are on-model overlays, PMI-to-cost, and viewer feel. The bottom row is the plan — and the whole roadmap is simply turning those three hollow dots green without giving up the two we already own.</a:t>
+              <a:t>This is the map. Each column is a capability that matters, each row is a tool. A full cyan dot means strong, amber means partial, and hollow means limited or missing. Please take the other rows as my reading of their public material, not a test. The costing leaders are strong on feature recognition and on going from CAD to cost without retyping. The best pure viewer experience comes from 3D-Tool. Werk24 reads tolerances, but from 2D drawings. Now our row. Since July we've filled in on-model analysis and the CAD feel, so those are full now. Feature recognition is only partial. We find holes, bosses, fillets and some pockets, but not chamfers, slots or thread specs. Tolerances from the CAD file is still empty. The bottom row is what we'd have if the roadmap lands. It is a plan, not a promise.</a:t>
             </a:r>
             <a:endParaRPr lang="en-US" dirty="0"/>
           </a:p>
@@ -1485,7 +1485,7 @@
           <a:p>
             <a:r>
               <a:rPr lang="en-US" dirty="0"/>
-              <a:t>When you said their viewer 'feels like CAD software', this slide is what you were reacting to — and it's learnable, not magic. The single biggest lever is the wall-thickness heatmap: the model lights up thin and thick zones in colour, and an engineer instantly sees the mould or casting risk that drives cost. Same idea for draft and undercut — shade the draft angle per face and flag the areas that can't be pulled from the tool, because those become slide units and real money. Then the everyday verbs: section planes, true measurement, and a feature tree where clicking a row lights up the face — that two-way link between a number and the geometry is what sells it. Add tolerances shown in 3D, and a canvas big enough to actually work in with a smooth orientation cube. None of this is exotic; it's a known, finite list — which is exactly why we can plan it.</a:t>
+              <a:t>When people say a viewer feels like CAD software, this is usually what they mean. It isn't about nicer graphics. It's analysis painted on the model. The biggest one is a wall-thickness heatmap. Thin and thick areas show up in colour, and you can see moulding or casting risk straight away. Then draft and undercut. You shade each face by how well it releases from the tool, and undercuts show up in red, because they need slides and slides cost money. Then the everyday actions: cut planes, measuring, and a model tree where clicking a row lights up the faces. Most of these are now in our viewer, and each card says so. The one we don't have is tolerances shown on the model. PMI just means product manufacturing information, the tolerances and notes stored in the CAD file. We can't read those yet.</a:t>
             </a:r>
             <a:endParaRPr lang="en-US" dirty="0"/>
           </a:p>
@@ -1573,7 +1573,7 @@
           <a:p>
             <a:r>
               <a:rPr lang="en-US" dirty="0"/>
-              <a:t>I want to be straight with you, because credibility depends on it. On the left is what we already do well, and it's genuinely a lot: a real OCCT geometry engine that measures holes with depths, walls, draft and setups, and crucially auto-fills the cost form so nobody re-types the part — plus it runs right in the browser. That's the hard, expensive machinery, and it's built. On the right are the honest gaps, and I've colour-tagged them. The amber ones are the viewer experience — no bigger view, no feature tree, no orientation cube — which is exactly what you flagged. The cyan one is the most embarrassing and the most encouraging: we already COMPUTE wall thickness and draft, we just never draw them on the model. The violet ones are capture depth — fillets, chamfers, and especially tolerances from the CAD file. So the gap isn't 'we're behind on everything'; it's 'we hid our best work and skipped the shop window.'</a:t>
+              <a:t>I want to be straight about where we are, because the rest of the deck depends on it. On the left is what's in the tool today, and I checked each line against the code. The geometry engine is OpenCASCADE, an open-source CAD kernel. It measures the part, finds holes, bosses and fillets, and for STEP files it builds up a machining cycle time. The viewer now has the cube, the model tree, sections, exploded view, and colours for thickness, draft and cost per face. On the right is what's still open. The big ones are capture. We don't read tolerances from the CAD file. STL files have no feature table, so the tool stops and asks you for a cycle time rather than invent one. And there's one gap that matters more than any feature. We have not yet compared an estimate with a price JLR actually paid.</a:t>
             </a:r>
             <a:endParaRPr lang="en-US" dirty="0"/>
           </a:p>
@@ -1661,7 +1661,7 @@
           <a:p>
             <a:r>
               <a:rPr lang="en-US" dirty="0"/>
-              <a:t>If the last slide was the diagnosis, this is the prescription, and it's two sentences. First: we already measure it, we just don't show it. Thickness, draft, undercuts, setups — all computed, all discarded visually. Painting them onto the model is the best value-to-effort ratio in the entire plan, because the hard work is already done. Second: capture more so users type less. Every feature we can read off the CAD — a fillet, a chamfer, a thread, a tolerance from the STEP file — is a field a human doesn't fill in and a place the number can't drift. And the principle at the bottom keeps us honest: the viewer isn't eye-candy, it's an input-capture surface, and every pixel has to either capture a cost driver or let a human check one. Same glass-box rule as everything else — the AI reads the geometry, it never sets the price in secret.</a:t>
+              <a:t>The whole plan comes down to two ideas. The first one is mostly done. In July the engine was already working out wall thickness, draft and undercuts, and then throwing them away as far as the viewer was concerned. Now they're coloured on the model, along with the cost per face after you run a costing. That was cheap to build because the numbers already existed. The second idea is still ahead of us. Every feature we can read from the CAD file is a field nobody has to type. Tolerances, chamfers, slots and threads are next. Until we can read them, the tool asks the engineer, and I think that's the right default. And the rule at the bottom doesn't change. The viewer is there to capture and check inputs. The tool measures and calculates. AI never sets a price, and at JLR it's switched off anyway.</a:t>
             </a:r>
             <a:endParaRPr lang="en-US" dirty="0"/>
           </a:p>
@@ -1749,7 +1749,7 @@
           <a:p>
             <a:r>
               <a:rPr lang="en-US" dirty="0"/>
-              <a:t>The good news is none of this needs inventing — it's all published and buildable, and we already run the same kernel on the server. Four building blocks. First, occt-import-js: OpenCascade compiled to WebAssembly, so we can open a STEP file right in the browser and — critically — its output maps every mesh triangle back to the original CAD face, which is what lets you click one face and link it to a cost driver, live. Second, OCCT's XDE module reads GD&amp;T and tolerances straight out of STEP AP242 — that's tolerance capture from the 3D file itself, no separate drawing. Third, native B-rep feature recognition — the UV-Net and BRepGAT family — hits 98–99% on public benchmarks by reading the geometry as a graph. And fourth, the heatmaps are textbook; we already compute the numbers. But note the caveat in amber: those accuracy numbers are on clean synthetic parts, and vendor claims are marketing — real CAD is messy — so we keep the human correction step. Honesty is the moat.</a:t>
+              <a:t>None of the future work needs inventing. It's all published, and most of it is open source. First, occt-import-js. It's the same CAD kernel we run on the server, compiled to run inside a web page. It could open a STEP file in the browser and tie every triangle back to its original face. Second, the kernel has a module that reads tolerances from STEP AP242 files. AP242 is the newer STEP standard that can carry tolerances inside the 3D file. Third, there's academic work on learned feature recognition. Those papers report 98 to 99 percent on public benchmarks. Please don't read that as a number for us. It's research on clean, synthetic parts, and real CAD is messier. So a person would still check the result. Fourth, the heatmap methods are textbook, and we already use them. So this slide is options, not commitments.</a:t>
             </a:r>
             <a:endParaRPr lang="en-US" dirty="0"/>
           </a:p>
@@ -1837,7 +1837,7 @@
           <a:p>
             <a:r>
               <a:rPr lang="en-US" dirty="0"/>
-              <a:t>Here's the shape of the build, and the sequencing is deliberate. Phase zero is the quick wins — make the viewer bigger and paint the data we already compute — one to two weeks, and it's the best value for effort in the plan. Phase one is the CAD-software feel you asked for: feature tree, orientation cube, exploded view, better section and measure, and clicking a face to see its cost. Phase two goes deeper on capture — recognising fillets, chamfers, slots and threads, and reading tolerances straight from the STEP file to drive cost, which is how the leaders handle precision parts. Phase three is the research frontier — a browser-side CAD kernel and graph-neural feature recognition that would put us level with aPriori and Siemens on recognition. The key message: each phase ships on its own, so value lands early — and the two things you named specifically are the first two phases, not the last.</a:t>
+              <a:t>Here's the plan from July, with where each phase stands today. Phase zero was the quick wins. Make the viewer bigger, and draw the data the engine already measured. That's built. Phase one was the CAD-software feel. The cube, exploded view, sections, better measuring, and colouring the model by cost. That's mostly built. The one piece left is solid caps on a section cut, so a sliced part looks solid rather than hollow. Phase two is deeper capture, and it has only just started. We find fillets, and pockets in a cautious way. Chamfers, slots, thread specs, anything on STL, and tolerances from the file are all still to do. Phase three is research. A CAD kernel in the browser and learned recognition. It's not started and I'm not committing to it. The good news is that both of the things you asked for are now in the tool.</a:t>
             </a:r>
             <a:endParaRPr lang="en-US" dirty="0"/>
           </a:p>
@@ -2552,7 +2552,7 @@
               <a:buNone/>
             </a:pPr>
             <a:r>
-              <a:rPr lang="en-US" sz="700" spc="150" kern="0" dirty="0">
+              <a:rPr lang="en-US" sz="750" spc="150" kern="0" dirty="0">
                 <a:solidFill>
                   <a:srgbClr val="5C6B85"/>
                 </a:solidFill>
@@ -2562,7 +2562,7 @@
               </a:rPr>
               <a:t>CAD-TO-COST  INTELLIGENCE</a:t>
             </a:r>
-            <a:endParaRPr lang="en-US" sz="700" dirty="0"/>
+            <a:endParaRPr lang="en-US" sz="750" dirty="0"/>
           </a:p>
         </p:txBody>
       </p:sp>
@@ -2574,24 +2574,24 @@
         </p:nvSpPr>
         <p:spPr>
           <a:xfrm>
-            <a:off x="640080" y="1965960"/>
-            <a:ext cx="10972800" cy="822960"/>
-          </a:xfrm>
-          <a:prstGeom prst="rect">
-            <a:avLst/>
-          </a:prstGeom>
-          <a:noFill/>
-          <a:ln/>
-        </p:spPr>
-        <p:txBody>
-          <a:bodyPr wrap="square" lIns="0" tIns="0" rIns="0" bIns="0" rtlCol="0" anchor="t"/>
-          <a:lstStyle/>
-          <a:p>
-            <a:pPr indent="0" marL="0">
-              <a:buNone/>
-            </a:pPr>
-            <a:r>
-              <a:rPr lang="en-US" sz="4000" b="1" dirty="0">
+            <a:off x="640080" y="2011680"/>
+            <a:ext cx="11155680" cy="822960"/>
+          </a:xfrm>
+          <a:prstGeom prst="rect">
+            <a:avLst/>
+          </a:prstGeom>
+          <a:noFill/>
+          <a:ln/>
+        </p:spPr>
+        <p:txBody>
+          <a:bodyPr wrap="square" lIns="0" tIns="0" rIns="0" bIns="0" rtlCol="0" anchor="t"/>
+          <a:lstStyle/>
+          <a:p>
+            <a:pPr indent="0" marL="0">
+              <a:buNone/>
+            </a:pPr>
+            <a:r>
+              <a:rPr lang="en-US" sz="3400" b="1" dirty="0">
                 <a:solidFill>
                   <a:srgbClr val="EAF0F8"/>
                 </a:solidFill>
@@ -2601,7 +2601,7 @@
               </a:rPr>
               <a:t>The 3D Viewer — and the Data It Captures</a:t>
             </a:r>
-            <a:endParaRPr lang="en-US" sz="4000" dirty="0"/>
+            <a:endParaRPr lang="en-US" sz="3400" dirty="0"/>
           </a:p>
         </p:txBody>
       </p:sp>
@@ -2661,7 +2661,7 @@
                 <a:ea typeface="Calibri" pitchFamily="34" charset="-122"/>
                 <a:cs typeface="Calibri" pitchFamily="34" charset="-120"/>
               </a:rPr>
-              <a:t>A competitive study of how the best should-cost tools turn CAD into cost automatically — and a build plan to make our 3D viewer feel like real CAD software.</a:t>
+              <a:t>How leading should-cost tools turn CAD into cost, what our viewer and geometry engine do today, and what is still to build.</a:t>
             </a:r>
             <a:endParaRPr lang="en-US" sz="1500" dirty="0"/>
           </a:p>
@@ -2742,7 +2742,7 @@
         <p:spPr>
           <a:xfrm>
             <a:off x="2190902" y="4160520"/>
-            <a:ext cx="1331366" cy="365760"/>
+            <a:ext cx="1510589" cy="365760"/>
           </a:xfrm>
           <a:prstGeom prst="roundRect">
             <a:avLst>
@@ -2769,7 +2769,7 @@
         <p:spPr>
           <a:xfrm>
             <a:off x="2190902" y="4160520"/>
-            <a:ext cx="1331366" cy="365760"/>
+            <a:ext cx="1510589" cy="365760"/>
           </a:xfrm>
           <a:prstGeom prst="rect">
             <a:avLst/>
@@ -2793,7 +2793,7 @@
                 <a:ea typeface="Calibri" pitchFamily="34" charset="-122"/>
                 <a:cs typeface="Calibri" pitchFamily="34" charset="-120"/>
               </a:rPr>
-              <a:t>Gap analysis</a:t>
+              <a:t>Where we stand</a:t>
             </a:r>
             <a:endParaRPr lang="en-US" sz="1000" dirty="0"/>
           </a:p>
@@ -2807,8 +2807,8 @@
         </p:nvSpPr>
         <p:spPr>
           <a:xfrm>
-            <a:off x="3723437" y="4160520"/>
-            <a:ext cx="1600200" cy="365760"/>
+            <a:off x="3902659" y="4160520"/>
+            <a:ext cx="883310" cy="365760"/>
           </a:xfrm>
           <a:prstGeom prst="roundRect">
             <a:avLst>
@@ -2834,8 +2834,8 @@
         </p:nvSpPr>
         <p:spPr>
           <a:xfrm>
-            <a:off x="3723437" y="4160520"/>
-            <a:ext cx="1600200" cy="365760"/>
+            <a:off x="3902659" y="4160520"/>
+            <a:ext cx="883310" cy="365760"/>
           </a:xfrm>
           <a:prstGeom prst="rect">
             <a:avLst/>
@@ -2859,7 +2859,7 @@
                 <a:ea typeface="Calibri" pitchFamily="34" charset="-122"/>
                 <a:cs typeface="Calibri" pitchFamily="34" charset="-120"/>
               </a:rPr>
-              <a:t>4-phase roadmap</a:t>
+              <a:t>Roadmap</a:t>
             </a:r>
             <a:endParaRPr lang="en-US" sz="1000" dirty="0"/>
           </a:p>
@@ -2873,8 +2873,8 @@
         </p:nvSpPr>
         <p:spPr>
           <a:xfrm>
-            <a:off x="5524805" y="4160520"/>
-            <a:ext cx="2406701" cy="365760"/>
+            <a:off x="4987138" y="4160520"/>
+            <a:ext cx="1779422" cy="365760"/>
           </a:xfrm>
           <a:prstGeom prst="roundRect">
             <a:avLst>
@@ -2900,8 +2900,8 @@
         </p:nvSpPr>
         <p:spPr>
           <a:xfrm>
-            <a:off x="5524805" y="4160520"/>
-            <a:ext cx="2406701" cy="365760"/>
+            <a:off x="4987138" y="4160520"/>
+            <a:ext cx="1779422" cy="365760"/>
           </a:xfrm>
           <a:prstGeom prst="rect">
             <a:avLst/>
@@ -2925,7 +2925,7 @@
                 <a:ea typeface="Calibri" pitchFamily="34" charset="-122"/>
                 <a:cs typeface="Calibri" pitchFamily="34" charset="-120"/>
               </a:rPr>
-              <a:t>Bigger, CAD-grade viewer</a:t>
+              <a:t>What is built now</a:t>
             </a:r>
             <a:endParaRPr lang="en-US" sz="1000" dirty="0"/>
           </a:p>
@@ -2964,7 +2964,7 @@
                 <a:ea typeface="Calibri" pitchFamily="34" charset="-122"/>
                 <a:cs typeface="Calibri" pitchFamily="34" charset="-120"/>
               </a:rPr>
-              <a:t>CostVision  ·  Cost Engineering &amp; Digital Innovation  ·  July 2026</a:t>
+              <a:t>CostVision  ·  Cost Engineering &amp; Digital Innovation  ·  Study July 2026, updated September 2026</a:t>
             </a:r>
             <a:endParaRPr lang="en-US" sz="1100" dirty="0"/>
           </a:p>
@@ -3140,7 +3140,7 @@
               <a:buNone/>
             </a:pPr>
             <a:r>
-              <a:rPr lang="en-US" sz="700" spc="150" kern="0" dirty="0">
+              <a:rPr lang="en-US" sz="750" spc="150" kern="0" dirty="0">
                 <a:solidFill>
                   <a:srgbClr val="5C6B85"/>
                 </a:solidFill>
@@ -3150,7 +3150,7 @@
               </a:rPr>
               <a:t>CAD-TO-COST  INTELLIGENCE</a:t>
             </a:r>
-            <a:endParaRPr lang="en-US" sz="700" dirty="0"/>
+            <a:endParaRPr lang="en-US" sz="750" dirty="0"/>
           </a:p>
         </p:txBody>
       </p:sp>
@@ -3207,7 +3207,7 @@
                 <a:ea typeface="Calibri" pitchFamily="34" charset="-122"/>
                 <a:cs typeface="Calibri" pitchFamily="34" charset="-120"/>
               </a:rPr>
-              <a:t>ROADMAP · ~1–2 WEEKS · HIGHEST LEVERAGE</a:t>
+              <a:t>ROADMAP · BUILT</a:t>
             </a:r>
             <a:endParaRPr lang="en-US" sz="1050" dirty="0"/>
           </a:p>
@@ -3285,7 +3285,7 @@
                 <a:ea typeface="Calibri" pitchFamily="34" charset="-122"/>
                 <a:cs typeface="Calibri" pitchFamily="34" charset="-120"/>
               </a:rPr>
-              <a:t>CostVision  ·  Competitive study &amp; build plan  ·  Confidential</a:t>
+              <a:t>CostVision  ·  CAD viewer study &amp; roadmap  ·  Updated September 2026  ·  Confidential</a:t>
             </a:r>
             <a:endParaRPr lang="en-US" sz="750" dirty="0"/>
           </a:p>
@@ -3324,7 +3324,7 @@
                 <a:ea typeface="Calibri" pitchFamily="34" charset="-122"/>
                 <a:cs typeface="Calibri" pitchFamily="34" charset="-120"/>
               </a:rPr>
-              <a:t>Everything here is high-value and low-risk — three of the five are just SHOWING data the engine already produces.</a:t>
+              <a:t>All five quick wins from the July plan are now in the tool. Three of them only needed us to draw data the engine already measured.</a:t>
             </a:r>
             <a:endParaRPr lang="en-US" sz="1150" dirty="0"/>
           </a:p>
@@ -3338,7 +3338,7 @@
         </p:nvSpPr>
         <p:spPr>
           <a:xfrm>
-            <a:off x="411480" y="2240280"/>
+            <a:off x="411480" y="2194560"/>
             <a:ext cx="11384280" cy="786384"/>
           </a:xfrm>
           <a:prstGeom prst="roundRect">
@@ -3365,7 +3365,7 @@
         </p:nvSpPr>
         <p:spPr>
           <a:xfrm>
-            <a:off x="411480" y="2240280"/>
+            <a:off x="411480" y="2194560"/>
             <a:ext cx="54864" cy="786384"/>
           </a:xfrm>
           <a:prstGeom prst="rect">
@@ -3385,7 +3385,7 @@
         </p:nvSpPr>
         <p:spPr>
           <a:xfrm>
-            <a:off x="603504" y="2331720"/>
+            <a:off x="603504" y="2286000"/>
             <a:ext cx="2880360" cy="603504"/>
           </a:xfrm>
           <a:prstGeom prst="rect">
@@ -3413,7 +3413,7 @@
                 <a:ea typeface="Calibri" pitchFamily="34" charset="-122"/>
                 <a:cs typeface="Calibri" pitchFamily="34" charset="-120"/>
               </a:rPr>
-              <a:t>Bigger / fullscreen viewer</a:t>
+              <a:t>Bigger viewer</a:t>
             </a:r>
             <a:endParaRPr lang="en-US" sz="1100" dirty="0"/>
           </a:p>
@@ -3427,7 +3427,7 @@
         </p:nvSpPr>
         <p:spPr>
           <a:xfrm>
-            <a:off x="3611880" y="2313432"/>
+            <a:off x="3611880" y="2267712"/>
             <a:ext cx="4892040" cy="658368"/>
           </a:xfrm>
           <a:prstGeom prst="rect">
@@ -3447,7 +3447,7 @@
               <a:buNone/>
             </a:pPr>
             <a:r>
-              <a:rPr lang="en-US" sz="930" dirty="0">
+              <a:rPr lang="en-US" sz="950" dirty="0">
                 <a:solidFill>
                   <a:srgbClr val="9AA7BD"/>
                 </a:solidFill>
@@ -3455,9 +3455,9 @@
                 <a:ea typeface="Calibri" pitchFamily="34" charset="-122"/>
                 <a:cs typeface="Calibri" pitchFamily="34" charset="-120"/>
               </a:rPr>
-              <a:t>Maximise button + Fullscreen API + a large "focus" mode and drag-to-resize. Directly the ask: room to work.</a:t>
-            </a:r>
-            <a:endParaRPr lang="en-US" sz="930" dirty="0"/>
+              <a:t>An Expand button fills the window with the model. Esc takes you back to the costing layout.</a:t>
+            </a:r>
+            <a:endParaRPr lang="en-US" sz="950" dirty="0"/>
           </a:p>
         </p:txBody>
       </p:sp>
@@ -3469,7 +3469,7 @@
         </p:nvSpPr>
         <p:spPr>
           <a:xfrm>
-            <a:off x="8686800" y="2313432"/>
+            <a:off x="8686800" y="2267712"/>
             <a:ext cx="2971800" cy="658368"/>
           </a:xfrm>
           <a:prstGeom prst="rect">
@@ -3497,7 +3497,7 @@
                 <a:ea typeface="Calibri" pitchFamily="34" charset="-122"/>
                 <a:cs typeface="Calibri" pitchFamily="34" charset="-120"/>
               </a:rPr>
-              <a:t>→ Instantly a serious tool; better demos &amp; inspection</a:t>
+              <a:t>Built. It fills the browser window; it does not use the operating system's full-screen mode.</a:t>
             </a:r>
             <a:endParaRPr lang="en-US" sz="900" dirty="0"/>
           </a:p>
@@ -3511,7 +3511,7 @@
         </p:nvSpPr>
         <p:spPr>
           <a:xfrm>
-            <a:off x="411480" y="3099816"/>
+            <a:off x="411480" y="3035808"/>
             <a:ext cx="11384280" cy="786384"/>
           </a:xfrm>
           <a:prstGeom prst="roundRect">
@@ -3538,7 +3538,7 @@
         </p:nvSpPr>
         <p:spPr>
           <a:xfrm>
-            <a:off x="411480" y="3099816"/>
+            <a:off x="411480" y="3035808"/>
             <a:ext cx="54864" cy="786384"/>
           </a:xfrm>
           <a:prstGeom prst="rect">
@@ -3558,7 +3558,7 @@
         </p:nvSpPr>
         <p:spPr>
           <a:xfrm>
-            <a:off x="603504" y="3191256"/>
+            <a:off x="603504" y="3127248"/>
             <a:ext cx="2880360" cy="603504"/>
           </a:xfrm>
           <a:prstGeom prst="rect">
@@ -3600,7 +3600,7 @@
         </p:nvSpPr>
         <p:spPr>
           <a:xfrm>
-            <a:off x="3611880" y="3172968"/>
+            <a:off x="3611880" y="3108960"/>
             <a:ext cx="4892040" cy="658368"/>
           </a:xfrm>
           <a:prstGeom prst="rect">
@@ -3620,7 +3620,7 @@
               <a:buNone/>
             </a:pPr>
             <a:r>
-              <a:rPr lang="en-US" sz="930" dirty="0">
+              <a:rPr lang="en-US" sz="950" dirty="0">
                 <a:solidFill>
                   <a:srgbClr val="9AA7BD"/>
                 </a:solidFill>
@@ -3628,9 +3628,9 @@
                 <a:ea typeface="Calibri" pitchFamily="34" charset="-122"/>
                 <a:cs typeface="Calibri" pitchFamily="34" charset="-120"/>
               </a:rPr>
-              <a:t>Render the thickness we ALREADY compute as a colour map on the model, with a legend.</a:t>
-            </a:r>
-            <a:endParaRPr lang="en-US" sz="930" dirty="0"/>
+              <a:t>Per-face thickness from the geometry engine, coloured from thin (red) to thick (blue).</a:t>
+            </a:r>
+            <a:endParaRPr lang="en-US" sz="950" dirty="0"/>
           </a:p>
         </p:txBody>
       </p:sp>
@@ -3642,7 +3642,7 @@
         </p:nvSpPr>
         <p:spPr>
           <a:xfrm>
-            <a:off x="8686800" y="3172968"/>
+            <a:off x="8686800" y="3108960"/>
             <a:ext cx="2971800" cy="658368"/>
           </a:xfrm>
           <a:prstGeom prst="rect">
@@ -3670,7 +3670,7 @@
                 <a:ea typeface="Calibri" pitchFamily="34" charset="-122"/>
                 <a:cs typeface="Calibri" pitchFamily="34" charset="-120"/>
               </a:rPr>
-              <a:t>→ Thin-wall cost/mould risk visible at a glance</a:t>
+              <a:t>Built. STEP and IGES only; an STL has no per-face data.</a:t>
             </a:r>
             <a:endParaRPr lang="en-US" sz="900" dirty="0"/>
           </a:p>
@@ -3684,7 +3684,7 @@
         </p:nvSpPr>
         <p:spPr>
           <a:xfrm>
-            <a:off x="411480" y="3959352"/>
+            <a:off x="411480" y="3877056"/>
             <a:ext cx="11384280" cy="786384"/>
           </a:xfrm>
           <a:prstGeom prst="roundRect">
@@ -3711,7 +3711,7 @@
         </p:nvSpPr>
         <p:spPr>
           <a:xfrm>
-            <a:off x="411480" y="3959352"/>
+            <a:off x="411480" y="3877056"/>
             <a:ext cx="54864" cy="786384"/>
           </a:xfrm>
           <a:prstGeom prst="rect">
@@ -3731,7 +3731,7 @@
         </p:nvSpPr>
         <p:spPr>
           <a:xfrm>
-            <a:off x="603504" y="4050792"/>
+            <a:off x="603504" y="3968496"/>
             <a:ext cx="2880360" cy="603504"/>
           </a:xfrm>
           <a:prstGeom prst="rect">
@@ -3759,7 +3759,7 @@
                 <a:ea typeface="Calibri" pitchFamily="34" charset="-122"/>
                 <a:cs typeface="Calibri" pitchFamily="34" charset="-120"/>
               </a:rPr>
-              <a:t>Draft / undercut overlay</a:t>
+              <a:t>Draft / undercut view</a:t>
             </a:r>
             <a:endParaRPr lang="en-US" sz="1100" dirty="0"/>
           </a:p>
@@ -3773,7 +3773,7 @@
         </p:nvSpPr>
         <p:spPr>
           <a:xfrm>
-            <a:off x="3611880" y="4032504"/>
+            <a:off x="3611880" y="3950208"/>
             <a:ext cx="4892040" cy="658368"/>
           </a:xfrm>
           <a:prstGeom prst="rect">
@@ -3793,7 +3793,7 @@
               <a:buNone/>
             </a:pPr>
             <a:r>
-              <a:rPr lang="en-US" sz="930" dirty="0">
+              <a:rPr lang="en-US" sz="950" dirty="0">
                 <a:solidFill>
                   <a:srgbClr val="9AA7BD"/>
                 </a:solidFill>
@@ -3801,9 +3801,9 @@
                 <a:ea typeface="Calibri" pitchFamily="34" charset="-122"/>
                 <a:cs typeface="Calibri" pitchFamily="34" charset="-120"/>
               </a:rPr>
-              <a:t>Shade draft angle per face; flag undercuts (data already computed) → tooling drivers.</a:t>
-            </a:r>
-            <a:endParaRPr lang="en-US" sz="930" dirty="0"/>
+              <a:t>Faces shaded by draft against a chosen pull direction (X, Y or Z). Undercuts show in red.</a:t>
+            </a:r>
+            <a:endParaRPr lang="en-US" sz="950" dirty="0"/>
           </a:p>
         </p:txBody>
       </p:sp>
@@ -3815,7 +3815,7 @@
         </p:nvSpPr>
         <p:spPr>
           <a:xfrm>
-            <a:off x="8686800" y="4032504"/>
+            <a:off x="8686800" y="3950208"/>
             <a:ext cx="2971800" cy="658368"/>
           </a:xfrm>
           <a:prstGeom prst="rect">
@@ -3843,7 +3843,7 @@
                 <a:ea typeface="Calibri" pitchFamily="34" charset="-122"/>
                 <a:cs typeface="Calibri" pitchFamily="34" charset="-120"/>
               </a:rPr>
-              <a:t>→ DFM at concept; explains die/slide cost</a:t>
+              <a:t>Built. Works on any file, as it uses the mesh.</a:t>
             </a:r>
             <a:endParaRPr lang="en-US" sz="900" dirty="0"/>
           </a:p>
@@ -3857,7 +3857,7 @@
         </p:nvSpPr>
         <p:spPr>
           <a:xfrm>
-            <a:off x="411480" y="4818888"/>
+            <a:off x="411480" y="4718304"/>
             <a:ext cx="11384280" cy="786384"/>
           </a:xfrm>
           <a:prstGeom prst="roundRect">
@@ -3884,7 +3884,7 @@
         </p:nvSpPr>
         <p:spPr>
           <a:xfrm>
-            <a:off x="411480" y="4818888"/>
+            <a:off x="411480" y="4718304"/>
             <a:ext cx="54864" cy="786384"/>
           </a:xfrm>
           <a:prstGeom prst="rect">
@@ -3904,7 +3904,7 @@
         </p:nvSpPr>
         <p:spPr>
           <a:xfrm>
-            <a:off x="603504" y="4910328"/>
+            <a:off x="603504" y="4809744"/>
             <a:ext cx="2880360" cy="603504"/>
           </a:xfrm>
           <a:prstGeom prst="rect">
@@ -3932,7 +3932,7 @@
                 <a:ea typeface="Calibri" pitchFamily="34" charset="-122"/>
                 <a:cs typeface="Calibri" pitchFamily="34" charset="-120"/>
               </a:rPr>
-              <a:t>Persistent feature tree</a:t>
+              <a:t>Model tree</a:t>
             </a:r>
             <a:endParaRPr lang="en-US" sz="1100" dirty="0"/>
           </a:p>
@@ -3946,7 +3946,7 @@
         </p:nvSpPr>
         <p:spPr>
           <a:xfrm>
-            <a:off x="3611880" y="4892040"/>
+            <a:off x="3611880" y="4791456"/>
             <a:ext cx="4892040" cy="658368"/>
           </a:xfrm>
           <a:prstGeom prst="rect">
@@ -3966,7 +3966,7 @@
               <a:buNone/>
             </a:pPr>
             <a:r>
-              <a:rPr lang="en-US" sz="930" dirty="0">
+              <a:rPr lang="en-US" sz="950" dirty="0">
                 <a:solidFill>
                   <a:srgbClr val="9AA7BD"/>
                 </a:solidFill>
@@ -3974,9 +3974,9 @@
                 <a:ea typeface="Calibri" pitchFamily="34" charset="-122"/>
                 <a:cs typeface="Calibri" pitchFamily="34" charset="-120"/>
               </a:rPr>
-              <a:t>Turn the existing feature table into a docked tree; click a row → highlight the face.</a:t>
-            </a:r>
-            <a:endParaRPr lang="en-US" sz="930" dirty="0"/>
+              <a:t>Bodies, features and face types. Click a row and its faces light up; show or hide each body.</a:t>
+            </a:r>
+            <a:endParaRPr lang="en-US" sz="950" dirty="0"/>
           </a:p>
         </p:txBody>
       </p:sp>
@@ -3988,7 +3988,7 @@
         </p:nvSpPr>
         <p:spPr>
           <a:xfrm>
-            <a:off x="8686800" y="4892040"/>
+            <a:off x="8686800" y="4791456"/>
             <a:ext cx="2971800" cy="658368"/>
           </a:xfrm>
           <a:prstGeom prst="rect">
@@ -4016,7 +4016,7 @@
                 <a:ea typeface="Calibri" pitchFamily="34" charset="-122"/>
                 <a:cs typeface="Calibri" pitchFamily="34" charset="-120"/>
               </a:rPr>
-              <a:t>→ Two-way link between the number and the geometry</a:t>
+              <a:t>Built. STEP and IGES only.</a:t>
             </a:r>
             <a:endParaRPr lang="en-US" sz="900" dirty="0"/>
           </a:p>
@@ -4030,7 +4030,7 @@
         </p:nvSpPr>
         <p:spPr>
           <a:xfrm>
-            <a:off x="411480" y="5678424"/>
+            <a:off x="411480" y="5559552"/>
             <a:ext cx="11384280" cy="786384"/>
           </a:xfrm>
           <a:prstGeom prst="roundRect">
@@ -4057,7 +4057,7 @@
         </p:nvSpPr>
         <p:spPr>
           <a:xfrm>
-            <a:off x="411480" y="5678424"/>
+            <a:off x="411480" y="5559552"/>
             <a:ext cx="54864" cy="786384"/>
           </a:xfrm>
           <a:prstGeom prst="rect">
@@ -4077,7 +4077,7 @@
         </p:nvSpPr>
         <p:spPr>
           <a:xfrm>
-            <a:off x="603504" y="5769864"/>
+            <a:off x="603504" y="5650992"/>
             <a:ext cx="2880360" cy="603504"/>
           </a:xfrm>
           <a:prstGeom prst="rect">
@@ -4105,7 +4105,7 @@
                 <a:ea typeface="Calibri" pitchFamily="34" charset="-122"/>
                 <a:cs typeface="Calibri" pitchFamily="34" charset="-120"/>
               </a:rPr>
-              <a:t>Two-way report ↔ model link</a:t>
+              <a:t>Result ↔ model link</a:t>
             </a:r>
             <a:endParaRPr lang="en-US" sz="1100" dirty="0"/>
           </a:p>
@@ -4119,7 +4119,7 @@
         </p:nvSpPr>
         <p:spPr>
           <a:xfrm>
-            <a:off x="3611880" y="5751576"/>
+            <a:off x="3611880" y="5632704"/>
             <a:ext cx="4892040" cy="658368"/>
           </a:xfrm>
           <a:prstGeom prst="rect">
@@ -4139,7 +4139,7 @@
               <a:buNone/>
             </a:pPr>
             <a:r>
-              <a:rPr lang="en-US" sz="930" dirty="0">
+              <a:rPr lang="en-US" sz="950" dirty="0">
                 <a:solidFill>
                   <a:srgbClr val="9AA7BD"/>
                 </a:solidFill>
@@ -4147,9 +4147,9 @@
                 <a:ea typeface="Calibri" pitchFamily="34" charset="-122"/>
                 <a:cs typeface="Calibri" pitchFamily="34" charset="-120"/>
               </a:rPr>
-              <a:t>Click a machined-feature report row → the face lights up in 3D, and back.</a:t>
-            </a:r>
-            <a:endParaRPr lang="en-US" sz="930" dirty="0"/>
+              <a:t>Click a face and the matching feature rows in the result are outlined. A warning's "show me" button lights up its faces.</a:t>
+            </a:r>
+            <a:endParaRPr lang="en-US" sz="950" dirty="0"/>
           </a:p>
         </p:txBody>
       </p:sp>
@@ -4161,7 +4161,7 @@
         </p:nvSpPr>
         <p:spPr>
           <a:xfrm>
-            <a:off x="8686800" y="5751576"/>
+            <a:off x="8686800" y="5632704"/>
             <a:ext cx="2971800" cy="658368"/>
           </a:xfrm>
           <a:prstGeom prst="rect">
@@ -4189,7 +4189,7 @@
                 <a:ea typeface="Calibri" pitchFamily="34" charset="-122"/>
                 <a:cs typeface="Calibri" pitchFamily="34" charset="-120"/>
               </a:rPr>
-              <a:t>→ Trust: every cost line traces to a face</a:t>
+              <a:t>Built. Works where the feature has face data (STEP/IGES).</a:t>
             </a:r>
             <a:endParaRPr lang="en-US" sz="900" dirty="0"/>
           </a:p>
@@ -4365,7 +4365,7 @@
               <a:buNone/>
             </a:pPr>
             <a:r>
-              <a:rPr lang="en-US" sz="700" spc="150" kern="0" dirty="0">
+              <a:rPr lang="en-US" sz="750" spc="150" kern="0" dirty="0">
                 <a:solidFill>
                   <a:srgbClr val="5C6B85"/>
                 </a:solidFill>
@@ -4375,7 +4375,7 @@
               </a:rPr>
               <a:t>CAD-TO-COST  INTELLIGENCE</a:t>
             </a:r>
-            <a:endParaRPr lang="en-US" sz="700" dirty="0"/>
+            <a:endParaRPr lang="en-US" sz="750" dirty="0"/>
           </a:p>
         </p:txBody>
       </p:sp>
@@ -4432,7 +4432,7 @@
                 <a:ea typeface="Calibri" pitchFamily="34" charset="-122"/>
                 <a:cs typeface="Calibri" pitchFamily="34" charset="-120"/>
               </a:rPr>
-              <a:t>ROADMAP · ~2–4 WEEKS · YOUR 2ND ASK</a:t>
+              <a:t>ROADMAP · MOSTLY BUILT</a:t>
             </a:r>
             <a:endParaRPr lang="en-US" sz="1050" dirty="0"/>
           </a:p>
@@ -4471,7 +4471,7 @@
                 <a:ea typeface="Calibri" pitchFamily="34" charset="-122"/>
                 <a:cs typeface="Calibri" pitchFamily="34" charset="-120"/>
               </a:rPr>
-              <a:t>Phase 1 — The full CAD-software feel</a:t>
+              <a:t>Phase 1 — The CAD-software feel</a:t>
             </a:r>
             <a:endParaRPr lang="en-US" sz="2500" dirty="0"/>
           </a:p>
@@ -4510,7 +4510,7 @@
                 <a:ea typeface="Calibri" pitchFamily="34" charset="-122"/>
                 <a:cs typeface="Calibri" pitchFamily="34" charset="-120"/>
               </a:rPr>
-              <a:t>CostVision  ·  Competitive study &amp; build plan  ·  Confidential</a:t>
+              <a:t>CostVision  ·  CAD viewer study &amp; roadmap  ·  Updated September 2026  ·  Confidential</a:t>
             </a:r>
             <a:endParaRPr lang="en-US" sz="750" dirty="0"/>
           </a:p>
@@ -4596,7 +4596,7 @@
                 <a:ea typeface="Calibri" pitchFamily="34" charset="-122"/>
                 <a:cs typeface="Calibri" pitchFamily="34" charset="-120"/>
               </a:rPr>
-              <a:t>Orientation cube + smooth views</a:t>
+              <a:t>Orientation cube + views</a:t>
             </a:r>
             <a:endParaRPr lang="en-US" sz="1150" dirty="0"/>
           </a:p>
@@ -4630,7 +4630,7 @@
               <a:buNone/>
             </a:pPr>
             <a:r>
-              <a:rPr lang="en-US" sz="960" dirty="0">
+              <a:rPr lang="en-US" sz="1050" dirty="0">
                 <a:solidFill>
                   <a:srgbClr val="9AA7BD"/>
                 </a:solidFill>
@@ -4638,9 +4638,9 @@
                 <a:ea typeface="Calibri" pitchFamily="34" charset="-122"/>
                 <a:cs typeface="Calibri" pitchFamily="34" charset="-120"/>
               </a:rPr>
-              <a:t>A draggable nav cube and named-view snapping — the universal "this is CAD" signal.</a:t>
-            </a:r>
-            <a:endParaRPr lang="en-US" sz="960" dirty="0"/>
+              <a:t>Built. A cube in the corner: click a face or axis to snap to that view. Home, front, top, right and fit buttons.</a:t>
+            </a:r>
+            <a:endParaRPr lang="en-US" sz="1050" dirty="0"/>
           </a:p>
         </p:txBody>
       </p:sp>
@@ -4724,7 +4724,7 @@
                 <a:ea typeface="Calibri" pitchFamily="34" charset="-122"/>
                 <a:cs typeface="Calibri" pitchFamily="34" charset="-120"/>
               </a:rPr>
-              <a:t>Feature / model tree</a:t>
+              <a:t>Model tree</a:t>
             </a:r>
             <a:endParaRPr lang="en-US" sz="1150" dirty="0"/>
           </a:p>
@@ -4758,7 +4758,7 @@
               <a:buNone/>
             </a:pPr>
             <a:r>
-              <a:rPr lang="en-US" sz="960" dirty="0">
+              <a:rPr lang="en-US" sz="1050" dirty="0">
                 <a:solidFill>
                   <a:srgbClr val="9AA7BD"/>
                 </a:solidFill>
@@ -4766,9 +4766,9 @@
                 <a:ea typeface="Calibri" pitchFamily="34" charset="-122"/>
                 <a:cs typeface="Calibri" pitchFamily="34" charset="-120"/>
               </a:rPr>
-              <a:t>A real docked tree of bodies, faces &amp; recognised features with visibility toggles.</a:t>
-            </a:r>
-            <a:endParaRPr lang="en-US" sz="960" dirty="0"/>
+              <a:t>Built. Bodies, found features and face types, with show and hide for each body.</a:t>
+            </a:r>
+            <a:endParaRPr lang="en-US" sz="1050" dirty="0"/>
           </a:p>
         </p:txBody>
       </p:sp>
@@ -4886,7 +4886,7 @@
               <a:buNone/>
             </a:pPr>
             <a:r>
-              <a:rPr lang="en-US" sz="960" dirty="0">
+              <a:rPr lang="en-US" sz="1050" dirty="0">
                 <a:solidFill>
                   <a:srgbClr val="9AA7BD"/>
                 </a:solidFill>
@@ -4894,9 +4894,9 @@
                 <a:ea typeface="Calibri" pitchFamily="34" charset="-122"/>
                 <a:cs typeface="Calibri" pitchFamily="34" charset="-120"/>
               </a:rPr>
-              <a:t>Separate the solids of an assembly along an axis — inspect and cost per component.</a:t>
-            </a:r>
-            <a:endParaRPr lang="en-US" sz="960" dirty="0"/>
+              <a:t>Built. Pull a multi-body file apart radially or along X, Y or Z. Each component can also be moved or rotated.</a:t>
+            </a:r>
+            <a:endParaRPr lang="en-US" sz="1050" dirty="0"/>
           </a:p>
         </p:txBody>
       </p:sp>
@@ -4980,7 +4980,7 @@
                 <a:ea typeface="Calibri" pitchFamily="34" charset="-122"/>
                 <a:cs typeface="Calibri" pitchFamily="34" charset="-120"/>
               </a:rPr>
-              <a:t>Multi-section + cap shading</a:t>
+              <a:t>Section planes</a:t>
             </a:r>
             <a:endParaRPr lang="en-US" sz="1150" dirty="0"/>
           </a:p>
@@ -5014,7 +5014,7 @@
               <a:buNone/>
             </a:pPr>
             <a:r>
-              <a:rPr lang="en-US" sz="960" dirty="0">
+              <a:rPr lang="en-US" sz="1050" dirty="0">
                 <a:solidFill>
                   <a:srgbClr val="9AA7BD"/>
                 </a:solidFill>
@@ -5022,9 +5022,9 @@
                 <a:ea typeface="Calibri" pitchFamily="34" charset="-122"/>
                 <a:cs typeface="Calibri" pitchFamily="34" charset="-120"/>
               </a:rPr>
-              <a:t>More than one cut plane, with solid caps — proper sectioning, not a single slider.</a:t>
-            </a:r>
-            <a:endParaRPr lang="en-US" sz="960" dirty="0"/>
+              <a:t>Partly built. Independent cut planes on X, Y and Z. Solid caps on the cut face are still to do.</a:t>
+            </a:r>
+            <a:endParaRPr lang="en-US" sz="1050" dirty="0"/>
           </a:p>
         </p:txBody>
       </p:sp>
@@ -5108,7 +5108,7 @@
                 <a:ea typeface="Calibri" pitchFamily="34" charset="-122"/>
                 <a:cs typeface="Calibri" pitchFamily="34" charset="-120"/>
               </a:rPr>
-              <a:t>Richer measurement</a:t>
+              <a:t>Richer measuring</a:t>
             </a:r>
             <a:endParaRPr lang="en-US" sz="1150" dirty="0"/>
           </a:p>
@@ -5142,7 +5142,7 @@
               <a:buNone/>
             </a:pPr>
             <a:r>
-              <a:rPr lang="en-US" sz="960" dirty="0">
+              <a:rPr lang="en-US" sz="1050" dirty="0">
                 <a:solidFill>
                   <a:srgbClr val="9AA7BD"/>
                 </a:solidFill>
@@ -5150,9 +5150,9 @@
                 <a:ea typeface="Calibri" pitchFamily="34" charset="-122"/>
                 <a:cs typeface="Calibri" pitchFamily="34" charset="-120"/>
               </a:rPr>
-              <a:t>True face radius, edge length, face-to-face parallel distance, coordinate read-out.</a:t>
-            </a:r>
-            <a:endParaRPr lang="en-US" sz="960" dirty="0"/>
+              <a:t>Built. Distance (snaps to corners and edges), 3-point radius, angle, X/Y/Z point, face-to-face. Saved per file; export to CSV.</a:t>
+            </a:r>
+            <a:endParaRPr lang="en-US" sz="1050" dirty="0"/>
           </a:p>
         </p:txBody>
       </p:sp>
@@ -5236,7 +5236,7 @@
                 <a:ea typeface="Calibri" pitchFamily="34" charset="-122"/>
                 <a:cs typeface="Calibri" pitchFamily="34" charset="-120"/>
               </a:rPr>
-              <a:t>Per-face → cost linking</a:t>
+              <a:t>Cost on the model</a:t>
             </a:r>
             <a:endParaRPr lang="en-US" sz="1150" dirty="0"/>
           </a:p>
@@ -5270,7 +5270,7 @@
               <a:buNone/>
             </a:pPr>
             <a:r>
-              <a:rPr lang="en-US" sz="960" dirty="0">
+              <a:rPr lang="en-US" sz="1050" dirty="0">
                 <a:solidFill>
                   <a:srgbClr val="9AA7BD"/>
                 </a:solidFill>
@@ -5278,9 +5278,9 @@
                 <a:ea typeface="Calibri" pitchFamily="34" charset="-122"/>
                 <a:cs typeface="Calibri" pitchFamily="34" charset="-120"/>
               </a:rPr>
-              <a:t>Click a face → see the operation and £ it drives. The viewer becomes the cost story.</a:t>
-            </a:r>
-            <a:endParaRPr lang="en-US" sz="960" dirty="0"/>
+              <a:t>Built. After a CAD costing, faces are coloured by the £ of the machining lines they carry.</a:t>
+            </a:r>
+            <a:endParaRPr lang="en-US" sz="1050" dirty="0"/>
           </a:p>
         </p:txBody>
       </p:sp>
@@ -5344,7 +5344,7 @@
                 <a:ea typeface="Calibri" pitchFamily="34" charset="-122"/>
                 <a:cs typeface="Calibri" pitchFamily="34" charset="-120"/>
               </a:rPr>
-              <a:t>The payoff:  </a:t>
+              <a:t>Where this leaves us:  </a:t>
             </a:r>
             <a:pPr indent="0" marL="0">
               <a:buNone/>
@@ -5358,7 +5358,7 @@
                 <a:ea typeface="Calibri" pitchFamily="34" charset="-122"/>
                 <a:cs typeface="Calibri" pitchFamily="34" charset="-120"/>
               </a:rPr>
-              <a:t>the viewer stops being "a preview" and becomes the place engineers inspect, verify and understand the cost — the exact thing that impressed you about the competitor.</a:t>
+              <a:t>the viewer is now a place to check the cost, not just a preview. The limits: it shows a mesh, sections have no caps, and tolerances are not read from the file.</a:t>
             </a:r>
             <a:endParaRPr lang="en-US" sz="1050" dirty="0"/>
           </a:p>
@@ -5534,7 +5534,7 @@
               <a:buNone/>
             </a:pPr>
             <a:r>
-              <a:rPr lang="en-US" sz="700" spc="150" kern="0" dirty="0">
+              <a:rPr lang="en-US" sz="750" spc="150" kern="0" dirty="0">
                 <a:solidFill>
                   <a:srgbClr val="5C6B85"/>
                 </a:solidFill>
@@ -5544,7 +5544,7 @@
               </a:rPr>
               <a:t>CAD-TO-COST  INTELLIGENCE</a:t>
             </a:r>
-            <a:endParaRPr lang="en-US" sz="700" dirty="0"/>
+            <a:endParaRPr lang="en-US" sz="750" dirty="0"/>
           </a:p>
         </p:txBody>
       </p:sp>
@@ -5601,7 +5601,7 @@
                 <a:ea typeface="Calibri" pitchFamily="34" charset="-122"/>
                 <a:cs typeface="Calibri" pitchFamily="34" charset="-120"/>
               </a:rPr>
-              <a:t>ROADMAP · ~3–5 WEEKS · TYPE LESS</a:t>
+              <a:t>ROADMAP · PARTLY STARTED</a:t>
             </a:r>
             <a:endParaRPr lang="en-US" sz="1050" dirty="0"/>
           </a:p>
@@ -5679,7 +5679,7 @@
                 <a:ea typeface="Calibri" pitchFamily="34" charset="-122"/>
                 <a:cs typeface="Calibri" pitchFamily="34" charset="-120"/>
               </a:rPr>
-              <a:t>CostVision  ·  Competitive study &amp; build plan  ·  Confidential</a:t>
+              <a:t>CostVision  ·  CAD viewer study &amp; roadmap  ·  Updated September 2026  ·  Confidential</a:t>
             </a:r>
             <a:endParaRPr lang="en-US" sz="750" dirty="0"/>
           </a:p>
@@ -5765,7 +5765,7 @@
                 <a:ea typeface="Calibri" pitchFamily="34" charset="-122"/>
                 <a:cs typeface="Calibri" pitchFamily="34" charset="-120"/>
               </a:rPr>
-              <a:t>More recognised features → cost</a:t>
+              <a:t>More features found → cost</a:t>
             </a:r>
             <a:endParaRPr lang="en-US" sz="1300" dirty="0"/>
           </a:p>
@@ -5800,7 +5800,7 @@
         <p:spPr>
           <a:xfrm>
             <a:off x="841248" y="2359152"/>
-            <a:ext cx="4937760" cy="457200"/>
+            <a:ext cx="4937760" cy="512064"/>
           </a:xfrm>
           <a:prstGeom prst="rect">
             <a:avLst/>
@@ -5827,7 +5827,7 @@
                 <a:ea typeface="Calibri" pitchFamily="34" charset="-122"/>
                 <a:cs typeface="Calibri" pitchFamily="34" charset="-120"/>
               </a:rPr>
-              <a:t>Fillets &amp; chamfers — count, size → finishing / deburr ops</a:t>
+              <a:t>Fillets: found today. Turning them into finishing operations is still to do</a:t>
             </a:r>
             <a:endParaRPr lang="en-US" sz="1000" dirty="0"/>
           </a:p>
@@ -5862,7 +5862,7 @@
         <p:spPr>
           <a:xfrm>
             <a:off x="841248" y="2935224"/>
-            <a:ext cx="4937760" cy="457200"/>
+            <a:ext cx="4937760" cy="512064"/>
           </a:xfrm>
           <a:prstGeom prst="rect">
             <a:avLst/>
@@ -5889,7 +5889,7 @@
                 <a:ea typeface="Calibri" pitchFamily="34" charset="-122"/>
                 <a:cs typeface="Calibri" pitchFamily="34" charset="-120"/>
               </a:rPr>
-              <a:t>Slots &amp; pockets — proper recognition (today only holes/bosses)</a:t>
+              <a:t>Pockets and machined flat faces: found cautiously, and off in the cost until the engineer confirms</a:t>
             </a:r>
             <a:endParaRPr lang="en-US" sz="1000" dirty="0"/>
           </a:p>
@@ -5924,7 +5924,7 @@
         <p:spPr>
           <a:xfrm>
             <a:off x="841248" y="3511296"/>
-            <a:ext cx="4937760" cy="457200"/>
+            <a:ext cx="4937760" cy="512064"/>
           </a:xfrm>
           <a:prstGeom prst="rect">
             <a:avLst/>
@@ -5951,7 +5951,7 @@
                 <a:ea typeface="Calibri" pitchFamily="34" charset="-122"/>
                 <a:cs typeface="Calibri" pitchFamily="34" charset="-120"/>
               </a:rPr>
-              <a:t>Ribs &amp; bosses on mouldings → tool complexity</a:t>
+              <a:t>Chamfers, slots and thread specs (pitch and class): still to do</a:t>
             </a:r>
             <a:endParaRPr lang="en-US" sz="1000" dirty="0"/>
           </a:p>
@@ -5986,7 +5986,7 @@
         <p:spPr>
           <a:xfrm>
             <a:off x="841248" y="4087368"/>
-            <a:ext cx="4937760" cy="457200"/>
+            <a:ext cx="4937760" cy="512064"/>
           </a:xfrm>
           <a:prstGeom prst="rect">
             <a:avLst/>
@@ -6013,7 +6013,7 @@
                 <a:ea typeface="Calibri" pitchFamily="34" charset="-122"/>
                 <a:cs typeface="Calibri" pitchFamily="34" charset="-120"/>
               </a:rPr>
-              <a:t>Thread specs — real pitch/class, not a boolean guess</a:t>
+              <a:t>Rib count on mouldings to drive tool complexity: still to do</a:t>
             </a:r>
             <a:endParaRPr lang="en-US" sz="1000" dirty="0"/>
           </a:p>
@@ -6048,7 +6048,7 @@
         <p:spPr>
           <a:xfrm>
             <a:off x="841248" y="4663440"/>
-            <a:ext cx="4937760" cy="457200"/>
+            <a:ext cx="4937760" cy="512064"/>
           </a:xfrm>
           <a:prstGeom prst="rect">
             <a:avLst/>
@@ -6075,7 +6075,7 @@
                 <a:ea typeface="Calibri" pitchFamily="34" charset="-122"/>
                 <a:cs typeface="Calibri" pitchFamily="34" charset="-120"/>
               </a:rPr>
-              <a:t>Machined-vs-as-cast face classification → what to machine</a:t>
+              <a:t>Machined vs as-cast faces: still to do. Today a guard caps machining time on near-net parts</a:t>
             </a:r>
             <a:endParaRPr lang="en-US" sz="1000" dirty="0"/>
           </a:p>
@@ -6110,7 +6110,7 @@
         <p:spPr>
           <a:xfrm>
             <a:off x="841248" y="5239512"/>
-            <a:ext cx="4937760" cy="457200"/>
+            <a:ext cx="4937760" cy="512064"/>
           </a:xfrm>
           <a:prstGeom prst="rect">
             <a:avLst/>
@@ -6137,7 +6137,7 @@
                 <a:ea typeface="Calibri" pitchFamily="34" charset="-122"/>
                 <a:cs typeface="Calibri" pitchFamily="34" charset="-120"/>
               </a:rPr>
-              <a:t>Better STL path — recover features so STL isn’t cost-blind</a:t>
+              <a:t>STL features: still to do. Today the tool stops and asks for a cycle time</a:t>
             </a:r>
             <a:endParaRPr lang="en-US" sz="1000" dirty="0"/>
           </a:p>
@@ -6223,7 +6223,7 @@
                 <a:ea typeface="Calibri" pitchFamily="34" charset="-122"/>
                 <a:cs typeface="Calibri" pitchFamily="34" charset="-120"/>
               </a:rPr>
-              <a:t>Tolerance-driven costing (the differentiator)</a:t>
+              <a:t>Tolerance-driven costing (future)</a:t>
             </a:r>
             <a:endParaRPr lang="en-US" sz="1300" dirty="0"/>
           </a:p>
@@ -6237,8 +6237,8 @@
         </p:nvSpPr>
         <p:spPr>
           <a:xfrm>
-            <a:off x="6428232" y="2359152"/>
-            <a:ext cx="5120640" cy="822960"/>
+            <a:off x="6428232" y="2331720"/>
+            <a:ext cx="5120640" cy="914400"/>
           </a:xfrm>
           <a:prstGeom prst="rect">
             <a:avLst/>
@@ -6252,7 +6252,7 @@
           <a:p>
             <a:pPr indent="0" marL="0">
               <a:lnSpc>
-                <a:spcPct val="110000"/>
+                <a:spcPct val="108000"/>
               </a:lnSpc>
               <a:buNone/>
             </a:pPr>
@@ -6265,7 +6265,7 @@
                 <a:ea typeface="Calibri" pitchFamily="34" charset="-122"/>
                 <a:cs typeface="Calibri" pitchFamily="34" charset="-120"/>
               </a:rPr>
-              <a:t>Read PMI / GD&amp;T straight from STEP AP242 (via OCCT XDE) — the tolerances that actually drive cost — and map them to process &amp; inspection:</a:t>
+              <a:t>Not built. The idea: read tolerances (GD&amp;T: geometric dimensioning and tolerancing) from STEP AP242 files, and map them to process and inspection. Today the engineer types the tightest tolerance, and it scales the machining time.</a:t>
             </a:r>
             <a:endParaRPr lang="en-US" sz="1000" dirty="0"/>
           </a:p>
@@ -6279,7 +6279,7 @@
         </p:nvSpPr>
         <p:spPr>
           <a:xfrm>
-            <a:off x="6428232" y="3291840"/>
+            <a:off x="6428232" y="3383280"/>
             <a:ext cx="5120640" cy="548640"/>
           </a:xfrm>
           <a:prstGeom prst="roundRect">
@@ -6306,7 +6306,7 @@
         </p:nvSpPr>
         <p:spPr>
           <a:xfrm>
-            <a:off x="6583680" y="3291840"/>
+            <a:off x="6583680" y="3383280"/>
             <a:ext cx="2468880" cy="548640"/>
           </a:xfrm>
           <a:prstGeom prst="rect">
@@ -6345,7 +6345,7 @@
         </p:nvSpPr>
         <p:spPr>
           <a:xfrm>
-            <a:off x="9052560" y="3291840"/>
+            <a:off x="9052560" y="3383280"/>
             <a:ext cx="2377440" cy="548640"/>
           </a:xfrm>
           <a:prstGeom prst="rect">
@@ -6384,7 +6384,7 @@
         </p:nvSpPr>
         <p:spPr>
           <a:xfrm>
-            <a:off x="6428232" y="3931920"/>
+            <a:off x="6428232" y="4023360"/>
             <a:ext cx="5120640" cy="548640"/>
           </a:xfrm>
           <a:prstGeom prst="roundRect">
@@ -6411,7 +6411,7 @@
         </p:nvSpPr>
         <p:spPr>
           <a:xfrm>
-            <a:off x="6583680" y="3931920"/>
+            <a:off x="6583680" y="4023360"/>
             <a:ext cx="2468880" cy="548640"/>
           </a:xfrm>
           <a:prstGeom prst="rect">
@@ -6450,7 +6450,7 @@
         </p:nvSpPr>
         <p:spPr>
           <a:xfrm>
-            <a:off x="9052560" y="3931920"/>
+            <a:off x="9052560" y="4023360"/>
             <a:ext cx="2377440" cy="548640"/>
           </a:xfrm>
           <a:prstGeom prst="rect">
@@ -6475,7 +6475,7 @@
                 <a:ea typeface="Calibri" pitchFamily="34" charset="-122"/>
                 <a:cs typeface="Calibri" pitchFamily="34" charset="-120"/>
               </a:rPr>
-              <a:t>→ super-finish / polish op</a:t>
+              <a:t>→ extra finishing operation</a:t>
             </a:r>
             <a:endParaRPr lang="en-US" sz="950" dirty="0"/>
           </a:p>
@@ -6489,7 +6489,7 @@
         </p:nvSpPr>
         <p:spPr>
           <a:xfrm>
-            <a:off x="6428232" y="4572000"/>
+            <a:off x="6428232" y="4663440"/>
             <a:ext cx="5120640" cy="548640"/>
           </a:xfrm>
           <a:prstGeom prst="roundRect">
@@ -6516,7 +6516,7 @@
         </p:nvSpPr>
         <p:spPr>
           <a:xfrm>
-            <a:off x="6583680" y="4572000"/>
+            <a:off x="6583680" y="4663440"/>
             <a:ext cx="2468880" cy="548640"/>
           </a:xfrm>
           <a:prstGeom prst="rect">
@@ -6555,7 +6555,7 @@
         </p:nvSpPr>
         <p:spPr>
           <a:xfrm>
-            <a:off x="9052560" y="4572000"/>
+            <a:off x="9052560" y="4663440"/>
             <a:ext cx="2377440" cy="548640"/>
           </a:xfrm>
           <a:prstGeom prst="rect">
@@ -6594,7 +6594,7 @@
         </p:nvSpPr>
         <p:spPr>
           <a:xfrm>
-            <a:off x="6428232" y="5212080"/>
+            <a:off x="6428232" y="5303520"/>
             <a:ext cx="5120640" cy="548640"/>
           </a:xfrm>
           <a:prstGeom prst="roundRect">
@@ -6621,7 +6621,7 @@
         </p:nvSpPr>
         <p:spPr>
           <a:xfrm>
-            <a:off x="6583680" y="5212080"/>
+            <a:off x="6583680" y="5303520"/>
             <a:ext cx="2468880" cy="548640"/>
           </a:xfrm>
           <a:prstGeom prst="rect">
@@ -6646,7 +6646,7 @@
                 <a:ea typeface="Calibri" pitchFamily="34" charset="-122"/>
                 <a:cs typeface="Calibri" pitchFamily="34" charset="-120"/>
               </a:rPr>
-              <a:t>Loose general tol.</a:t>
+              <a:t>Loose general tolerance</a:t>
             </a:r>
             <a:endParaRPr lang="en-US" sz="950" dirty="0"/>
           </a:p>
@@ -6660,7 +6660,7 @@
         </p:nvSpPr>
         <p:spPr>
           <a:xfrm>
-            <a:off x="9052560" y="5212080"/>
+            <a:off x="9052560" y="5303520"/>
             <a:ext cx="2377440" cy="548640"/>
           </a:xfrm>
           <a:prstGeom prst="rect">
@@ -6861,7 +6861,7 @@
               <a:buNone/>
             </a:pPr>
             <a:r>
-              <a:rPr lang="en-US" sz="700" spc="150" kern="0" dirty="0">
+              <a:rPr lang="en-US" sz="750" spc="150" kern="0" dirty="0">
                 <a:solidFill>
                   <a:srgbClr val="5C6B85"/>
                 </a:solidFill>
@@ -6871,7 +6871,7 @@
               </a:rPr>
               <a:t>CAD-TO-COST  INTELLIGENCE</a:t>
             </a:r>
-            <a:endParaRPr lang="en-US" sz="700" dirty="0"/>
+            <a:endParaRPr lang="en-US" sz="750" dirty="0"/>
           </a:p>
         </p:txBody>
       </p:sp>
@@ -6928,7 +6928,7 @@
                 <a:ea typeface="Calibri" pitchFamily="34" charset="-122"/>
                 <a:cs typeface="Calibri" pitchFamily="34" charset="-120"/>
               </a:rPr>
-              <a:t>ROADMAP · RESEARCH TRACK</a:t>
+              <a:t>ROADMAP · FUTURE, NOT STARTED</a:t>
             </a:r>
             <a:endParaRPr lang="en-US" sz="1050" dirty="0"/>
           </a:p>
@@ -6967,7 +6967,7 @@
                 <a:ea typeface="Calibri" pitchFamily="34" charset="-122"/>
                 <a:cs typeface="Calibri" pitchFamily="34" charset="-120"/>
               </a:rPr>
-              <a:t>Phase 3 — Best-in-class recognition</a:t>
+              <a:t>Phase 3 — Research track</a:t>
             </a:r>
             <a:endParaRPr lang="en-US" sz="2500" dirty="0"/>
           </a:p>
@@ -7006,7 +7006,7 @@
                 <a:ea typeface="Calibri" pitchFamily="34" charset="-122"/>
                 <a:cs typeface="Calibri" pitchFamily="34" charset="-120"/>
               </a:rPr>
-              <a:t>CostVision  ·  Competitive study &amp; build plan  ·  Confidential</a:t>
+              <a:t>CostVision  ·  CAD viewer study &amp; roadmap  ·  Updated September 2026  ·  Confidential</a:t>
             </a:r>
             <a:endParaRPr lang="en-US" sz="750" dirty="0"/>
           </a:p>
@@ -7092,7 +7092,7 @@
                 <a:ea typeface="Calibri" pitchFamily="34" charset="-122"/>
                 <a:cs typeface="Calibri" pitchFamily="34" charset="-120"/>
               </a:rPr>
-              <a:t>Client-side B-rep kernel (occt-import-js)</a:t>
+              <a:t>CAD kernel in the browser (occt-import-js)</a:t>
             </a:r>
             <a:endParaRPr lang="en-US" sz="1200" dirty="0"/>
           </a:p>
@@ -7126,7 +7126,7 @@
               <a:buNone/>
             </a:pPr>
             <a:r>
-              <a:rPr lang="en-US" sz="1000" dirty="0">
+              <a:rPr lang="en-US" sz="1100" dirty="0">
                 <a:solidFill>
                   <a:srgbClr val="9AA7BD"/>
                 </a:solidFill>
@@ -7134,9 +7134,9 @@
                 <a:ea typeface="Calibri" pitchFamily="34" charset="-122"/>
                 <a:cs typeface="Calibri" pitchFamily="34" charset="-120"/>
               </a:rPr>
-              <a:t>Open STEP/IGES directly in the browser and hold the real B-rep, not a server-tessellated mesh. Unlocks true face-radius measurement, instant load, and per-face picking with zero round-trip.</a:t>
-            </a:r>
-            <a:endParaRPr lang="en-US" sz="1000" dirty="0"/>
+              <a:t>Open STEP and IGES directly in the browser and keep the real B-rep, not a mesh made on the server. That would allow exact face measurement, faster loading, and face picking with no server call.</a:t>
+            </a:r>
+            <a:endParaRPr lang="en-US" sz="1100" dirty="0"/>
           </a:p>
           <a:p>
             <a:pPr indent="0" marL="0">
@@ -7145,7 +7145,7 @@
               </a:lnSpc>
               <a:buNone/>
             </a:pPr>
-            <a:endParaRPr lang="en-US" sz="1000" dirty="0"/>
+            <a:endParaRPr lang="en-US" sz="1100" dirty="0"/>
           </a:p>
           <a:p>
             <a:pPr indent="0" marL="0">
@@ -7155,7 +7155,7 @@
               <a:buNone/>
             </a:pPr>
             <a:r>
-              <a:rPr lang="en-US" sz="1000" dirty="0">
+              <a:rPr lang="en-US" sz="1100" dirty="0">
                 <a:solidFill>
                   <a:srgbClr val="9AA7BD"/>
                 </a:solidFill>
@@ -7163,9 +7163,9 @@
                 <a:ea typeface="Calibri" pitchFamily="34" charset="-122"/>
                 <a:cs typeface="Calibri" pitchFamily="34" charset="-120"/>
               </a:rPr>
-              <a:t>Benefit: the viewer stops depending on a server call to feel alive — and every face is a first-class, clickable, costable object.</a:t>
-            </a:r>
-            <a:endParaRPr lang="en-US" sz="1000" dirty="0"/>
+              <a:t>What it would change: every face becomes an exact object you can click and cost, even before the server replies.</a:t>
+            </a:r>
+            <a:endParaRPr lang="en-US" sz="1100" dirty="0"/>
           </a:p>
         </p:txBody>
       </p:sp>
@@ -7249,7 +7249,7 @@
                 <a:ea typeface="Calibri" pitchFamily="34" charset="-122"/>
                 <a:cs typeface="Calibri" pitchFamily="34" charset="-120"/>
               </a:rPr>
-              <a:t>Graph-neural feature recognition (AFR)</a:t>
+              <a:t>Learned feature recognition</a:t>
             </a:r>
             <a:endParaRPr lang="en-US" sz="1200" dirty="0"/>
           </a:p>
@@ -7283,7 +7283,7 @@
               <a:buNone/>
             </a:pPr>
             <a:r>
-              <a:rPr lang="en-US" sz="1000" dirty="0">
+              <a:rPr lang="en-US" sz="1100" dirty="0">
                 <a:solidFill>
                   <a:srgbClr val="9AA7BD"/>
                 </a:solidFill>
@@ -7291,9 +7291,9 @@
                 <a:ea typeface="Calibri" pitchFamily="34" charset="-122"/>
                 <a:cs typeface="Calibri" pitchFamily="34" charset="-120"/>
               </a:rPr>
-              <a:t>Add a native B-rep AFR model (UV-Net / BRepGAT family) that segments machining features per face at published 98–99% on benchmarks — recognising the compound features our geometric heuristics miss.</a:t>
-            </a:r>
-            <a:endParaRPr lang="en-US" sz="1000" dirty="0"/>
+              <a:t>Add a research-style model (the UV-Net / BRepGAT family) that labels machining features face by face. It could pick up compound features our current rules miss.</a:t>
+            </a:r>
+            <a:endParaRPr lang="en-US" sz="1100" dirty="0"/>
           </a:p>
           <a:p>
             <a:pPr indent="0" marL="0">
@@ -7302,7 +7302,7 @@
               </a:lnSpc>
               <a:buNone/>
             </a:pPr>
-            <a:endParaRPr lang="en-US" sz="1000" dirty="0"/>
+            <a:endParaRPr lang="en-US" sz="1100" dirty="0"/>
           </a:p>
           <a:p>
             <a:pPr indent="0" marL="0">
@@ -7312,7 +7312,7 @@
               <a:buNone/>
             </a:pPr>
             <a:r>
-              <a:rPr lang="en-US" sz="1000" dirty="0">
+              <a:rPr lang="en-US" sz="1100" dirty="0">
                 <a:solidFill>
                   <a:srgbClr val="9AA7BD"/>
                 </a:solidFill>
@@ -7320,9 +7320,9 @@
                 <a:ea typeface="Calibri" pitchFamily="34" charset="-122"/>
                 <a:cs typeface="Calibri" pitchFamily="34" charset="-120"/>
               </a:rPr>
-              <a:t>Benefit: recall and precision that rival aPriori &amp; Siemens — while staying glass-box, because every prediction is a face a human can verify.</a:t>
-            </a:r>
-            <a:endParaRPr lang="en-US" sz="1000" dirty="0"/>
+              <a:t>What it would change: better recall on complex parts, and every label is still a face a person can check. Only worth it if it holds up on real JLR parts.</a:t>
+            </a:r>
+            <a:endParaRPr lang="en-US" sz="1100" dirty="0"/>
           </a:p>
         </p:txBody>
       </p:sp>
@@ -7406,7 +7406,7 @@
                 <a:ea typeface="Calibri" pitchFamily="34" charset="-122"/>
                 <a:cs typeface="Calibri" pitchFamily="34" charset="-120"/>
               </a:rPr>
-              <a:t>Why this is a "later" phase, not a "never" phase</a:t>
+              <a:t>Why this comes last</a:t>
             </a:r>
             <a:endParaRPr lang="en-US" sz="1200" dirty="0"/>
           </a:p>
@@ -7448,7 +7448,7 @@
                 <a:ea typeface="Calibri" pitchFamily="34" charset="-122"/>
                 <a:cs typeface="Calibri" pitchFamily="34" charset="-120"/>
               </a:rPr>
-              <a:t>Highest effort and the benchmark accuracy is on synthetic data — so it earns its place only after Phases 0–2 have already closed the visible gap. But it is the ceiling: it is what would let us say "our recognition matches the market leaders," on our own secure, learning, glass-box platform.</a:t>
+              <a:t>It is the most effort, and the published accuracy comes from synthetic test data. It only makes sense once Phase 2 is done and we have real JLR parts to test it on. A learned model would only label features. The cost would still be plain arithmetic, and at JLR any AI would need approval first.</a:t>
             </a:r>
             <a:endParaRPr lang="en-US" sz="1050" dirty="0"/>
           </a:p>
@@ -7624,7 +7624,7 @@
               <a:buNone/>
             </a:pPr>
             <a:r>
-              <a:rPr lang="en-US" sz="700" spc="150" kern="0" dirty="0">
+              <a:rPr lang="en-US" sz="750" spc="150" kern="0" dirty="0">
                 <a:solidFill>
                   <a:srgbClr val="5C6B85"/>
                 </a:solidFill>
@@ -7634,7 +7634,7 @@
               </a:rPr>
               <a:t>CAD-TO-COST  INTELLIGENCE</a:t>
             </a:r>
-            <a:endParaRPr lang="en-US" sz="700" dirty="0"/>
+            <a:endParaRPr lang="en-US" sz="750" dirty="0"/>
           </a:p>
         </p:txBody>
       </p:sp>
@@ -7691,7 +7691,7 @@
                 <a:ea typeface="Calibri" pitchFamily="34" charset="-122"/>
                 <a:cs typeface="Calibri" pitchFamily="34" charset="-120"/>
               </a:rPr>
-              <a:t>WHAT YOU ASKED FOR, CONCRETELY</a:t>
+              <a:t>WHAT YOU ASKED FOR, CHECKED AGAINST THE TOOL</a:t>
             </a:r>
             <a:endParaRPr lang="en-US" sz="1050" dirty="0"/>
           </a:p>
@@ -7730,7 +7730,7 @@
                 <a:ea typeface="Calibri" pitchFamily="34" charset="-122"/>
                 <a:cs typeface="Calibri" pitchFamily="34" charset="-120"/>
               </a:rPr>
-              <a:t>Your two asks — specced</a:t>
+              <a:t>Your two asks — where they stand</a:t>
             </a:r>
             <a:endParaRPr lang="en-US" sz="2500" dirty="0"/>
           </a:p>
@@ -7769,7 +7769,7 @@
                 <a:ea typeface="Calibri" pitchFamily="34" charset="-122"/>
                 <a:cs typeface="Calibri" pitchFamily="34" charset="-120"/>
               </a:rPr>
-              <a:t>CostVision  ·  Competitive study &amp; build plan  ·  Confidential</a:t>
+              <a:t>CostVision  ·  CAD viewer study &amp; roadmap  ·  Updated September 2026  ·  Confidential</a:t>
             </a:r>
             <a:endParaRPr lang="en-US" sz="750" dirty="0"/>
           </a:p>
@@ -7917,7 +7917,7 @@
                 <a:ea typeface="Calibri" pitchFamily="34" charset="-122"/>
                 <a:cs typeface="Calibri" pitchFamily="34" charset="-120"/>
               </a:rPr>
-              <a:t>Maximise button in the toolbar → full-window overlay</a:t>
+              <a:t>Built: Expand button fills the window with the viewer</a:t>
             </a:r>
             <a:endParaRPr lang="en-US" sz="1030" dirty="0"/>
           </a:p>
@@ -7979,7 +7979,7 @@
                 <a:ea typeface="Calibri" pitchFamily="34" charset="-122"/>
                 <a:cs typeface="Calibri" pitchFamily="34" charset="-120"/>
               </a:rPr>
-              <a:t>Browser Fullscreen API (true full-screen, F11-style)</a:t>
+              <a:t>Built: Esc returns to the costing layout</a:t>
             </a:r>
             <a:endParaRPr lang="en-US" sz="1030" dirty="0"/>
           </a:p>
@@ -8041,7 +8041,7 @@
                 <a:ea typeface="Calibri" pitchFamily="34" charset="-122"/>
                 <a:cs typeface="Calibri" pitchFamily="34" charset="-120"/>
               </a:rPr>
-              <a:t>Large "focus" mode: viewer takes the whole workspace</a:t>
+              <a:t>Built: the tools bar can be hidden to give the model room</a:t>
             </a:r>
             <a:endParaRPr lang="en-US" sz="1030" dirty="0"/>
           </a:p>
@@ -8103,7 +8103,7 @@
                 <a:ea typeface="Calibri" pitchFamily="34" charset="-122"/>
                 <a:cs typeface="Calibri" pitchFamily="34" charset="-120"/>
               </a:rPr>
-              <a:t>Drag-to-resize handle on the panel; remembers your size</a:t>
+              <a:t>Built: toolbar groups can be dragged into your own order</a:t>
             </a:r>
             <a:endParaRPr lang="en-US" sz="1030" dirty="0"/>
           </a:p>
@@ -8165,7 +8165,7 @@
                 <a:ea typeface="Calibri" pitchFamily="34" charset="-122"/>
                 <a:cs typeface="Calibri" pitchFamily="34" charset="-120"/>
               </a:rPr>
-              <a:t>Toolbar &amp; panels reflow so nothing crowds the model</a:t>
+              <a:t>Built: the model-tree panel can be resized</a:t>
             </a:r>
             <a:endParaRPr lang="en-US" sz="1030" dirty="0"/>
           </a:p>
@@ -8227,7 +8227,7 @@
                 <a:ea typeface="Calibri" pitchFamily="34" charset="-122"/>
                 <a:cs typeface="Calibri" pitchFamily="34" charset="-120"/>
               </a:rPr>
-              <a:t>Escape / click-out returns to the costing layout</a:t>
+              <a:t>Not yet: true operating-system full-screen mode</a:t>
             </a:r>
             <a:endParaRPr lang="en-US" sz="1030" dirty="0"/>
           </a:p>
@@ -8313,7 +8313,7 @@
                 <a:ea typeface="Calibri" pitchFamily="34" charset="-122"/>
                 <a:cs typeface="Calibri" pitchFamily="34" charset="-120"/>
               </a:rPr>
-              <a:t>2 · Full CAD-software feel</a:t>
+              <a:t>2 · A CAD-software feel</a:t>
             </a:r>
             <a:endParaRPr lang="en-US" sz="1500" dirty="0"/>
           </a:p>
@@ -8375,7 +8375,7 @@
                 <a:ea typeface="Calibri" pitchFamily="34" charset="-122"/>
                 <a:cs typeface="Calibri" pitchFamily="34" charset="-120"/>
               </a:rPr>
-              <a:t>Orientation cube + named-view snapping</a:t>
+              <a:t>Built: orientation cube and standard views</a:t>
             </a:r>
             <a:endParaRPr lang="en-US" sz="1030" dirty="0"/>
           </a:p>
@@ -8437,7 +8437,7 @@
                 <a:ea typeface="Calibri" pitchFamily="34" charset="-122"/>
                 <a:cs typeface="Calibri" pitchFamily="34" charset="-120"/>
               </a:rPr>
-              <a:t>Docked feature / model tree (click row → highlight face)</a:t>
+              <a:t>Built: model tree; click a row and its faces light up</a:t>
             </a:r>
             <a:endParaRPr lang="en-US" sz="1030" dirty="0"/>
           </a:p>
@@ -8499,7 +8499,7 @@
                 <a:ea typeface="Calibri" pitchFamily="34" charset="-122"/>
                 <a:cs typeface="Calibri" pitchFamily="34" charset="-120"/>
               </a:rPr>
-              <a:t>On-model heatmaps: wall thickness, draft, undercut</a:t>
+              <a:t>Built: thickness, draft and undercut colours on the model</a:t>
             </a:r>
             <a:endParaRPr lang="en-US" sz="1030" dirty="0"/>
           </a:p>
@@ -8561,7 +8561,7 @@
                 <a:ea typeface="Calibri" pitchFamily="34" charset="-122"/>
                 <a:cs typeface="Calibri" pitchFamily="34" charset="-120"/>
               </a:rPr>
-              <a:t>Multi-section planes with cap shading; exploded view</a:t>
+              <a:t>Built: X/Y/Z sections and exploded view (no solid caps yet)</a:t>
             </a:r>
             <a:endParaRPr lang="en-US" sz="1030" dirty="0"/>
           </a:p>
@@ -8623,7 +8623,7 @@
                 <a:ea typeface="Calibri" pitchFamily="34" charset="-122"/>
                 <a:cs typeface="Calibri" pitchFamily="34" charset="-120"/>
               </a:rPr>
-              <a:t>Richer measure: face radius, edge length, face-to-face</a:t>
+              <a:t>Built: radius, angle, point and face-to-face measuring</a:t>
             </a:r>
             <a:endParaRPr lang="en-US" sz="1030" dirty="0"/>
           </a:p>
@@ -8685,7 +8685,7 @@
                 <a:ea typeface="Calibri" pitchFamily="34" charset="-122"/>
                 <a:cs typeface="Calibri" pitchFamily="34" charset="-120"/>
               </a:rPr>
-              <a:t>Per-face → cost: click a face, see its op and £</a:t>
+              <a:t>Built: £ per face after a CAD costing</a:t>
             </a:r>
             <a:endParaRPr lang="en-US" sz="1030" dirty="0"/>
           </a:p>
@@ -8861,7 +8861,7 @@
               <a:buNone/>
             </a:pPr>
             <a:r>
-              <a:rPr lang="en-US" sz="700" spc="150" kern="0" dirty="0">
+              <a:rPr lang="en-US" sz="750" spc="150" kern="0" dirty="0">
                 <a:solidFill>
                   <a:srgbClr val="5C6B85"/>
                 </a:solidFill>
@@ -8871,7 +8871,7 @@
               </a:rPr>
               <a:t>CAD-TO-COST  INTELLIGENCE</a:t>
             </a:r>
-            <a:endParaRPr lang="en-US" sz="700" dirty="0"/>
+            <a:endParaRPr lang="en-US" sz="750" dirty="0"/>
           </a:p>
         </p:txBody>
       </p:sp>
@@ -8928,7 +8928,7 @@
                 <a:ea typeface="Calibri" pitchFamily="34" charset="-122"/>
                 <a:cs typeface="Calibri" pitchFamily="34" charset="-120"/>
               </a:rPr>
-              <a:t>WHY IT IS WORTH IT</a:t>
+              <a:t>BENEFITS AND NEXT STEPS</a:t>
             </a:r>
             <a:endParaRPr lang="en-US" sz="1050" dirty="0"/>
           </a:p>
@@ -8967,7 +8967,7 @@
                 <a:ea typeface="Calibri" pitchFamily="34" charset="-122"/>
                 <a:cs typeface="Calibri" pitchFamily="34" charset="-120"/>
               </a:rPr>
-              <a:t>Benefits, and the recommendation</a:t>
+              <a:t>Why it matters, and what I recommend next</a:t>
             </a:r>
             <a:endParaRPr lang="en-US" sz="2500" dirty="0"/>
           </a:p>
@@ -9006,7 +9006,7 @@
                 <a:ea typeface="Calibri" pitchFamily="34" charset="-122"/>
                 <a:cs typeface="Calibri" pitchFamily="34" charset="-120"/>
               </a:rPr>
-              <a:t>CostVision  ·  Competitive study &amp; build plan  ·  Confidential</a:t>
+              <a:t>CostVision  ·  CAD viewer study &amp; roadmap  ·  Updated September 2026  ·  Confidential</a:t>
             </a:r>
             <a:endParaRPr lang="en-US" sz="750" dirty="0"/>
           </a:p>
@@ -9084,7 +9084,7 @@
               <a:buNone/>
             </a:pPr>
             <a:r>
-              <a:rPr lang="en-US" sz="1100" b="1" dirty="0">
+              <a:rPr lang="en-US" sz="1150" b="1" dirty="0">
                 <a:solidFill>
                   <a:srgbClr val="EAF0F8"/>
                 </a:solidFill>
@@ -9092,9 +9092,9 @@
                 <a:ea typeface="Calibri" pitchFamily="34" charset="-122"/>
                 <a:cs typeface="Calibri" pitchFamily="34" charset="-120"/>
               </a:rPr>
-              <a:t>More auto-capture</a:t>
-            </a:r>
-            <a:endParaRPr lang="en-US" sz="1100" dirty="0"/>
+              <a:t>Less typing</a:t>
+            </a:r>
+            <a:endParaRPr lang="en-US" sz="1150" dirty="0"/>
           </a:p>
         </p:txBody>
       </p:sp>
@@ -9126,7 +9126,7 @@
               <a:buNone/>
             </a:pPr>
             <a:r>
-              <a:rPr lang="en-US" sz="920" dirty="0">
+              <a:rPr lang="en-US" sz="1050" dirty="0">
                 <a:solidFill>
                   <a:srgbClr val="9AA7BD"/>
                 </a:solidFill>
@@ -9134,9 +9134,9 @@
                 <a:ea typeface="Calibri" pitchFamily="34" charset="-122"/>
                 <a:cs typeface="Calibri" pitchFamily="34" charset="-120"/>
               </a:rPr>
-              <a:t>Every feature &amp; tolerance read from CAD is a field nobody types — faster quotes, fewer errors.</a:t>
-            </a:r>
-            <a:endParaRPr lang="en-US" sz="920" dirty="0"/>
+              <a:t>Each feature read from the CAD is a field nobody types. Where geometry cannot decide, the tool asks.</a:t>
+            </a:r>
+            <a:endParaRPr lang="en-US" sz="1050" dirty="0"/>
           </a:p>
         </p:txBody>
       </p:sp>
@@ -9212,7 +9212,7 @@
               <a:buNone/>
             </a:pPr>
             <a:r>
-              <a:rPr lang="en-US" sz="1100" b="1" dirty="0">
+              <a:rPr lang="en-US" sz="1150" b="1" dirty="0">
                 <a:solidFill>
                   <a:srgbClr val="EAF0F8"/>
                 </a:solidFill>
@@ -9220,9 +9220,9 @@
                 <a:ea typeface="Calibri" pitchFamily="34" charset="-122"/>
                 <a:cs typeface="Calibri" pitchFamily="34" charset="-120"/>
               </a:rPr>
-              <a:t>Fewer estimate drifts</a:t>
-            </a:r>
-            <a:endParaRPr lang="en-US" sz="1100" dirty="0"/>
+              <a:t>Fewer slips</a:t>
+            </a:r>
+            <a:endParaRPr lang="en-US" sz="1150" dirty="0"/>
           </a:p>
         </p:txBody>
       </p:sp>
@@ -9254,7 +9254,7 @@
               <a:buNone/>
             </a:pPr>
             <a:r>
-              <a:rPr lang="en-US" sz="920" dirty="0">
+              <a:rPr lang="en-US" sz="1050" dirty="0">
                 <a:solidFill>
                   <a:srgbClr val="9AA7BD"/>
                 </a:solidFill>
@@ -9262,9 +9262,9 @@
                 <a:ea typeface="Calibri" pitchFamily="34" charset="-122"/>
                 <a:cs typeface="Calibri" pitchFamily="34" charset="-120"/>
               </a:rPr>
-              <a:t>Capturing the driver instead of typing it removes a place the number can go wrong.</a:t>
-            </a:r>
-            <a:endParaRPr lang="en-US" sz="920" dirty="0"/>
+              <a:t>A measured value cannot be mistyped. Every input traces back to the geometry or a rate.</a:t>
+            </a:r>
+            <a:endParaRPr lang="en-US" sz="1050" dirty="0"/>
           </a:p>
         </p:txBody>
       </p:sp>
@@ -9340,7 +9340,7 @@
               <a:buNone/>
             </a:pPr>
             <a:r>
-              <a:rPr lang="en-US" sz="1100" b="1" dirty="0">
+              <a:rPr lang="en-US" sz="1150" b="1" dirty="0">
                 <a:solidFill>
                   <a:srgbClr val="EAF0F8"/>
                 </a:solidFill>
@@ -9348,9 +9348,9 @@
                 <a:ea typeface="Calibri" pitchFamily="34" charset="-122"/>
                 <a:cs typeface="Calibri" pitchFamily="34" charset="-120"/>
               </a:rPr>
-              <a:t>DFM at concept</a:t>
-            </a:r>
-            <a:endParaRPr lang="en-US" sz="1100" dirty="0"/>
+              <a:t>Design issues seen early</a:t>
+            </a:r>
+            <a:endParaRPr lang="en-US" sz="1150" dirty="0"/>
           </a:p>
         </p:txBody>
       </p:sp>
@@ -9382,7 +9382,7 @@
               <a:buNone/>
             </a:pPr>
             <a:r>
-              <a:rPr lang="en-US" sz="920" dirty="0">
+              <a:rPr lang="en-US" sz="1050" dirty="0">
                 <a:solidFill>
                   <a:srgbClr val="9AA7BD"/>
                 </a:solidFill>
@@ -9390,9 +9390,9 @@
                 <a:ea typeface="Calibri" pitchFamily="34" charset="-122"/>
                 <a:cs typeface="Calibri" pitchFamily="34" charset="-120"/>
               </a:rPr>
-              <a:t>On-model thickness/draft/undercut catches cost problems while a change is still free.</a:t>
-            </a:r>
-            <a:endParaRPr lang="en-US" sz="920" dirty="0"/>
+              <a:t>Thin walls, zero draft and undercuts show on the model while a change is still cheap.</a:t>
+            </a:r>
+            <a:endParaRPr lang="en-US" sz="1050" dirty="0"/>
           </a:p>
         </p:txBody>
       </p:sp>
@@ -9468,7 +9468,7 @@
               <a:buNone/>
             </a:pPr>
             <a:r>
-              <a:rPr lang="en-US" sz="1100" b="1" dirty="0">
+              <a:rPr lang="en-US" sz="1150" b="1" dirty="0">
                 <a:solidFill>
                   <a:srgbClr val="EAF0F8"/>
                 </a:solidFill>
@@ -9476,9 +9476,9 @@
                 <a:ea typeface="Calibri" pitchFamily="34" charset="-122"/>
                 <a:cs typeface="Calibri" pitchFamily="34" charset="-120"/>
               </a:rPr>
-              <a:t>Demo &amp; sales credibility</a:t>
-            </a:r>
-            <a:endParaRPr lang="en-US" sz="1100" dirty="0"/>
+              <a:t>Easier to explain</a:t>
+            </a:r>
+            <a:endParaRPr lang="en-US" sz="1150" dirty="0"/>
           </a:p>
         </p:txBody>
       </p:sp>
@@ -9510,7 +9510,7 @@
               <a:buNone/>
             </a:pPr>
             <a:r>
-              <a:rPr lang="en-US" sz="920" dirty="0">
+              <a:rPr lang="en-US" sz="1050" dirty="0">
                 <a:solidFill>
                   <a:srgbClr val="9AA7BD"/>
                 </a:solidFill>
@@ -9518,9 +9518,9 @@
                 <a:ea typeface="Calibri" pitchFamily="34" charset="-122"/>
                 <a:cs typeface="Calibri" pitchFamily="34" charset="-120"/>
               </a:rPr>
-              <a:t>A big, CAD-grade viewer is what wins the room — the exact reaction you had to the rival.</a:t>
-            </a:r>
-            <a:endParaRPr lang="en-US" sz="920" dirty="0"/>
+              <a:t>Click a face to see what was measured, and where the money sits. The model backs up the number.</a:t>
+            </a:r>
+            <a:endParaRPr lang="en-US" sz="1050" dirty="0"/>
           </a:p>
         </p:txBody>
       </p:sp>
@@ -9596,7 +9596,7 @@
               <a:buNone/>
             </a:pPr>
             <a:r>
-              <a:rPr lang="en-US" sz="1100" b="1" dirty="0">
+              <a:rPr lang="en-US" sz="1150" b="1" dirty="0">
                 <a:solidFill>
                   <a:srgbClr val="EAF0F8"/>
                 </a:solidFill>
@@ -9604,9 +9604,9 @@
                 <a:ea typeface="Calibri" pitchFamily="34" charset="-122"/>
                 <a:cs typeface="Calibri" pitchFamily="34" charset="-120"/>
               </a:rPr>
-              <a:t>Tolerance-correct cost</a:t>
-            </a:r>
-            <a:endParaRPr lang="en-US" sz="1100" dirty="0"/>
+              <a:t>Tolerance-aware cost (future)</a:t>
+            </a:r>
+            <a:endParaRPr lang="en-US" sz="1150" dirty="0"/>
           </a:p>
         </p:txBody>
       </p:sp>
@@ -9638,7 +9638,7 @@
               <a:buNone/>
             </a:pPr>
             <a:r>
-              <a:rPr lang="en-US" sz="920" dirty="0">
+              <a:rPr lang="en-US" sz="1050" dirty="0">
                 <a:solidFill>
                   <a:srgbClr val="9AA7BD"/>
                 </a:solidFill>
@@ -9646,9 +9646,9 @@
                 <a:ea typeface="Calibri" pitchFamily="34" charset="-122"/>
                 <a:cs typeface="Calibri" pitchFamily="34" charset="-120"/>
               </a:rPr>
-              <a:t>Reading GD&amp;T from the model prices precision parts right — a real differentiator.</a:t>
-            </a:r>
-            <a:endParaRPr lang="en-US" sz="920" dirty="0"/>
+              <a:t>Reading GD&amp;T from the file would price precision parts from the model itself. Not built yet.</a:t>
+            </a:r>
+            <a:endParaRPr lang="en-US" sz="1050" dirty="0"/>
           </a:p>
         </p:txBody>
       </p:sp>
@@ -9724,7 +9724,7 @@
               <a:buNone/>
             </a:pPr>
             <a:r>
-              <a:rPr lang="en-US" sz="1100" b="1" dirty="0">
+              <a:rPr lang="en-US" sz="1150" b="1" dirty="0">
                 <a:solidFill>
                   <a:srgbClr val="EAF0F8"/>
                 </a:solidFill>
@@ -9732,9 +9732,9 @@
                 <a:ea typeface="Calibri" pitchFamily="34" charset="-122"/>
                 <a:cs typeface="Calibri" pitchFamily="34" charset="-120"/>
               </a:rPr>
-              <a:t>Still glass-box &amp; ours</a:t>
-            </a:r>
-            <a:endParaRPr lang="en-US" sz="1100" dirty="0"/>
+              <a:t>Still traceable</a:t>
+            </a:r>
+            <a:endParaRPr lang="en-US" sz="1150" dirty="0"/>
           </a:p>
         </p:txBody>
       </p:sp>
@@ -9766,7 +9766,7 @@
               <a:buNone/>
             </a:pPr>
             <a:r>
-              <a:rPr lang="en-US" sz="920" dirty="0">
+              <a:rPr lang="en-US" sz="1050" dirty="0">
                 <a:solidFill>
                   <a:srgbClr val="9AA7BD"/>
                 </a:solidFill>
@@ -9774,9 +9774,9 @@
                 <a:ea typeface="Calibri" pitchFamily="34" charset="-122"/>
                 <a:cs typeface="Calibri" pitchFamily="34" charset="-120"/>
               </a:rPr>
-              <a:t>Every captured value is a face a human can verify; secure, on-prem, self-learning.</a:t>
-            </a:r>
-            <a:endParaRPr lang="en-US" sz="920" dirty="0"/>
+              <a:t>The tool measures and calculates. AI never sets a price, and at JLR it is switched off.</a:t>
+            </a:r>
+            <a:endParaRPr lang="en-US" sz="1050" dirty="0"/>
           </a:p>
         </p:txBody>
       </p:sp>
@@ -9902,7 +9902,7 @@
                 <a:ea typeface="Calibri" pitchFamily="34" charset="-122"/>
                 <a:cs typeface="Calibri" pitchFamily="34" charset="-120"/>
               </a:rPr>
-              <a:t>Approve Phase 0 now</a:t>
+              <a:t>Use what is built on real JLR parts, and log actual prices</a:t>
             </a:r>
             <a:pPr indent="0" marL="0">
               <a:lnSpc>
@@ -9919,7 +9919,7 @@
                 <a:ea typeface="Calibri" pitchFamily="34" charset="-122"/>
                 <a:cs typeface="Calibri" pitchFamily="34" charset="-120"/>
               </a:rPr>
-              <a:t> — the bigger viewer plus painting the data we already compute, ~1–2 weeks. It delivers both of your asks fastest and de-risks the rest. Then take Phases 1–2 as a fast-follow. Phase 3 (graph-neural AFR) stays a research track we green-light once the visible gap is closed.</a:t>
+              <a:t> so we learn how close the estimates are. Next build: solid section caps, then chamfer, slot and thread recognition, and a better STL path. Tolerances from STEP AP242 after that. Phase 3 stays a research track.</a:t>
             </a:r>
             <a:endParaRPr lang="en-US" sz="1100" dirty="0"/>
           </a:p>
@@ -10095,7 +10095,7 @@
               <a:buNone/>
             </a:pPr>
             <a:r>
-              <a:rPr lang="en-US" sz="700" spc="150" kern="0" dirty="0">
+              <a:rPr lang="en-US" sz="750" spc="150" kern="0" dirty="0">
                 <a:solidFill>
                   <a:srgbClr val="5C6B85"/>
                 </a:solidFill>
@@ -10105,7 +10105,7 @@
               </a:rPr>
               <a:t>CAD-TO-COST  INTELLIGENCE</a:t>
             </a:r>
-            <a:endParaRPr lang="en-US" sz="700" dirty="0"/>
+            <a:endParaRPr lang="en-US" sz="750" dirty="0"/>
           </a:p>
         </p:txBody>
       </p:sp>
@@ -10162,7 +10162,7 @@
                 <a:ea typeface="Calibri" pitchFamily="34" charset="-122"/>
                 <a:cs typeface="Calibri" pitchFamily="34" charset="-120"/>
               </a:rPr>
-              <a:t>CAD-TO-COST · ZERO MANUAL ENTRY</a:t>
+              <a:t>CAD-TO-COST · MEASURED, THEN RULES · STEP, IGES OR STL</a:t>
             </a:r>
             <a:endParaRPr lang="en-US" sz="1050" dirty="0"/>
           </a:p>
@@ -10201,7 +10201,7 @@
                 <a:ea typeface="Calibri" pitchFamily="34" charset="-122"/>
                 <a:cs typeface="Calibri" pitchFamily="34" charset="-120"/>
               </a:rPr>
-              <a:t>What the Viewer Captures — Fed Straight to the Cost Engine</a:t>
+              <a:t>What the Tool Measures — and Where It Goes</a:t>
             </a:r>
             <a:endParaRPr lang="en-US" sz="2500" dirty="0"/>
           </a:p>
@@ -10240,7 +10240,7 @@
                 <a:ea typeface="Calibri" pitchFamily="34" charset="-122"/>
                 <a:cs typeface="Calibri" pitchFamily="34" charset="-120"/>
               </a:rPr>
-              <a:t>CostVision  ·  Competitive study &amp; build plan  ·  Confidential</a:t>
+              <a:t>CostVision  ·  CAD viewer study &amp; roadmap  ·  Updated September 2026  ·  Confidential</a:t>
             </a:r>
             <a:endParaRPr lang="en-US" sz="750" dirty="0"/>
           </a:p>
@@ -10306,7 +10306,7 @@
                 <a:ea typeface="Calibri" pitchFamily="34" charset="-122"/>
                 <a:cs typeface="Calibri" pitchFamily="34" charset="-120"/>
               </a:rPr>
-              <a:t>Auto-captured from geometry (no typing)</a:t>
+              <a:t>Measured from the geometry</a:t>
             </a:r>
             <a:endParaRPr lang="en-US" sz="950" dirty="0"/>
           </a:p>
@@ -10345,7 +10345,7 @@
                 <a:ea typeface="Calibri" pitchFamily="34" charset="-122"/>
                 <a:cs typeface="Calibri" pitchFamily="34" charset="-120"/>
               </a:rPr>
-              <a:t>→ Feeds this cost driver</a:t>
+              <a:t>→ Feeds this cost input</a:t>
             </a:r>
             <a:endParaRPr lang="en-US" sz="950" dirty="0"/>
           </a:p>
@@ -10411,7 +10411,7 @@
                 <a:ea typeface="Calibri" pitchFamily="34" charset="-122"/>
                 <a:cs typeface="Calibri" pitchFamily="34" charset="-120"/>
               </a:rPr>
-              <a:t>Volume — exact (OCCT kernel)</a:t>
+              <a:t>Volume (exact, from the solid)</a:t>
             </a:r>
             <a:endParaRPr lang="en-US" sz="950" dirty="0"/>
           </a:p>
@@ -10555,7 +10555,7 @@
                 <a:ea typeface="Calibri" pitchFamily="34" charset="-122"/>
                 <a:cs typeface="Calibri" pitchFamily="34" charset="-120"/>
               </a:rPr>
-              <a:t>Raw-material £ (Al/steel/iron/Cu/Ti)</a:t>
+              <a:t>Material cost</a:t>
             </a:r>
             <a:endParaRPr lang="en-US" sz="950" dirty="0"/>
           </a:p>
@@ -10660,7 +10660,7 @@
                 <a:ea typeface="Calibri" pitchFamily="34" charset="-122"/>
                 <a:cs typeface="Calibri" pitchFamily="34" charset="-120"/>
               </a:rPr>
-              <a:t>Machine sizing · stock · setups</a:t>
+              <a:t>Machine size · stock · setups</a:t>
             </a:r>
             <a:endParaRPr lang="en-US" sz="950" dirty="0"/>
           </a:p>
@@ -10726,7 +10726,7 @@
                 <a:ea typeface="Calibri" pitchFamily="34" charset="-122"/>
                 <a:cs typeface="Calibri" pitchFamily="34" charset="-120"/>
               </a:rPr>
-              <a:t>Body / component count</a:t>
+              <a:t>Body count</a:t>
             </a:r>
             <a:endParaRPr lang="en-US" sz="950" dirty="0"/>
           </a:p>
@@ -10765,7 +10765,7 @@
                 <a:ea typeface="Calibri" pitchFamily="34" charset="-122"/>
                 <a:cs typeface="Calibri" pitchFamily="34" charset="-120"/>
               </a:rPr>
-              <a:t>Assembly cost · BOM line count</a:t>
+              <a:t>Flags an assembly, not one part</a:t>
             </a:r>
             <a:endParaRPr lang="en-US" sz="950" dirty="0"/>
           </a:p>
@@ -10831,7 +10831,7 @@
                 <a:ea typeface="Calibri" pitchFamily="34" charset="-122"/>
                 <a:cs typeface="Calibri" pitchFamily="34" charset="-120"/>
               </a:rPr>
-              <a:t>Hole &amp; boss table — Ø, depth, count</a:t>
+              <a:t>Hole &amp; boss table (Ø, depth)</a:t>
             </a:r>
             <a:endParaRPr lang="en-US" sz="950" dirty="0"/>
           </a:p>
@@ -10870,7 +10870,7 @@
                 <a:ea typeface="Calibri" pitchFamily="34" charset="-122"/>
                 <a:cs typeface="Calibri" pitchFamily="34" charset="-120"/>
               </a:rPr>
-              <a:t>Drill / bore / tap operations</a:t>
+              <a:t>Drill, bore and tap operations</a:t>
             </a:r>
             <a:endParaRPr lang="en-US" sz="950" dirty="0"/>
           </a:p>
@@ -10936,7 +10936,7 @@
                 <a:ea typeface="Calibri" pitchFamily="34" charset="-122"/>
                 <a:cs typeface="Calibri" pitchFamily="34" charset="-120"/>
               </a:rPr>
-              <a:t>Wall thickness — min/mean/heatmap</a:t>
+              <a:t>Wall thickness</a:t>
             </a:r>
             <a:endParaRPr lang="en-US" sz="950" dirty="0"/>
           </a:p>
@@ -10975,7 +10975,7 @@
                 <a:ea typeface="Calibri" pitchFamily="34" charset="-122"/>
                 <a:cs typeface="Calibri" pitchFamily="34" charset="-120"/>
               </a:rPr>
-              <a:t>Mould &amp; cast feasibility · cooling</a:t>
+              <a:t>Route choice · mould &amp; cast checks</a:t>
             </a:r>
             <a:endParaRPr lang="en-US" sz="950" dirty="0"/>
           </a:p>
@@ -11041,7 +11041,7 @@
                 <a:ea typeface="Calibri" pitchFamily="34" charset="-122"/>
                 <a:cs typeface="Calibri" pitchFamily="34" charset="-120"/>
               </a:rPr>
-              <a:t>Draft &amp; undercut analysis</a:t>
+              <a:t>Draft &amp; undercuts</a:t>
             </a:r>
             <a:endParaRPr lang="en-US" sz="950" dirty="0"/>
           </a:p>
@@ -11080,7 +11080,7 @@
                 <a:ea typeface="Calibri" pitchFamily="34" charset="-122"/>
                 <a:cs typeface="Calibri" pitchFamily="34" charset="-120"/>
               </a:rPr>
-              <a:t>Tooling complexity — slides</a:t>
+              <a:t>Tooling complexity (side actions)</a:t>
             </a:r>
             <a:endParaRPr lang="en-US" sz="950" dirty="0"/>
           </a:p>
@@ -11146,7 +11146,7 @@
                 <a:ea typeface="Calibri" pitchFamily="34" charset="-122"/>
                 <a:cs typeface="Calibri" pitchFamily="34" charset="-120"/>
               </a:rPr>
-              <a:t>Face-type areas (planar/cyl)</a:t>
+              <a:t>Surface area</a:t>
             </a:r>
             <a:endParaRPr lang="en-US" sz="950" dirty="0"/>
           </a:p>
@@ -11185,7 +11185,7 @@
                 <a:ea typeface="Calibri" pitchFamily="34" charset="-122"/>
                 <a:cs typeface="Calibri" pitchFamily="34" charset="-120"/>
               </a:rPr>
-              <a:t>Machining area · paint area</a:t>
+              <a:t>Area-driven operations</a:t>
             </a:r>
             <a:endParaRPr lang="en-US" sz="950" dirty="0"/>
           </a:p>
@@ -11251,7 +11251,7 @@
                 <a:ea typeface="Calibri" pitchFamily="34" charset="-122"/>
                 <a:cs typeface="Calibri" pitchFamily="34" charset="-120"/>
               </a:rPr>
-              <a:t>CNC cycle-time &amp; setup estimate</a:t>
+              <a:t>CNC cycle &amp; setups (STEP/IGES)</a:t>
             </a:r>
             <a:endParaRPr lang="en-US" sz="950" dirty="0"/>
           </a:p>
@@ -11290,7 +11290,7 @@
                 <a:ea typeface="Calibri" pitchFamily="34" charset="-122"/>
                 <a:cs typeface="Calibri" pitchFamily="34" charset="-120"/>
               </a:rPr>
-              <a:t>Process-time baseline</a:t>
+              <a:t>Machining time baseline</a:t>
             </a:r>
             <a:endParaRPr lang="en-US" sz="950" dirty="0"/>
           </a:p>
@@ -11368,7 +11368,7 @@
               <a:buNone/>
             </a:pPr>
             <a:r>
-              <a:rPr lang="en-US" sz="950" b="1" dirty="0">
+              <a:rPr lang="en-US" sz="1100" b="1" dirty="0">
                 <a:solidFill>
                   <a:srgbClr val="EAF0F8"/>
                 </a:solidFill>
@@ -11376,9 +11376,9 @@
                 <a:ea typeface="Calibri" pitchFamily="34" charset="-122"/>
                 <a:cs typeface="Calibri" pitchFamily="34" charset="-120"/>
               </a:rPr>
-              <a:t>Worked example — Spur Gear (m3 · z38)</a:t>
-            </a:r>
-            <a:endParaRPr lang="en-US" sz="950" dirty="0"/>
+              <a:t>When the geometry cannot decide</a:t>
+            </a:r>
+            <a:endParaRPr lang="en-US" sz="1100" dirty="0"/>
           </a:p>
         </p:txBody>
       </p:sp>
@@ -11410,7 +11410,7 @@
               <a:buNone/>
             </a:pPr>
             <a:r>
-              <a:rPr lang="en-US" sz="950" dirty="0">
+              <a:rPr lang="en-US" sz="930" dirty="0">
                 <a:solidFill>
                   <a:srgbClr val="9AA7BD"/>
                 </a:solidFill>
@@ -11418,9 +11418,9 @@
                 <a:ea typeface="Calibri" pitchFamily="34" charset="-122"/>
                 <a:cs typeface="Calibri" pitchFamily="34" charset="-120"/>
               </a:rPr>
-              <a:t>20MnCr5 case-hardening steel — captured automatically:</a:t>
-            </a:r>
-            <a:endParaRPr lang="en-US" sz="950" dirty="0"/>
+              <a:t>The rules ask the engineer instead of guessing: the process route, the material family, a hole count on an STL.</a:t>
+            </a:r>
+            <a:endParaRPr lang="en-US" sz="930" dirty="0"/>
           </a:p>
           <a:p>
             <a:pPr indent="0" marL="0">
@@ -11429,18 +11429,7 @@
               </a:lnSpc>
               <a:buNone/>
             </a:pPr>
-            <a:r>
-              <a:rPr lang="en-US" sz="950" dirty="0">
-                <a:solidFill>
-                  <a:srgbClr val="9AA7BD"/>
-                </a:solidFill>
-                <a:latin typeface="Calibri" pitchFamily="34" charset="0"/>
-                <a:ea typeface="Calibri" pitchFamily="34" charset="-122"/>
-                <a:cs typeface="Calibri" pitchFamily="34" charset="-120"/>
-              </a:rPr>
-              <a:t>  Volume 264.9 cm³  ·  Weight 2.08 kg</a:t>
-            </a:r>
-            <a:endParaRPr lang="en-US" sz="950" dirty="0"/>
+            <a:endParaRPr lang="en-US" sz="930" dirty="0"/>
           </a:p>
           <a:p>
             <a:pPr indent="0" marL="0">
@@ -11450,7 +11439,7 @@
               <a:buNone/>
             </a:pPr>
             <a:r>
-              <a:rPr lang="en-US" sz="950" dirty="0">
+              <a:rPr lang="en-US" sz="930" dirty="0">
                 <a:solidFill>
                   <a:srgbClr val="9AA7BD"/>
                 </a:solidFill>
@@ -11458,9 +11447,9 @@
                 <a:ea typeface="Calibri" pitchFamily="34" charset="-122"/>
                 <a:cs typeface="Calibri" pitchFamily="34" charset="-120"/>
               </a:rPr>
-              <a:t>  Envelope 120 × 120 × 30 mm  ·  1 body</a:t>
-            </a:r>
-            <a:endParaRPr lang="en-US" sz="950" dirty="0"/>
+              <a:t>Thick-walled parts (walls over about 6 mm) are offered casting, forging, cast + machine or machining.</a:t>
+            </a:r>
+            <a:endParaRPr lang="en-US" sz="930" dirty="0"/>
           </a:p>
           <a:p>
             <a:pPr indent="0" marL="0">
@@ -11469,7 +11458,7 @@
               </a:lnSpc>
               <a:buNone/>
             </a:pPr>
-            <a:endParaRPr lang="en-US" sz="950" dirty="0"/>
+            <a:endParaRPr lang="en-US" sz="930" dirty="0"/>
           </a:p>
           <a:p>
             <a:pPr indent="0" marL="0">
@@ -11479,7 +11468,7 @@
               <a:buNone/>
             </a:pPr>
             <a:r>
-              <a:rPr lang="en-US" sz="950" dirty="0">
+              <a:rPr lang="en-US" sz="930" dirty="0">
                 <a:solidFill>
                   <a:srgbClr val="9AA7BD"/>
                 </a:solidFill>
@@ -11487,9 +11476,9 @@
                 <a:ea typeface="Calibri" pitchFamily="34" charset="-122"/>
                 <a:cs typeface="Calibri" pitchFamily="34" charset="-120"/>
               </a:rPr>
-              <a:t>→ Should-cost, India ex-works (GBP):</a:t>
-            </a:r>
-            <a:endParaRPr lang="en-US" sz="950" dirty="0"/>
+              <a:t>An STL has no feature table, so a machined STL waits until the engineer types a cycle time.</a:t>
+            </a:r>
+            <a:endParaRPr lang="en-US" sz="930" dirty="0"/>
           </a:p>
           <a:p>
             <a:pPr indent="0" marL="0">
@@ -11498,18 +11487,7 @@
               </a:lnSpc>
               <a:buNone/>
             </a:pPr>
-            <a:r>
-              <a:rPr lang="en-US" sz="950" dirty="0">
-                <a:solidFill>
-                  <a:srgbClr val="9AA7BD"/>
-                </a:solidFill>
-                <a:latin typeface="Calibri" pitchFamily="34" charset="0"/>
-                <a:ea typeface="Calibri" pitchFamily="34" charset="-122"/>
-                <a:cs typeface="Calibri" pitchFamily="34" charset="-120"/>
-              </a:rPr>
-              <a:t>  Material £3.36 · Process £11.40 · Labour £1.36</a:t>
-            </a:r>
-            <a:endParaRPr lang="en-US" sz="950" dirty="0"/>
+            <a:endParaRPr lang="en-US" sz="930" dirty="0"/>
           </a:p>
           <a:p>
             <a:pPr indent="0" marL="0">
@@ -11519,7 +11497,7 @@
               <a:buNone/>
             </a:pPr>
             <a:r>
-              <a:rPr lang="en-US" sz="950" dirty="0">
+              <a:rPr lang="en-US" sz="930" dirty="0">
                 <a:solidFill>
                   <a:srgbClr val="9AA7BD"/>
                 </a:solidFill>
@@ -11527,29 +11505,9 @@
                 <a:ea typeface="Calibri" pitchFamily="34" charset="-122"/>
                 <a:cs typeface="Calibri" pitchFamily="34" charset="-120"/>
               </a:rPr>
-              <a:t>  Overhead £1.95 · Margin £1.83  + heat-treat £1.77</a:t>
-            </a:r>
-            <a:endParaRPr lang="en-US" sz="950" dirty="0"/>
-          </a:p>
-          <a:p>
-            <a:pPr indent="0" marL="0">
-              <a:lnSpc>
-                <a:spcPct val="106000"/>
-              </a:lnSpc>
-              <a:buNone/>
-            </a:pPr>
-            <a:r>
-              <a:rPr lang="en-US" sz="950" dirty="0">
-                <a:solidFill>
-                  <a:srgbClr val="9AA7BD"/>
-                </a:solidFill>
-                <a:latin typeface="Calibri" pitchFamily="34" charset="0"/>
-                <a:ea typeface="Calibri" pitchFamily="34" charset="-122"/>
-                <a:cs typeface="Calibri" pitchFamily="34" charset="-120"/>
-              </a:rPr>
-              <a:t>  =  £21.90 / part  (≈ ₹2,398)  ·  £10.53 / kg</a:t>
-            </a:r>
-            <a:endParaRPr lang="en-US" sz="950" dirty="0"/>
+              <a:t>Sheet metal: upload a DXF flat pattern with the STEP, and the measured blank replaces the bounding box.</a:t>
+            </a:r>
+            <a:endParaRPr lang="en-US" sz="930" dirty="0"/>
           </a:p>
         </p:txBody>
       </p:sp>
@@ -11625,7 +11583,7 @@
               <a:buNone/>
             </a:pPr>
             <a:r>
-              <a:rPr lang="en-US" sz="1050" b="1" dirty="0">
+              <a:rPr lang="en-US" sz="1100" b="1" dirty="0">
                 <a:solidFill>
                   <a:srgbClr val="EAF0F8"/>
                 </a:solidFill>
@@ -11635,7 +11593,7 @@
               </a:rPr>
               <a:t>The golden rule</a:t>
             </a:r>
-            <a:endParaRPr lang="en-US" sz="1050" dirty="0"/>
+            <a:endParaRPr lang="en-US" sz="1100" dirty="0"/>
           </a:p>
         </p:txBody>
       </p:sp>
@@ -11675,7 +11633,7 @@
                 <a:ea typeface="Calibri" pitchFamily="34" charset="-122"/>
                 <a:cs typeface="Calibri" pitchFamily="34" charset="-120"/>
               </a:rPr>
-              <a:t>AI never sets a price. It only classifies material &amp; process; every £ is deterministic arithmetic on the measured geometry, bounded and traceable to the rate library — which is what makes the output defensible.</a:t>
+              <a:t>AI never sets a price. At JLR it is switched off. The CAD path runs on measured geometry and rules, for 13 commodities. Every £ is plain arithmetic, traceable to a rate.</a:t>
             </a:r>
             <a:endParaRPr lang="en-US" sz="950" dirty="0"/>
           </a:p>
@@ -11851,7 +11809,7 @@
               <a:buNone/>
             </a:pPr>
             <a:r>
-              <a:rPr lang="en-US" sz="700" spc="150" kern="0" dirty="0">
+              <a:rPr lang="en-US" sz="750" spc="150" kern="0" dirty="0">
                 <a:solidFill>
                   <a:srgbClr val="5C6B85"/>
                 </a:solidFill>
@@ -11861,7 +11819,7 @@
               </a:rPr>
               <a:t>CAD-TO-COST  INTELLIGENCE</a:t>
             </a:r>
-            <a:endParaRPr lang="en-US" sz="700" dirty="0"/>
+            <a:endParaRPr lang="en-US" sz="750" dirty="0"/>
           </a:p>
         </p:txBody>
       </p:sp>
@@ -11957,7 +11915,7 @@
                 <a:ea typeface="Calibri" pitchFamily="34" charset="-122"/>
                 <a:cs typeface="Calibri" pitchFamily="34" charset="-120"/>
               </a:rPr>
-              <a:t>What we found — and the bet</a:t>
+              <a:t>What we found</a:t>
             </a:r>
             <a:endParaRPr lang="en-US" sz="2500" dirty="0"/>
           </a:p>
@@ -11996,7 +11954,7 @@
                 <a:ea typeface="Calibri" pitchFamily="34" charset="-122"/>
                 <a:cs typeface="Calibri" pitchFamily="34" charset="-120"/>
               </a:rPr>
-              <a:t>CostVision  ·  Competitive study &amp; build plan  ·  Confidential</a:t>
+              <a:t>CostVision  ·  CAD viewer study &amp; roadmap  ·  Updated September 2026  ·  Confidential</a:t>
             </a:r>
             <a:endParaRPr lang="en-US" sz="750" dirty="0"/>
           </a:p>
@@ -12141,7 +12099,7 @@
                 <a:ea typeface="Calibri" pitchFamily="34" charset="-122"/>
                 <a:cs typeface="Calibri" pitchFamily="34" charset="-120"/>
               </a:rPr>
-              <a:t>The pattern is universal</a:t>
+              <a:t>The pattern is the same everywhere</a:t>
             </a:r>
             <a:endParaRPr lang="en-US" sz="1300" dirty="0"/>
           </a:p>
@@ -12183,7 +12141,7 @@
                 <a:ea typeface="Calibri" pitchFamily="34" charset="-122"/>
                 <a:cs typeface="Calibri" pitchFamily="34" charset="-120"/>
               </a:rPr>
-              <a:t>Every leader runs automatic feature recognition on the CAD B-rep, maps features to cost drivers, and lets a human CORRECT — never re-type — the geometry.</a:t>
+              <a:t>The leading tools find features on the CAD solid (the B-rep: its exact faces and edges), turn them into cost drivers, and let a person correct the result instead of retyping the part.</a:t>
             </a:r>
             <a:endParaRPr lang="en-US" sz="1050" dirty="0"/>
           </a:p>
@@ -12328,7 +12286,7 @@
                 <a:ea typeface="Calibri" pitchFamily="34" charset="-122"/>
                 <a:cs typeface="Calibri" pitchFamily="34" charset="-120"/>
               </a:rPr>
-              <a:t>We are already strong where it is hard</a:t>
+              <a:t>We already had the hard part</a:t>
             </a:r>
             <a:endParaRPr lang="en-US" sz="1300" dirty="0"/>
           </a:p>
@@ -12370,7 +12328,7 @@
                 <a:ea typeface="Calibri" pitchFamily="34" charset="-122"/>
                 <a:cs typeface="Calibri" pitchFamily="34" charset="-120"/>
               </a:rPr>
-              <a:t>Our OCCT engine already measures holes, depths, walls, draft, setups and feeds them to cost. Our real gaps are the VIEWER and showing what we already know.</a:t>
+              <a:t>Our geometry engine measures volume, size, walls, holes, draft and setups. Rules turn that into cost inputs. Where the geometry cannot decide, the tool asks the engineer.</a:t>
             </a:r>
             <a:endParaRPr lang="en-US" sz="1050" dirty="0"/>
           </a:p>
@@ -12515,7 +12473,7 @@
                 <a:ea typeface="Calibri" pitchFamily="34" charset="-122"/>
                 <a:cs typeface="Calibri" pitchFamily="34" charset="-120"/>
               </a:rPr>
-              <a:t>The "feel" is on-model overlays</a:t>
+              <a:t>The "CAD feel" is analysis on the model</a:t>
             </a:r>
             <a:endParaRPr lang="en-US" sz="1300" dirty="0"/>
           </a:p>
@@ -12557,7 +12515,7 @@
                 <a:ea typeface="Calibri" pitchFamily="34" charset="-122"/>
                 <a:cs typeface="Calibri" pitchFamily="34" charset="-120"/>
               </a:rPr>
-              <a:t>What makes a viewer feel like CAD software is DFM painted ON the model — thickness &amp; draft heatmaps, section, a feature tree — plus room to breathe (a big canvas).</a:t>
+              <a:t>Wall thickness and draft coloured on the part, sections, a model tree and a big canvas. Since July most of this has been built into our viewer.</a:t>
             </a:r>
             <a:endParaRPr lang="en-US" sz="1050" dirty="0"/>
           </a:p>
@@ -12702,7 +12660,7 @@
                 <a:ea typeface="Calibri" pitchFamily="34" charset="-122"/>
                 <a:cs typeface="Calibri" pitchFamily="34" charset="-120"/>
               </a:rPr>
-              <a:t>The build is bounded &amp; staged</a:t>
+              <a:t>What is left is deeper capture</a:t>
             </a:r>
             <a:endParaRPr lang="en-US" sz="1300" dirty="0"/>
           </a:p>
@@ -12744,7 +12702,7 @@
                 <a:ea typeface="Calibri" pitchFamily="34" charset="-122"/>
                 <a:cs typeface="Calibri" pitchFamily="34" charset="-120"/>
               </a:rPr>
-              <a:t>A 4-phase plan: quick wins first (bigger viewer + paint the data we already compute), then CAD-grade tools, then deeper capture (PMI/tolerances), then best-in-class AFR.</a:t>
+              <a:t>Tolerances read from the CAD file, more feature types and a better STL path are still roadmap. Browser-side B-rep and learned recognition are future research.</a:t>
             </a:r>
             <a:endParaRPr lang="en-US" sz="1050" dirty="0"/>
           </a:p>
@@ -12920,7 +12878,7 @@
               <a:buNone/>
             </a:pPr>
             <a:r>
-              <a:rPr lang="en-US" sz="700" spc="150" kern="0" dirty="0">
+              <a:rPr lang="en-US" sz="750" spc="150" kern="0" dirty="0">
                 <a:solidFill>
                   <a:srgbClr val="5C6B85"/>
                 </a:solidFill>
@@ -12930,7 +12888,7 @@
               </a:rPr>
               <a:t>CAD-TO-COST  INTELLIGENCE</a:t>
             </a:r>
-            <a:endParaRPr lang="en-US" sz="700" dirty="0"/>
+            <a:endParaRPr lang="en-US" sz="750" dirty="0"/>
           </a:p>
         </p:txBody>
       </p:sp>
@@ -12987,7 +12945,7 @@
                 <a:ea typeface="Calibri" pitchFamily="34" charset="-122"/>
                 <a:cs typeface="Calibri" pitchFamily="34" charset="-120"/>
               </a:rPr>
-              <a:t>THE PATTERN · VERIFIED</a:t>
+              <a:t>THE PATTERN · FROM PUBLIC MATERIAL</a:t>
             </a:r>
             <a:endParaRPr lang="en-US" sz="1050" dirty="0"/>
           </a:p>
@@ -13026,7 +12984,7 @@
                 <a:ea typeface="Calibri" pitchFamily="34" charset="-122"/>
                 <a:cs typeface="Calibri" pitchFamily="34" charset="-120"/>
               </a:rPr>
-              <a:t>How the best tools turn CAD into cost</a:t>
+              <a:t>How the leading tools turn CAD into cost</a:t>
             </a:r>
             <a:endParaRPr lang="en-US" sz="2500" dirty="0"/>
           </a:p>
@@ -13065,7 +13023,7 @@
                 <a:ea typeface="Calibri" pitchFamily="34" charset="-122"/>
                 <a:cs typeface="Calibri" pitchFamily="34" charset="-120"/>
               </a:rPr>
-              <a:t>CostVision  ·  Competitive study &amp; build plan  ·  Confidential</a:t>
+              <a:t>CostVision  ·  CAD viewer study &amp; roadmap  ·  Updated September 2026  ·  Confidential</a:t>
             </a:r>
             <a:endParaRPr lang="en-US" sz="750" dirty="0"/>
           </a:p>
@@ -13193,7 +13151,7 @@
                 <a:ea typeface="Calibri" pitchFamily="34" charset="-122"/>
                 <a:cs typeface="Calibri" pitchFamily="34" charset="-120"/>
               </a:rPr>
-              <a:t>STEP / native CAD / Parasolid</a:t>
+              <a:t>STEP, native CAD or Parasolid file</a:t>
             </a:r>
             <a:endParaRPr lang="en-US" sz="850" dirty="0"/>
           </a:p>
@@ -13318,7 +13276,7 @@
                 <a:ea typeface="Calibri" pitchFamily="34" charset="-122"/>
                 <a:cs typeface="Calibri" pitchFamily="34" charset="-120"/>
               </a:rPr>
-              <a:t>B-rep AFR</a:t>
+              <a:t>Feature finding</a:t>
             </a:r>
             <a:endParaRPr lang="en-US" sz="1200" dirty="0"/>
           </a:p>
@@ -13360,7 +13318,7 @@
                 <a:ea typeface="Calibri" pitchFamily="34" charset="-122"/>
                 <a:cs typeface="Calibri" pitchFamily="34" charset="-120"/>
               </a:rPr>
-              <a:t>recognise holes, pockets, bends, ribs, undercuts…</a:t>
+              <a:t>find holes, pockets, bends, ribs, undercuts (AFR: automatic feature recognition)</a:t>
             </a:r>
             <a:endParaRPr lang="en-US" sz="850" dirty="0"/>
           </a:p>
@@ -13527,7 +13485,7 @@
                 <a:ea typeface="Calibri" pitchFamily="34" charset="-122"/>
                 <a:cs typeface="Calibri" pitchFamily="34" charset="-120"/>
               </a:rPr>
-              <a:t>features map to routing, ops, tooling</a:t>
+              <a:t>each feature maps to a route, operations and tooling</a:t>
             </a:r>
             <a:endParaRPr lang="en-US" sz="850" dirty="0"/>
           </a:p>
@@ -13652,7 +13610,7 @@
                 <a:ea typeface="Calibri" pitchFamily="34" charset="-122"/>
                 <a:cs typeface="Calibri" pitchFamily="34" charset="-120"/>
               </a:rPr>
-              <a:t>Human CORRECTS</a:t>
+              <a:t>Person corrects</a:t>
             </a:r>
             <a:endParaRPr lang="en-US" sz="1200" dirty="0"/>
           </a:p>
@@ -13694,7 +13652,7 @@
                 <a:ea typeface="Calibri" pitchFamily="34" charset="-122"/>
                 <a:cs typeface="Calibri" pitchFamily="34" charset="-120"/>
               </a:rPr>
-              <a:t>fix a mis-read feature — not re-type geometry</a:t>
+              <a:t>fix a feature that was read wrong; no retyping the part</a:t>
             </a:r>
             <a:endParaRPr lang="en-US" sz="850" dirty="0"/>
           </a:p>
@@ -13861,7 +13819,7 @@
                 <a:ea typeface="Calibri" pitchFamily="34" charset="-122"/>
                 <a:cs typeface="Calibri" pitchFamily="34" charset="-120"/>
               </a:rPr>
-              <a:t>bottom-up, defensible</a:t>
+              <a:t>built up from the drivers, so it can be explained</a:t>
             </a:r>
             <a:endParaRPr lang="en-US" sz="850" dirty="0"/>
           </a:p>
@@ -13947,7 +13905,7 @@
                 <a:ea typeface="Calibri" pitchFamily="34" charset="-122"/>
                 <a:cs typeface="Calibri" pitchFamily="34" charset="-120"/>
               </a:rPr>
-              <a:t>aPriori — Geometric Cost Drivers</a:t>
+              <a:t>aPriori — geometric cost drivers</a:t>
             </a:r>
             <a:endParaRPr lang="en-US" sz="1050" dirty="0"/>
           </a:p>
@@ -13981,7 +13939,7 @@
               <a:buNone/>
             </a:pPr>
             <a:r>
-              <a:rPr lang="en-US" sz="900" dirty="0">
+              <a:rPr lang="en-US" sz="1050" dirty="0">
                 <a:solidFill>
                   <a:srgbClr val="9AA7BD"/>
                 </a:solidFill>
@@ -13989,9 +13947,9 @@
                 <a:ea typeface="Calibri" pitchFamily="34" charset="-122"/>
                 <a:cs typeface="Calibri" pitchFamily="34" charset="-120"/>
               </a:rPr>
-              <a:t>Inspects the raw B-rep — independent of how the native CAD built the feature — to extract named "Geometric Cost Drivers", then builds cost bottom-up. Because it costs from STEP / Parasolid (history-free formats), the recognition is provably topology-based, not feature-tree replay. GD&amp;T can be added onto drivers to steer the process route.</a:t>
-            </a:r>
-            <a:endParaRPr lang="en-US" sz="900" dirty="0"/>
+              <a:t>As aPriori describes it, the tool reads the 3D model, breaks it into individual geometric cost drivers, and builds the cost from the bottom up.</a:t>
+            </a:r>
+            <a:endParaRPr lang="en-US" sz="1050" dirty="0"/>
           </a:p>
           <a:p>
             <a:pPr indent="0" marL="0">
@@ -14000,7 +13958,7 @@
               </a:lnSpc>
               <a:buNone/>
             </a:pPr>
-            <a:endParaRPr lang="en-US" sz="900" dirty="0"/>
+            <a:endParaRPr lang="en-US" sz="1050" dirty="0"/>
           </a:p>
           <a:p>
             <a:pPr indent="0" marL="0">
@@ -14010,7 +13968,7 @@
               <a:buNone/>
             </a:pPr>
             <a:r>
-              <a:rPr lang="en-US" sz="900" dirty="0">
+              <a:rPr lang="en-US" sz="1050" dirty="0">
                 <a:solidFill>
                   <a:srgbClr val="9AA7BD"/>
                 </a:solidFill>
@@ -14018,9 +13976,9 @@
                 <a:ea typeface="Calibri" pitchFamily="34" charset="-122"/>
                 <a:cs typeface="Calibri" pitchFamily="34" charset="-120"/>
               </a:rPr>
-              <a:t>"Analyzes the 3D model, breaks it down into individual geometric cost drivers, and builds a cost from the bottom up."  — aPriori / DEVELOP3D</a:t>
-            </a:r>
-            <a:endParaRPr lang="en-US" sz="900" dirty="0"/>
+              <a:t>It can cost from STEP and Parasolid files, which carry no feature history. That suggests it reads the shape itself rather than replaying how the designer built it. Tolerances can be added to drivers to steer the process route.</a:t>
+            </a:r>
+            <a:endParaRPr lang="en-US" sz="1050" dirty="0"/>
           </a:p>
         </p:txBody>
       </p:sp>
@@ -14138,7 +14096,7 @@
               <a:buNone/>
             </a:pPr>
             <a:r>
-              <a:rPr lang="en-US" sz="900" dirty="0">
+              <a:rPr lang="en-US" sz="1050" dirty="0">
                 <a:solidFill>
                   <a:srgbClr val="9AA7BD"/>
                 </a:solidFill>
@@ -14146,9 +14104,9 @@
                 <a:ea typeface="Calibri" pitchFamily="34" charset="-122"/>
                 <a:cs typeface="Calibri" pitchFamily="34" charset="-120"/>
               </a:rPr>
-              <a:t>Commodity-specific modules (Molding, Stamping) automatically analyse the geometry file and recognise part dimensions, ribs, undercuts, bends and progressive-die features, turn them into cost drivers, allow manual correction, and pass them "seamlessly" into Teamcenter Product Cost Management / Tool Costing.</a:t>
-            </a:r>
-            <a:endParaRPr lang="en-US" sz="900" dirty="0"/>
+              <a:t>As Siemens describes it, commodity modules (moulding, stamping) analyse the geometry and pick out part dimensions, ribs, undercuts, bends and progressive-die features.</a:t>
+            </a:r>
+            <a:endParaRPr lang="en-US" sz="1050" dirty="0"/>
           </a:p>
           <a:p>
             <a:pPr indent="0" marL="0">
@@ -14157,7 +14115,7 @@
               </a:lnSpc>
               <a:buNone/>
             </a:pPr>
-            <a:endParaRPr lang="en-US" sz="900" dirty="0"/>
+            <a:endParaRPr lang="en-US" sz="1050" dirty="0"/>
           </a:p>
           <a:p>
             <a:pPr indent="0" marL="0">
@@ -14167,7 +14125,7 @@
               <a:buNone/>
             </a:pPr>
             <a:r>
-              <a:rPr lang="en-US" sz="900" dirty="0">
+              <a:rPr lang="en-US" sz="1050" dirty="0">
                 <a:solidFill>
                   <a:srgbClr val="9AA7BD"/>
                 </a:solidFill>
@@ -14175,9 +14133,48 @@
                 <a:ea typeface="Calibri" pitchFamily="34" charset="-122"/>
                 <a:cs typeface="Calibri" pitchFamily="34" charset="-120"/>
               </a:rPr>
-              <a:t>"Recognizes important geometrical information like general part dimensions, ribs, undercuts, bends… and drives them into actual cost drivers."  — Siemens Teamcenter blog</a:t>
-            </a:r>
-            <a:endParaRPr lang="en-US" sz="900" dirty="0"/>
+              <a:t>Those become cost drivers. The user can correct them, and they pass into Siemens' own product-costing software.</a:t>
+            </a:r>
+            <a:endParaRPr lang="en-US" sz="1050" dirty="0"/>
+          </a:p>
+        </p:txBody>
+      </p:sp>
+      <p:sp>
+        <p:nvSpPr>
+          <p:cNvPr id="43" name="Text 41"/>
+          <p:cNvSpPr/>
+          <p:nvPr/>
+        </p:nvSpPr>
+        <p:spPr>
+          <a:xfrm>
+            <a:off x="457200" y="6126480"/>
+            <a:ext cx="11292840" cy="256032"/>
+          </a:xfrm>
+          <a:prstGeom prst="rect">
+            <a:avLst/>
+          </a:prstGeom>
+          <a:noFill/>
+          <a:ln/>
+        </p:spPr>
+        <p:txBody>
+          <a:bodyPr wrap="square" lIns="0" tIns="0" rIns="0" bIns="0" rtlCol="0" anchor="t"/>
+          <a:lstStyle/>
+          <a:p>
+            <a:pPr indent="0" marL="0">
+              <a:buNone/>
+            </a:pPr>
+            <a:r>
+              <a:rPr lang="en-US" sz="800" i="1" dirty="0">
+                <a:solidFill>
+                  <a:srgbClr val="5C6B85"/>
+                </a:solidFill>
+                <a:latin typeface="Calibri" pitchFamily="34" charset="0"/>
+                <a:ea typeface="Calibri" pitchFamily="34" charset="-122"/>
+                <a:cs typeface="Calibri" pitchFamily="34" charset="-120"/>
+              </a:rPr>
+              <a:t>Source: each vendor's public product material and blogs, read July 2026. Not tested hands-on by us.</a:t>
+            </a:r>
+            <a:endParaRPr lang="en-US" sz="800" dirty="0"/>
           </a:p>
         </p:txBody>
       </p:sp>
@@ -14351,7 +14348,7 @@
               <a:buNone/>
             </a:pPr>
             <a:r>
-              <a:rPr lang="en-US" sz="700" spc="150" kern="0" dirty="0">
+              <a:rPr lang="en-US" sz="750" spc="150" kern="0" dirty="0">
                 <a:solidFill>
                   <a:srgbClr val="5C6B85"/>
                 </a:solidFill>
@@ -14361,7 +14358,7 @@
               </a:rPr>
               <a:t>CAD-TO-COST  INTELLIGENCE</a:t>
             </a:r>
-            <a:endParaRPr lang="en-US" sz="700" dirty="0"/>
+            <a:endParaRPr lang="en-US" sz="750" dirty="0"/>
           </a:p>
         </p:txBody>
       </p:sp>
@@ -14457,7 +14454,7 @@
                 <a:ea typeface="Calibri" pitchFamily="34" charset="-122"/>
                 <a:cs typeface="Calibri" pitchFamily="34" charset="-120"/>
               </a:rPr>
-              <a:t>Competitor capability matrix</a:t>
+              <a:t>Capability comparison</a:t>
             </a:r>
             <a:endParaRPr lang="en-US" sz="2500" dirty="0"/>
           </a:p>
@@ -14496,7 +14493,7 @@
                 <a:ea typeface="Calibri" pitchFamily="34" charset="-122"/>
                 <a:cs typeface="Calibri" pitchFamily="34" charset="-120"/>
               </a:rPr>
-              <a:t>CostVision  ·  Competitive study &amp; build plan  ·  Confidential</a:t>
+              <a:t>CostVision  ·  CAD viewer study &amp; roadmap  ·  Updated September 2026  ·  Confidential</a:t>
             </a:r>
             <a:endParaRPr lang="en-US" sz="750" dirty="0"/>
           </a:p>
@@ -14662,7 +14659,7 @@
                 <a:ea typeface="Calibri" pitchFamily="34" charset="-122"/>
                 <a:cs typeface="Calibri" pitchFamily="34" charset="-120"/>
               </a:rPr>
-              <a:t>PMI / GD&amp;T</a:t>
+              <a:t>Tolerances from</a:t>
             </a:r>
             <a:endParaRPr lang="en-US" sz="850" dirty="0"/>
           </a:p>
@@ -14682,7 +14679,7 @@
                 <a:ea typeface="Calibri" pitchFamily="34" charset="-122"/>
                 <a:cs typeface="Calibri" pitchFamily="34" charset="-120"/>
               </a:rPr>
-              <a:t>→ cost</a:t>
+              <a:t>CAD → cost</a:t>
             </a:r>
             <a:endParaRPr lang="en-US" sz="850" dirty="0"/>
           </a:p>
@@ -14786,7 +14783,7 @@
                 <a:ea typeface="Calibri" pitchFamily="34" charset="-122"/>
                 <a:cs typeface="Calibri" pitchFamily="34" charset="-120"/>
               </a:rPr>
-              <a:t>Auto → cost</a:t>
+              <a:t>CAD → cost with</a:t>
             </a:r>
             <a:endParaRPr lang="en-US" sz="850" dirty="0"/>
           </a:p>
@@ -14806,7 +14803,7 @@
                 <a:ea typeface="Calibri" pitchFamily="34" charset="-122"/>
                 <a:cs typeface="Calibri" pitchFamily="34" charset="-120"/>
               </a:rPr>
-              <a:t>(no re-entry)</a:t>
+              <a:t>no retyping</a:t>
             </a:r>
             <a:endParaRPr lang="en-US" sz="850" dirty="0"/>
           </a:p>
@@ -16004,6 +16001,26 @@
             <a:avLst/>
           </a:prstGeom>
           <a:solidFill>
+            <a:srgbClr val="2DD4BF"/>
+          </a:solidFill>
+          <a:ln/>
+        </p:spPr>
+      </p:sp>
+      <p:sp>
+        <p:nvSpPr>
+          <p:cNvPr id="63" name="Shape 61"/>
+          <p:cNvSpPr/>
+          <p:nvPr/>
+        </p:nvSpPr>
+        <p:spPr>
+          <a:xfrm>
+            <a:off x="6614922" y="4791456"/>
+            <a:ext cx="173736" cy="173736"/>
+          </a:xfrm>
+          <a:prstGeom prst="ellipse">
+            <a:avLst/>
+          </a:prstGeom>
+          <a:solidFill>
             <a:srgbClr val="141B28"/>
           </a:solidFill>
           <a:ln w="15875">
@@ -16016,13 +16033,397 @@
       </p:sp>
       <p:sp>
         <p:nvSpPr>
-          <p:cNvPr id="63" name="Shape 61"/>
-          <p:cNvSpPr/>
-          <p:nvPr/>
-        </p:nvSpPr>
-        <p:spPr>
-          <a:xfrm>
-            <a:off x="6614922" y="4791456"/>
+          <p:cNvPr id="64" name="Shape 62"/>
+          <p:cNvSpPr/>
+          <p:nvPr/>
+        </p:nvSpPr>
+        <p:spPr>
+          <a:xfrm>
+            <a:off x="8070342" y="4791456"/>
+            <a:ext cx="173736" cy="173736"/>
+          </a:xfrm>
+          <a:prstGeom prst="ellipse">
+            <a:avLst/>
+          </a:prstGeom>
+          <a:solidFill>
+            <a:srgbClr val="2DD4BF"/>
+          </a:solidFill>
+          <a:ln/>
+        </p:spPr>
+      </p:sp>
+      <p:sp>
+        <p:nvSpPr>
+          <p:cNvPr id="65" name="Shape 63"/>
+          <p:cNvSpPr/>
+          <p:nvPr/>
+        </p:nvSpPr>
+        <p:spPr>
+          <a:xfrm>
+            <a:off x="9525762" y="4791456"/>
+            <a:ext cx="173736" cy="173736"/>
+          </a:xfrm>
+          <a:prstGeom prst="ellipse">
+            <a:avLst/>
+          </a:prstGeom>
+          <a:solidFill>
+            <a:srgbClr val="2DD4BF"/>
+          </a:solidFill>
+          <a:ln/>
+        </p:spPr>
+      </p:sp>
+      <p:sp>
+        <p:nvSpPr>
+          <p:cNvPr id="66" name="Shape 64"/>
+          <p:cNvSpPr/>
+          <p:nvPr/>
+        </p:nvSpPr>
+        <p:spPr>
+          <a:xfrm>
+            <a:off x="10981182" y="4791456"/>
+            <a:ext cx="173736" cy="173736"/>
+          </a:xfrm>
+          <a:prstGeom prst="ellipse">
+            <a:avLst/>
+          </a:prstGeom>
+          <a:solidFill>
+            <a:srgbClr val="2DD4BF"/>
+          </a:solidFill>
+          <a:ln/>
+        </p:spPr>
+      </p:sp>
+      <p:sp>
+        <p:nvSpPr>
+          <p:cNvPr id="67" name="Shape 65"/>
+          <p:cNvSpPr/>
+          <p:nvPr/>
+        </p:nvSpPr>
+        <p:spPr>
+          <a:xfrm>
+            <a:off x="457200" y="5084064"/>
+            <a:ext cx="11338560" cy="411480"/>
+          </a:xfrm>
+          <a:prstGeom prst="roundRect">
+            <a:avLst>
+              <a:gd name="adj" fmla="val 15556"/>
+            </a:avLst>
+          </a:prstGeom>
+          <a:solidFill>
+            <a:srgbClr val="12271F"/>
+          </a:solidFill>
+          <a:ln w="6350">
+            <a:solidFill>
+              <a:srgbClr val="2B3A52"/>
+            </a:solidFill>
+            <a:prstDash val="solid"/>
+          </a:ln>
+        </p:spPr>
+      </p:sp>
+      <p:sp>
+        <p:nvSpPr>
+          <p:cNvPr id="68" name="Shape 66"/>
+          <p:cNvSpPr/>
+          <p:nvPr/>
+        </p:nvSpPr>
+        <p:spPr>
+          <a:xfrm>
+            <a:off x="457200" y="5084064"/>
+            <a:ext cx="54864" cy="411480"/>
+          </a:xfrm>
+          <a:prstGeom prst="rect">
+            <a:avLst/>
+          </a:prstGeom>
+          <a:solidFill>
+            <a:srgbClr val="34D399"/>
+          </a:solidFill>
+          <a:ln/>
+        </p:spPr>
+      </p:sp>
+      <p:sp>
+        <p:nvSpPr>
+          <p:cNvPr id="69" name="Text 67"/>
+          <p:cNvSpPr/>
+          <p:nvPr/>
+        </p:nvSpPr>
+        <p:spPr>
+          <a:xfrm>
+            <a:off x="621792" y="5084064"/>
+            <a:ext cx="2423160" cy="411480"/>
+          </a:xfrm>
+          <a:prstGeom prst="rect">
+            <a:avLst/>
+          </a:prstGeom>
+          <a:noFill/>
+          <a:ln/>
+        </p:spPr>
+        <p:txBody>
+          <a:bodyPr wrap="square" lIns="0" tIns="0" rIns="0" bIns="0" rtlCol="0" anchor="ctr"/>
+          <a:lstStyle/>
+          <a:p>
+            <a:pPr indent="0" marL="0">
+              <a:buNone/>
+            </a:pPr>
+            <a:r>
+              <a:rPr lang="en-US" sz="900" b="1" dirty="0">
+                <a:solidFill>
+                  <a:srgbClr val="34D399"/>
+                </a:solidFill>
+                <a:latin typeface="Calibri" pitchFamily="34" charset="0"/>
+                <a:ea typeface="Calibri" pitchFamily="34" charset="-122"/>
+                <a:cs typeface="Calibri" pitchFamily="34" charset="-120"/>
+              </a:rPr>
+              <a:t>CostVision — if roadmap lands</a:t>
+            </a:r>
+            <a:endParaRPr lang="en-US" sz="900" dirty="0"/>
+          </a:p>
+        </p:txBody>
+      </p:sp>
+      <p:sp>
+        <p:nvSpPr>
+          <p:cNvPr id="70" name="Shape 68"/>
+          <p:cNvSpPr/>
+          <p:nvPr/>
+        </p:nvSpPr>
+        <p:spPr>
+          <a:xfrm>
+            <a:off x="3704082" y="5202936"/>
+            <a:ext cx="173736" cy="173736"/>
+          </a:xfrm>
+          <a:prstGeom prst="ellipse">
+            <a:avLst/>
+          </a:prstGeom>
+          <a:solidFill>
+            <a:srgbClr val="2DD4BF"/>
+          </a:solidFill>
+          <a:ln/>
+        </p:spPr>
+      </p:sp>
+      <p:sp>
+        <p:nvSpPr>
+          <p:cNvPr id="71" name="Shape 69"/>
+          <p:cNvSpPr/>
+          <p:nvPr/>
+        </p:nvSpPr>
+        <p:spPr>
+          <a:xfrm>
+            <a:off x="5159502" y="5202936"/>
+            <a:ext cx="173736" cy="173736"/>
+          </a:xfrm>
+          <a:prstGeom prst="ellipse">
+            <a:avLst/>
+          </a:prstGeom>
+          <a:solidFill>
+            <a:srgbClr val="2DD4BF"/>
+          </a:solidFill>
+          <a:ln/>
+        </p:spPr>
+      </p:sp>
+      <p:sp>
+        <p:nvSpPr>
+          <p:cNvPr id="72" name="Shape 70"/>
+          <p:cNvSpPr/>
+          <p:nvPr/>
+        </p:nvSpPr>
+        <p:spPr>
+          <a:xfrm>
+            <a:off x="6614922" y="5202936"/>
+            <a:ext cx="173736" cy="173736"/>
+          </a:xfrm>
+          <a:prstGeom prst="ellipse">
+            <a:avLst/>
+          </a:prstGeom>
+          <a:solidFill>
+            <a:srgbClr val="2DD4BF"/>
+          </a:solidFill>
+          <a:ln/>
+        </p:spPr>
+      </p:sp>
+      <p:sp>
+        <p:nvSpPr>
+          <p:cNvPr id="73" name="Shape 71"/>
+          <p:cNvSpPr/>
+          <p:nvPr/>
+        </p:nvSpPr>
+        <p:spPr>
+          <a:xfrm>
+            <a:off x="8070342" y="5202936"/>
+            <a:ext cx="173736" cy="173736"/>
+          </a:xfrm>
+          <a:prstGeom prst="ellipse">
+            <a:avLst/>
+          </a:prstGeom>
+          <a:solidFill>
+            <a:srgbClr val="2DD4BF"/>
+          </a:solidFill>
+          <a:ln/>
+        </p:spPr>
+      </p:sp>
+      <p:sp>
+        <p:nvSpPr>
+          <p:cNvPr id="74" name="Shape 72"/>
+          <p:cNvSpPr/>
+          <p:nvPr/>
+        </p:nvSpPr>
+        <p:spPr>
+          <a:xfrm>
+            <a:off x="9525762" y="5202936"/>
+            <a:ext cx="173736" cy="173736"/>
+          </a:xfrm>
+          <a:prstGeom prst="ellipse">
+            <a:avLst/>
+          </a:prstGeom>
+          <a:solidFill>
+            <a:srgbClr val="2DD4BF"/>
+          </a:solidFill>
+          <a:ln/>
+        </p:spPr>
+      </p:sp>
+      <p:sp>
+        <p:nvSpPr>
+          <p:cNvPr id="75" name="Shape 73"/>
+          <p:cNvSpPr/>
+          <p:nvPr/>
+        </p:nvSpPr>
+        <p:spPr>
+          <a:xfrm>
+            <a:off x="10981182" y="5202936"/>
+            <a:ext cx="173736" cy="173736"/>
+          </a:xfrm>
+          <a:prstGeom prst="ellipse">
+            <a:avLst/>
+          </a:prstGeom>
+          <a:solidFill>
+            <a:srgbClr val="2DD4BF"/>
+          </a:solidFill>
+          <a:ln/>
+        </p:spPr>
+      </p:sp>
+      <p:sp>
+        <p:nvSpPr>
+          <p:cNvPr id="76" name="Shape 74"/>
+          <p:cNvSpPr/>
+          <p:nvPr/>
+        </p:nvSpPr>
+        <p:spPr>
+          <a:xfrm>
+            <a:off x="461772" y="5664708"/>
+            <a:ext cx="173736" cy="173736"/>
+          </a:xfrm>
+          <a:prstGeom prst="ellipse">
+            <a:avLst/>
+          </a:prstGeom>
+          <a:solidFill>
+            <a:srgbClr val="2DD4BF"/>
+          </a:solidFill>
+          <a:ln/>
+        </p:spPr>
+      </p:sp>
+      <p:sp>
+        <p:nvSpPr>
+          <p:cNvPr id="77" name="Text 75"/>
+          <p:cNvSpPr/>
+          <p:nvPr/>
+        </p:nvSpPr>
+        <p:spPr>
+          <a:xfrm>
+            <a:off x="713232" y="5632704"/>
+            <a:ext cx="1554480" cy="237744"/>
+          </a:xfrm>
+          <a:prstGeom prst="rect">
+            <a:avLst/>
+          </a:prstGeom>
+          <a:noFill/>
+          <a:ln/>
+        </p:spPr>
+        <p:txBody>
+          <a:bodyPr wrap="square" lIns="0" tIns="0" rIns="0" bIns="0" rtlCol="0" anchor="t"/>
+          <a:lstStyle/>
+          <a:p>
+            <a:pPr indent="0" marL="0">
+              <a:buNone/>
+            </a:pPr>
+            <a:r>
+              <a:rPr lang="en-US" sz="900" dirty="0">
+                <a:solidFill>
+                  <a:srgbClr val="9AA7BD"/>
+                </a:solidFill>
+                <a:latin typeface="Calibri" pitchFamily="34" charset="0"/>
+                <a:ea typeface="Calibri" pitchFamily="34" charset="-122"/>
+                <a:cs typeface="Calibri" pitchFamily="34" charset="-120"/>
+              </a:rPr>
+              <a:t>Full</a:t>
+            </a:r>
+            <a:endParaRPr lang="en-US" sz="900" dirty="0"/>
+          </a:p>
+        </p:txBody>
+      </p:sp>
+      <p:sp>
+        <p:nvSpPr>
+          <p:cNvPr id="78" name="Shape 76"/>
+          <p:cNvSpPr/>
+          <p:nvPr/>
+        </p:nvSpPr>
+        <p:spPr>
+          <a:xfrm>
+            <a:off x="1376172" y="5664708"/>
+            <a:ext cx="173736" cy="173736"/>
+          </a:xfrm>
+          <a:prstGeom prst="ellipse">
+            <a:avLst/>
+          </a:prstGeom>
+          <a:solidFill>
+            <a:srgbClr val="FBBF24"/>
+          </a:solidFill>
+          <a:ln/>
+        </p:spPr>
+      </p:sp>
+      <p:sp>
+        <p:nvSpPr>
+          <p:cNvPr id="79" name="Text 77"/>
+          <p:cNvSpPr/>
+          <p:nvPr/>
+        </p:nvSpPr>
+        <p:spPr>
+          <a:xfrm>
+            <a:off x="1627632" y="5632704"/>
+            <a:ext cx="1554480" cy="237744"/>
+          </a:xfrm>
+          <a:prstGeom prst="rect">
+            <a:avLst/>
+          </a:prstGeom>
+          <a:noFill/>
+          <a:ln/>
+        </p:spPr>
+        <p:txBody>
+          <a:bodyPr wrap="square" lIns="0" tIns="0" rIns="0" bIns="0" rtlCol="0" anchor="t"/>
+          <a:lstStyle/>
+          <a:p>
+            <a:pPr indent="0" marL="0">
+              <a:buNone/>
+            </a:pPr>
+            <a:r>
+              <a:rPr lang="en-US" sz="900" dirty="0">
+                <a:solidFill>
+                  <a:srgbClr val="9AA7BD"/>
+                </a:solidFill>
+                <a:latin typeface="Calibri" pitchFamily="34" charset="0"/>
+                <a:ea typeface="Calibri" pitchFamily="34" charset="-122"/>
+                <a:cs typeface="Calibri" pitchFamily="34" charset="-120"/>
+              </a:rPr>
+              <a:t>Partial</a:t>
+            </a:r>
+            <a:endParaRPr lang="en-US" sz="900" dirty="0"/>
+          </a:p>
+        </p:txBody>
+      </p:sp>
+      <p:sp>
+        <p:nvSpPr>
+          <p:cNvPr id="80" name="Shape 78"/>
+          <p:cNvSpPr/>
+          <p:nvPr/>
+        </p:nvSpPr>
+        <p:spPr>
+          <a:xfrm>
+            <a:off x="2496312" y="5664708"/>
             <a:ext cx="173736" cy="173736"/>
           </a:xfrm>
           <a:prstGeom prst="ellipse">
@@ -16041,415 +16442,6 @@
       </p:sp>
       <p:sp>
         <p:nvSpPr>
-          <p:cNvPr id="64" name="Shape 62"/>
-          <p:cNvSpPr/>
-          <p:nvPr/>
-        </p:nvSpPr>
-        <p:spPr>
-          <a:xfrm>
-            <a:off x="8070342" y="4791456"/>
-            <a:ext cx="173736" cy="173736"/>
-          </a:xfrm>
-          <a:prstGeom prst="ellipse">
-            <a:avLst/>
-          </a:prstGeom>
-          <a:solidFill>
-            <a:srgbClr val="FBBF24"/>
-          </a:solidFill>
-          <a:ln/>
-        </p:spPr>
-      </p:sp>
-      <p:sp>
-        <p:nvSpPr>
-          <p:cNvPr id="65" name="Shape 63"/>
-          <p:cNvSpPr/>
-          <p:nvPr/>
-        </p:nvSpPr>
-        <p:spPr>
-          <a:xfrm>
-            <a:off x="9525762" y="4791456"/>
-            <a:ext cx="173736" cy="173736"/>
-          </a:xfrm>
-          <a:prstGeom prst="ellipse">
-            <a:avLst/>
-          </a:prstGeom>
-          <a:solidFill>
-            <a:srgbClr val="2DD4BF"/>
-          </a:solidFill>
-          <a:ln/>
-        </p:spPr>
-      </p:sp>
-      <p:sp>
-        <p:nvSpPr>
-          <p:cNvPr id="66" name="Shape 64"/>
-          <p:cNvSpPr/>
-          <p:nvPr/>
-        </p:nvSpPr>
-        <p:spPr>
-          <a:xfrm>
-            <a:off x="10981182" y="4791456"/>
-            <a:ext cx="173736" cy="173736"/>
-          </a:xfrm>
-          <a:prstGeom prst="ellipse">
-            <a:avLst/>
-          </a:prstGeom>
-          <a:solidFill>
-            <a:srgbClr val="2DD4BF"/>
-          </a:solidFill>
-          <a:ln/>
-        </p:spPr>
-      </p:sp>
-      <p:sp>
-        <p:nvSpPr>
-          <p:cNvPr id="67" name="Shape 65"/>
-          <p:cNvSpPr/>
-          <p:nvPr/>
-        </p:nvSpPr>
-        <p:spPr>
-          <a:xfrm>
-            <a:off x="457200" y="5084064"/>
-            <a:ext cx="11338560" cy="411480"/>
-          </a:xfrm>
-          <a:prstGeom prst="roundRect">
-            <a:avLst>
-              <a:gd name="adj" fmla="val 15556"/>
-            </a:avLst>
-          </a:prstGeom>
-          <a:solidFill>
-            <a:srgbClr val="12271F"/>
-          </a:solidFill>
-          <a:ln w="6350">
-            <a:solidFill>
-              <a:srgbClr val="2B3A52"/>
-            </a:solidFill>
-            <a:prstDash val="solid"/>
-          </a:ln>
-        </p:spPr>
-      </p:sp>
-      <p:sp>
-        <p:nvSpPr>
-          <p:cNvPr id="68" name="Shape 66"/>
-          <p:cNvSpPr/>
-          <p:nvPr/>
-        </p:nvSpPr>
-        <p:spPr>
-          <a:xfrm>
-            <a:off x="457200" y="5084064"/>
-            <a:ext cx="54864" cy="411480"/>
-          </a:xfrm>
-          <a:prstGeom prst="rect">
-            <a:avLst/>
-          </a:prstGeom>
-          <a:solidFill>
-            <a:srgbClr val="34D399"/>
-          </a:solidFill>
-          <a:ln/>
-        </p:spPr>
-      </p:sp>
-      <p:sp>
-        <p:nvSpPr>
-          <p:cNvPr id="69" name="Text 67"/>
-          <p:cNvSpPr/>
-          <p:nvPr/>
-        </p:nvSpPr>
-        <p:spPr>
-          <a:xfrm>
-            <a:off x="621792" y="5084064"/>
-            <a:ext cx="2423160" cy="411480"/>
-          </a:xfrm>
-          <a:prstGeom prst="rect">
-            <a:avLst/>
-          </a:prstGeom>
-          <a:noFill/>
-          <a:ln/>
-        </p:spPr>
-        <p:txBody>
-          <a:bodyPr wrap="square" lIns="0" tIns="0" rIns="0" bIns="0" rtlCol="0" anchor="ctr"/>
-          <a:lstStyle/>
-          <a:p>
-            <a:pPr indent="0" marL="0">
-              <a:buNone/>
-            </a:pPr>
-            <a:r>
-              <a:rPr lang="en-US" sz="1000" b="1" dirty="0">
-                <a:solidFill>
-                  <a:srgbClr val="34D399"/>
-                </a:solidFill>
-                <a:latin typeface="Calibri" pitchFamily="34" charset="0"/>
-                <a:ea typeface="Calibri" pitchFamily="34" charset="-122"/>
-                <a:cs typeface="Calibri" pitchFamily="34" charset="-120"/>
-              </a:rPr>
-              <a:t>CostVision — planned</a:t>
-            </a:r>
-            <a:endParaRPr lang="en-US" sz="1000" dirty="0"/>
-          </a:p>
-        </p:txBody>
-      </p:sp>
-      <p:sp>
-        <p:nvSpPr>
-          <p:cNvPr id="70" name="Shape 68"/>
-          <p:cNvSpPr/>
-          <p:nvPr/>
-        </p:nvSpPr>
-        <p:spPr>
-          <a:xfrm>
-            <a:off x="3704082" y="5202936"/>
-            <a:ext cx="173736" cy="173736"/>
-          </a:xfrm>
-          <a:prstGeom prst="ellipse">
-            <a:avLst/>
-          </a:prstGeom>
-          <a:solidFill>
-            <a:srgbClr val="2DD4BF"/>
-          </a:solidFill>
-          <a:ln/>
-        </p:spPr>
-      </p:sp>
-      <p:sp>
-        <p:nvSpPr>
-          <p:cNvPr id="71" name="Shape 69"/>
-          <p:cNvSpPr/>
-          <p:nvPr/>
-        </p:nvSpPr>
-        <p:spPr>
-          <a:xfrm>
-            <a:off x="5159502" y="5202936"/>
-            <a:ext cx="173736" cy="173736"/>
-          </a:xfrm>
-          <a:prstGeom prst="ellipse">
-            <a:avLst/>
-          </a:prstGeom>
-          <a:solidFill>
-            <a:srgbClr val="2DD4BF"/>
-          </a:solidFill>
-          <a:ln/>
-        </p:spPr>
-      </p:sp>
-      <p:sp>
-        <p:nvSpPr>
-          <p:cNvPr id="72" name="Shape 70"/>
-          <p:cNvSpPr/>
-          <p:nvPr/>
-        </p:nvSpPr>
-        <p:spPr>
-          <a:xfrm>
-            <a:off x="6614922" y="5202936"/>
-            <a:ext cx="173736" cy="173736"/>
-          </a:xfrm>
-          <a:prstGeom prst="ellipse">
-            <a:avLst/>
-          </a:prstGeom>
-          <a:solidFill>
-            <a:srgbClr val="2DD4BF"/>
-          </a:solidFill>
-          <a:ln/>
-        </p:spPr>
-      </p:sp>
-      <p:sp>
-        <p:nvSpPr>
-          <p:cNvPr id="73" name="Shape 71"/>
-          <p:cNvSpPr/>
-          <p:nvPr/>
-        </p:nvSpPr>
-        <p:spPr>
-          <a:xfrm>
-            <a:off x="8070342" y="5202936"/>
-            <a:ext cx="173736" cy="173736"/>
-          </a:xfrm>
-          <a:prstGeom prst="ellipse">
-            <a:avLst/>
-          </a:prstGeom>
-          <a:solidFill>
-            <a:srgbClr val="2DD4BF"/>
-          </a:solidFill>
-          <a:ln/>
-        </p:spPr>
-      </p:sp>
-      <p:sp>
-        <p:nvSpPr>
-          <p:cNvPr id="74" name="Shape 72"/>
-          <p:cNvSpPr/>
-          <p:nvPr/>
-        </p:nvSpPr>
-        <p:spPr>
-          <a:xfrm>
-            <a:off x="9525762" y="5202936"/>
-            <a:ext cx="173736" cy="173736"/>
-          </a:xfrm>
-          <a:prstGeom prst="ellipse">
-            <a:avLst/>
-          </a:prstGeom>
-          <a:solidFill>
-            <a:srgbClr val="2DD4BF"/>
-          </a:solidFill>
-          <a:ln/>
-        </p:spPr>
-      </p:sp>
-      <p:sp>
-        <p:nvSpPr>
-          <p:cNvPr id="75" name="Shape 73"/>
-          <p:cNvSpPr/>
-          <p:nvPr/>
-        </p:nvSpPr>
-        <p:spPr>
-          <a:xfrm>
-            <a:off x="10981182" y="5202936"/>
-            <a:ext cx="173736" cy="173736"/>
-          </a:xfrm>
-          <a:prstGeom prst="ellipse">
-            <a:avLst/>
-          </a:prstGeom>
-          <a:solidFill>
-            <a:srgbClr val="2DD4BF"/>
-          </a:solidFill>
-          <a:ln/>
-        </p:spPr>
-      </p:sp>
-      <p:sp>
-        <p:nvSpPr>
-          <p:cNvPr id="76" name="Shape 74"/>
-          <p:cNvSpPr/>
-          <p:nvPr/>
-        </p:nvSpPr>
-        <p:spPr>
-          <a:xfrm>
-            <a:off x="461772" y="5664708"/>
-            <a:ext cx="173736" cy="173736"/>
-          </a:xfrm>
-          <a:prstGeom prst="ellipse">
-            <a:avLst/>
-          </a:prstGeom>
-          <a:solidFill>
-            <a:srgbClr val="2DD4BF"/>
-          </a:solidFill>
-          <a:ln/>
-        </p:spPr>
-      </p:sp>
-      <p:sp>
-        <p:nvSpPr>
-          <p:cNvPr id="77" name="Text 75"/>
-          <p:cNvSpPr/>
-          <p:nvPr/>
-        </p:nvSpPr>
-        <p:spPr>
-          <a:xfrm>
-            <a:off x="713232" y="5632704"/>
-            <a:ext cx="1554480" cy="237744"/>
-          </a:xfrm>
-          <a:prstGeom prst="rect">
-            <a:avLst/>
-          </a:prstGeom>
-          <a:noFill/>
-          <a:ln/>
-        </p:spPr>
-        <p:txBody>
-          <a:bodyPr wrap="square" lIns="0" tIns="0" rIns="0" bIns="0" rtlCol="0" anchor="t"/>
-          <a:lstStyle/>
-          <a:p>
-            <a:pPr indent="0" marL="0">
-              <a:buNone/>
-            </a:pPr>
-            <a:r>
-              <a:rPr lang="en-US" sz="900" dirty="0">
-                <a:solidFill>
-                  <a:srgbClr val="9AA7BD"/>
-                </a:solidFill>
-                <a:latin typeface="Calibri" pitchFamily="34" charset="0"/>
-                <a:ea typeface="Calibri" pitchFamily="34" charset="-122"/>
-                <a:cs typeface="Calibri" pitchFamily="34" charset="-120"/>
-              </a:rPr>
-              <a:t>Full</a:t>
-            </a:r>
-            <a:endParaRPr lang="en-US" sz="900" dirty="0"/>
-          </a:p>
-        </p:txBody>
-      </p:sp>
-      <p:sp>
-        <p:nvSpPr>
-          <p:cNvPr id="78" name="Shape 76"/>
-          <p:cNvSpPr/>
-          <p:nvPr/>
-        </p:nvSpPr>
-        <p:spPr>
-          <a:xfrm>
-            <a:off x="1376172" y="5664708"/>
-            <a:ext cx="173736" cy="173736"/>
-          </a:xfrm>
-          <a:prstGeom prst="ellipse">
-            <a:avLst/>
-          </a:prstGeom>
-          <a:solidFill>
-            <a:srgbClr val="FBBF24"/>
-          </a:solidFill>
-          <a:ln/>
-        </p:spPr>
-      </p:sp>
-      <p:sp>
-        <p:nvSpPr>
-          <p:cNvPr id="79" name="Text 77"/>
-          <p:cNvSpPr/>
-          <p:nvPr/>
-        </p:nvSpPr>
-        <p:spPr>
-          <a:xfrm>
-            <a:off x="1627632" y="5632704"/>
-            <a:ext cx="1554480" cy="237744"/>
-          </a:xfrm>
-          <a:prstGeom prst="rect">
-            <a:avLst/>
-          </a:prstGeom>
-          <a:noFill/>
-          <a:ln/>
-        </p:spPr>
-        <p:txBody>
-          <a:bodyPr wrap="square" lIns="0" tIns="0" rIns="0" bIns="0" rtlCol="0" anchor="t"/>
-          <a:lstStyle/>
-          <a:p>
-            <a:pPr indent="0" marL="0">
-              <a:buNone/>
-            </a:pPr>
-            <a:r>
-              <a:rPr lang="en-US" sz="900" dirty="0">
-                <a:solidFill>
-                  <a:srgbClr val="9AA7BD"/>
-                </a:solidFill>
-                <a:latin typeface="Calibri" pitchFamily="34" charset="0"/>
-                <a:ea typeface="Calibri" pitchFamily="34" charset="-122"/>
-                <a:cs typeface="Calibri" pitchFamily="34" charset="-120"/>
-              </a:rPr>
-              <a:t>Partial</a:t>
-            </a:r>
-            <a:endParaRPr lang="en-US" sz="900" dirty="0"/>
-          </a:p>
-        </p:txBody>
-      </p:sp>
-      <p:sp>
-        <p:nvSpPr>
-          <p:cNvPr id="80" name="Shape 78"/>
-          <p:cNvSpPr/>
-          <p:nvPr/>
-        </p:nvSpPr>
-        <p:spPr>
-          <a:xfrm>
-            <a:off x="2496312" y="5664708"/>
-            <a:ext cx="173736" cy="173736"/>
-          </a:xfrm>
-          <a:prstGeom prst="ellipse">
-            <a:avLst/>
-          </a:prstGeom>
-          <a:solidFill>
-            <a:srgbClr val="141B28"/>
-          </a:solidFill>
-          <a:ln w="15875">
-            <a:solidFill>
-              <a:srgbClr val="5C6B85"/>
-            </a:solidFill>
-            <a:prstDash val="solid"/>
-          </a:ln>
-        </p:spPr>
-      </p:sp>
-      <p:sp>
-        <p:nvSpPr>
           <p:cNvPr id="81" name="Text 79"/>
           <p:cNvSpPr/>
           <p:nvPr/>
@@ -16520,7 +16512,7 @@
                 <a:ea typeface="Calibri" pitchFamily="34" charset="-122"/>
                 <a:cs typeface="Calibri" pitchFamily="34" charset="-120"/>
               </a:rPr>
-              <a:t>Sources: aPriori (DEVELOP3D / product), Siemens Teamcenter blog, 3D-Tool, Werk24 docs, MTI Systems — all verified.  Marks are our read of published capability.</a:t>
+              <a:t>Other tools: our own read of public material (July 2026), not a hands-on test.  CostVision rows: checked against the code, September 2026.</a:t>
             </a:r>
             <a:endParaRPr lang="en-US" sz="800" dirty="0"/>
           </a:p>
@@ -16696,7 +16688,7 @@
               <a:buNone/>
             </a:pPr>
             <a:r>
-              <a:rPr lang="en-US" sz="700" spc="150" kern="0" dirty="0">
+              <a:rPr lang="en-US" sz="750" spc="150" kern="0" dirty="0">
                 <a:solidFill>
                   <a:srgbClr val="5C6B85"/>
                 </a:solidFill>
@@ -16706,7 +16698,7 @@
               </a:rPr>
               <a:t>CAD-TO-COST  INTELLIGENCE</a:t>
             </a:r>
-            <a:endParaRPr lang="en-US" sz="700" dirty="0"/>
+            <a:endParaRPr lang="en-US" sz="750" dirty="0"/>
           </a:p>
         </p:txBody>
       </p:sp>
@@ -16841,7 +16833,7 @@
                 <a:ea typeface="Calibri" pitchFamily="34" charset="-122"/>
                 <a:cs typeface="Calibri" pitchFamily="34" charset="-120"/>
               </a:rPr>
-              <a:t>CostVision  ·  Competitive study &amp; build plan  ·  Confidential</a:t>
+              <a:t>CostVision  ·  CAD viewer study &amp; roadmap  ·  Updated September 2026  ·  Confidential</a:t>
             </a:r>
             <a:endParaRPr lang="en-US" sz="750" dirty="0"/>
           </a:p>
@@ -16883,7 +16875,7 @@
                 <a:ea typeface="Calibri" pitchFamily="34" charset="-122"/>
                 <a:cs typeface="Calibri" pitchFamily="34" charset="-120"/>
               </a:rPr>
-              <a:t>It is not prettier rendering — it is analysis painted ON the model, and room to work. 3D-Tool is the gold standard: four heatmap analyses shown directly on the part.</a:t>
+              <a:t>It is not prettier rendering. It is analysis drawn on the model, and room to work. 3D-Tool, a dedicated viewer, is a good example of the idea.</a:t>
             </a:r>
             <a:endParaRPr lang="en-US" sz="1200" dirty="0"/>
           </a:p>
@@ -16961,7 +16953,7 @@
               <a:buNone/>
             </a:pPr>
             <a:r>
-              <a:rPr lang="en-US" sz="1100" b="1" dirty="0">
+              <a:rPr lang="en-US" sz="1150" b="1" dirty="0">
                 <a:solidFill>
                   <a:srgbClr val="EAF0F8"/>
                 </a:solidFill>
@@ -16971,7 +16963,7 @@
               </a:rPr>
               <a:t>Wall-thickness heatmap</a:t>
             </a:r>
-            <a:endParaRPr lang="en-US" sz="1100" dirty="0"/>
+            <a:endParaRPr lang="en-US" sz="1150" dirty="0"/>
           </a:p>
         </p:txBody>
       </p:sp>
@@ -17003,7 +16995,7 @@
               <a:buNone/>
             </a:pPr>
             <a:r>
-              <a:rPr lang="en-US" sz="930" dirty="0">
+              <a:rPr lang="en-US" sz="1050" dirty="0">
                 <a:solidFill>
                   <a:srgbClr val="9AA7BD"/>
                 </a:solidFill>
@@ -17011,9 +17003,9 @@
                 <a:ea typeface="Calibri" pitchFamily="34" charset="-122"/>
                 <a:cs typeface="Calibri" pitchFamily="34" charset="-120"/>
               </a:rPr>
-              <a:t>Thin/thick zones coloured on the model (single-ray &amp; fitted-ball methods) — instantly shows mould/casting risk and cost drivers.</a:t>
-            </a:r>
-            <a:endParaRPr lang="en-US" sz="930" dirty="0"/>
+              <a:t>Thin and thick areas coloured on the part. It shows moulding and casting risk at a glance. We have this today for STEP and IGES.</a:t>
+            </a:r>
+            <a:endParaRPr lang="en-US" sz="1050" dirty="0"/>
           </a:p>
         </p:txBody>
       </p:sp>
@@ -17089,7 +17081,7 @@
               <a:buNone/>
             </a:pPr>
             <a:r>
-              <a:rPr lang="en-US" sz="1100" b="1" dirty="0">
+              <a:rPr lang="en-US" sz="1150" b="1" dirty="0">
                 <a:solidFill>
                   <a:srgbClr val="EAF0F8"/>
                 </a:solidFill>
@@ -17097,9 +17089,9 @@
                 <a:ea typeface="Calibri" pitchFamily="34" charset="-122"/>
                 <a:cs typeface="Calibri" pitchFamily="34" charset="-120"/>
               </a:rPr>
-              <a:t>Draft &amp; undercut analysis</a:t>
-            </a:r>
-            <a:endParaRPr lang="en-US" sz="1100" dirty="0"/>
+              <a:t>Draft &amp; undercut view</a:t>
+            </a:r>
+            <a:endParaRPr lang="en-US" sz="1150" dirty="0"/>
           </a:p>
         </p:txBody>
       </p:sp>
@@ -17131,7 +17123,7 @@
               <a:buNone/>
             </a:pPr>
             <a:r>
-              <a:rPr lang="en-US" sz="930" dirty="0">
+              <a:rPr lang="en-US" sz="1050" dirty="0">
                 <a:solidFill>
                   <a:srgbClr val="9AA7BD"/>
                 </a:solidFill>
@@ -17139,9 +17131,9 @@
                 <a:ea typeface="Calibri" pitchFamily="34" charset="-122"/>
                 <a:cs typeface="Calibri" pitchFamily="34" charset="-120"/>
               </a:rPr>
-              <a:t>Draft angle shaded per face; areas that "cannot be demolded" flagged as undercuts → slide units → tooling cost.</a:t>
-            </a:r>
-            <a:endParaRPr lang="en-US" sz="930" dirty="0"/>
+              <a:t>Each face shaded by its draft angle to the tool pull direction. Undercuts need slides, and slides cost money. We have this today.</a:t>
+            </a:r>
+            <a:endParaRPr lang="en-US" sz="1050" dirty="0"/>
           </a:p>
         </p:txBody>
       </p:sp>
@@ -17217,7 +17209,7 @@
               <a:buNone/>
             </a:pPr>
             <a:r>
-              <a:rPr lang="en-US" sz="1100" b="1" dirty="0">
+              <a:rPr lang="en-US" sz="1150" b="1" dirty="0">
                 <a:solidFill>
                   <a:srgbClr val="EAF0F8"/>
                 </a:solidFill>
@@ -17225,9 +17217,9 @@
                 <a:ea typeface="Calibri" pitchFamily="34" charset="-122"/>
                 <a:cs typeface="Calibri" pitchFamily="34" charset="-120"/>
               </a:rPr>
-              <a:t>Section &amp; measurement</a:t>
-            </a:r>
-            <a:endParaRPr lang="en-US" sz="1100" dirty="0"/>
+              <a:t>Section &amp; measure</a:t>
+            </a:r>
+            <a:endParaRPr lang="en-US" sz="1150" dirty="0"/>
           </a:p>
         </p:txBody>
       </p:sp>
@@ -17259,7 +17251,7 @@
               <a:buNone/>
             </a:pPr>
             <a:r>
-              <a:rPr lang="en-US" sz="930" dirty="0">
+              <a:rPr lang="en-US" sz="1050" dirty="0">
                 <a:solidFill>
                   <a:srgbClr val="9AA7BD"/>
                 </a:solidFill>
@@ -17267,9 +17259,9 @@
                 <a:ea typeface="Calibri" pitchFamily="34" charset="-122"/>
                 <a:cs typeface="Calibri" pitchFamily="34" charset="-120"/>
               </a:rPr>
-              <a:t>Live cut planes, true measure, model comparison and collision — the everyday CAD verbs users expect.</a:t>
-            </a:r>
-            <a:endParaRPr lang="en-US" sz="930" dirty="0"/>
+              <a:t>Cut planes and true measurements: the everyday CAD actions people expect. We have cut planes on X, Y and Z and six measure tools.</a:t>
+            </a:r>
+            <a:endParaRPr lang="en-US" sz="1050" dirty="0"/>
           </a:p>
         </p:txBody>
       </p:sp>
@@ -17345,7 +17337,7 @@
               <a:buNone/>
             </a:pPr>
             <a:r>
-              <a:rPr lang="en-US" sz="1100" b="1" dirty="0">
+              <a:rPr lang="en-US" sz="1150" b="1" dirty="0">
                 <a:solidFill>
                   <a:srgbClr val="EAF0F8"/>
                 </a:solidFill>
@@ -17355,7 +17347,7 @@
               </a:rPr>
               <a:t>Feature / model tree</a:t>
             </a:r>
-            <a:endParaRPr lang="en-US" sz="1100" dirty="0"/>
+            <a:endParaRPr lang="en-US" sz="1150" dirty="0"/>
           </a:p>
         </p:txBody>
       </p:sp>
@@ -17387,7 +17379,7 @@
               <a:buNone/>
             </a:pPr>
             <a:r>
-              <a:rPr lang="en-US" sz="930" dirty="0">
+              <a:rPr lang="en-US" sz="1050" dirty="0">
                 <a:solidFill>
                   <a:srgbClr val="9AA7BD"/>
                 </a:solidFill>
@@ -17395,9 +17387,9 @@
                 <a:ea typeface="Calibri" pitchFamily="34" charset="-122"/>
                 <a:cs typeface="Calibri" pitchFamily="34" charset="-120"/>
               </a:rPr>
-              <a:t>A persistent list of recognised features; click a row → the face lights up. Two-way link between the number and the geometry.</a:t>
-            </a:r>
-            <a:endParaRPr lang="en-US" sz="930" dirty="0"/>
+              <a:t>A list of bodies and features. Click a row and the faces light up. We have this today for STEP and IGES.</a:t>
+            </a:r>
+            <a:endParaRPr lang="en-US" sz="1050" dirty="0"/>
           </a:p>
         </p:txBody>
       </p:sp>
@@ -17473,7 +17465,7 @@
               <a:buNone/>
             </a:pPr>
             <a:r>
-              <a:rPr lang="en-US" sz="1100" b="1" dirty="0">
+              <a:rPr lang="en-US" sz="1150" b="1" dirty="0">
                 <a:solidFill>
                   <a:srgbClr val="EAF0F8"/>
                 </a:solidFill>
@@ -17481,9 +17473,9 @@
                 <a:ea typeface="Calibri" pitchFamily="34" charset="-122"/>
                 <a:cs typeface="Calibri" pitchFamily="34" charset="-120"/>
               </a:rPr>
-              <a:t>PMI / GD&amp;T on the model</a:t>
-            </a:r>
-            <a:endParaRPr lang="en-US" sz="1100" dirty="0"/>
+              <a:t>Tolerances on the model</a:t>
+            </a:r>
+            <a:endParaRPr lang="en-US" sz="1150" dirty="0"/>
           </a:p>
         </p:txBody>
       </p:sp>
@@ -17515,7 +17507,7 @@
               <a:buNone/>
             </a:pPr>
             <a:r>
-              <a:rPr lang="en-US" sz="930" dirty="0">
+              <a:rPr lang="en-US" sz="1050" dirty="0">
                 <a:solidFill>
                   <a:srgbClr val="9AA7BD"/>
                 </a:solidFill>
@@ -17523,9 +17515,9 @@
                 <a:ea typeface="Calibri" pitchFamily="34" charset="-122"/>
                 <a:cs typeface="Calibri" pitchFamily="34" charset="-120"/>
               </a:rPr>
-              <a:t>Tolerances and annotations shown in 3D, tied to the faces that carry the cost of holding them.</a:t>
-            </a:r>
-            <a:endParaRPr lang="en-US" sz="930" dirty="0"/>
+              <a:t>Tolerances and notes shown in 3D (PMI: product manufacturing information), tied to the faces they apply to. We do not have this yet.</a:t>
+            </a:r>
+            <a:endParaRPr lang="en-US" sz="1050" dirty="0"/>
           </a:p>
         </p:txBody>
       </p:sp>
@@ -17601,7 +17593,7 @@
               <a:buNone/>
             </a:pPr>
             <a:r>
-              <a:rPr lang="en-US" sz="1100" b="1" dirty="0">
+              <a:rPr lang="en-US" sz="1150" b="1" dirty="0">
                 <a:solidFill>
                   <a:srgbClr val="EAF0F8"/>
                 </a:solidFill>
@@ -17609,9 +17601,9 @@
                 <a:ea typeface="Calibri" pitchFamily="34" charset="-122"/>
                 <a:cs typeface="Calibri" pitchFamily="34" charset="-120"/>
               </a:rPr>
-              <a:t>A big, fluid canvas</a:t>
-            </a:r>
-            <a:endParaRPr lang="en-US" sz="1100" dirty="0"/>
+              <a:t>A big, easy canvas</a:t>
+            </a:r>
+            <a:endParaRPr lang="en-US" sz="1150" dirty="0"/>
           </a:p>
         </p:txBody>
       </p:sp>
@@ -17643,7 +17635,7 @@
               <a:buNone/>
             </a:pPr>
             <a:r>
-              <a:rPr lang="en-US" sz="930" dirty="0">
+              <a:rPr lang="en-US" sz="1050" dirty="0">
                 <a:solidFill>
                   <a:srgbClr val="9AA7BD"/>
                 </a:solidFill>
@@ -17651,9 +17643,9 @@
                 <a:ea typeface="Calibri" pitchFamily="34" charset="-122"/>
                 <a:cs typeface="Calibri" pitchFamily="34" charset="-120"/>
               </a:rPr>
-              <a:t>Fullscreen / large view, an orientation cube, smooth orbit — the difference between "a widget" and "a tool".</a:t>
-            </a:r>
-            <a:endParaRPr lang="en-US" sz="930" dirty="0"/>
+              <a:t>A large view, an orientation cube and smooth orbit. We have an Expand button, the cube and standard views today.</a:t>
+            </a:r>
+            <a:endParaRPr lang="en-US" sz="1050" dirty="0"/>
           </a:p>
         </p:txBody>
       </p:sp>
@@ -17827,7 +17819,7 @@
               <a:buNone/>
             </a:pPr>
             <a:r>
-              <a:rPr lang="en-US" sz="700" spc="150" kern="0" dirty="0">
+              <a:rPr lang="en-US" sz="750" spc="150" kern="0" dirty="0">
                 <a:solidFill>
                   <a:srgbClr val="5C6B85"/>
                 </a:solidFill>
@@ -17837,7 +17829,7 @@
               </a:rPr>
               <a:t>CAD-TO-COST  INTELLIGENCE</a:t>
             </a:r>
-            <a:endParaRPr lang="en-US" sz="700" dirty="0"/>
+            <a:endParaRPr lang="en-US" sz="750" dirty="0"/>
           </a:p>
         </p:txBody>
       </p:sp>
@@ -17894,7 +17886,7 @@
                 <a:ea typeface="Calibri" pitchFamily="34" charset="-122"/>
                 <a:cs typeface="Calibri" pitchFamily="34" charset="-120"/>
               </a:rPr>
-              <a:t>OUR BASELINE · FROM A CODE AUDIT</a:t>
+              <a:t>OUR BASELINE · CHECKED AGAINST THE CODE, SEPTEMBER 2026</a:t>
             </a:r>
             <a:endParaRPr lang="en-US" sz="1050" dirty="0"/>
           </a:p>
@@ -17972,7 +17964,7 @@
                 <a:ea typeface="Calibri" pitchFamily="34" charset="-122"/>
                 <a:cs typeface="Calibri" pitchFamily="34" charset="-120"/>
               </a:rPr>
-              <a:t>CostVision  ·  Competitive study &amp; build plan  ·  Confidential</a:t>
+              <a:t>CostVision  ·  CAD viewer study &amp; roadmap  ·  Updated September 2026  ·  Confidential</a:t>
             </a:r>
             <a:endParaRPr lang="en-US" sz="750" dirty="0"/>
           </a:p>
@@ -18058,7 +18050,7 @@
                 <a:ea typeface="Calibri" pitchFamily="34" charset="-122"/>
                 <a:cs typeface="Calibri" pitchFamily="34" charset="-120"/>
               </a:rPr>
-              <a:t>✓  Already strong</a:t>
+              <a:t>In the tool today</a:t>
             </a:r>
             <a:endParaRPr lang="en-US" sz="1400" dirty="0"/>
           </a:p>
@@ -18120,7 +18112,7 @@
                 <a:ea typeface="Calibri" pitchFamily="34" charset="-122"/>
                 <a:cs typeface="Calibri" pitchFamily="34" charset="-120"/>
               </a:rPr>
-              <a:t>OCCT B-rep engine: volume, bbox, area, weights, face/edge classes</a:t>
+              <a:t>STEP/IGES measured by OpenCASCADE; STL by a fast mesh path: volume, weight, size, area</a:t>
             </a:r>
             <a:endParaRPr lang="en-US" sz="970" dirty="0"/>
           </a:p>
@@ -18182,7 +18174,7 @@
                 <a:ea typeface="Calibri" pitchFamily="34" charset="-122"/>
                 <a:cs typeface="Calibri" pitchFamily="34" charset="-120"/>
               </a:rPr>
-              <a:t>Real feature table — holes &amp; bosses with Ø, depth, through/blind</a:t>
+              <a:t>Feature table (STEP/IGES): holes and bosses with diameter and depth; fillets; cautious pockets</a:t>
             </a:r>
             <a:endParaRPr lang="en-US" sz="970" dirty="0"/>
           </a:p>
@@ -18244,7 +18236,7 @@
                 <a:ea typeface="Calibri" pitchFamily="34" charset="-122"/>
                 <a:cs typeface="Calibri" pitchFamily="34" charset="-120"/>
               </a:rPr>
-              <a:t>Ray-cast wall thickness, draft/undercut analysis, setup-count</a:t>
+              <a:t>Wall thickness by ray-casting, draft and undercut counts, setup count, sheet-metal bends</a:t>
             </a:r>
             <a:endParaRPr lang="en-US" sz="970" dirty="0"/>
           </a:p>
@@ -18306,7 +18298,7 @@
                 <a:ea typeface="Calibri" pitchFamily="34" charset="-122"/>
                 <a:cs typeface="Calibri" pitchFamily="34" charset="-120"/>
               </a:rPr>
-              <a:t>Sheet-metal bend detection; parametric tooling-cost estimates</a:t>
+              <a:t>CNC cycle-time estimate for STEP/IGES, built up from the measured features</a:t>
             </a:r>
             <a:endParaRPr lang="en-US" sz="970" dirty="0"/>
           </a:p>
@@ -18368,7 +18360,7 @@
                 <a:ea typeface="Calibri" pitchFamily="34" charset="-122"/>
                 <a:cs typeface="Calibri" pitchFamily="34" charset="-120"/>
               </a:rPr>
-              <a:t>Strong AUTO → cost: geometry auto-fills the cost form, no re-typing</a:t>
+              <a:t>Viewer: orientation cube, model tree, X/Y/Z section planes, exploded view, Expand</a:t>
             </a:r>
             <a:endParaRPr lang="en-US" sz="970" dirty="0"/>
           </a:p>
@@ -18430,7 +18422,7 @@
                 <a:ea typeface="Calibri" pitchFamily="34" charset="-122"/>
                 <a:cs typeface="Calibri" pitchFamily="34" charset="-120"/>
               </a:rPr>
-              <a:t>Per-face B-rep intelligence on click (type, Ø, hole-vs-boss, area)</a:t>
+              <a:t>On-model colour: wall thickness, draft and undercut, and £ per face after a costing</a:t>
             </a:r>
             <a:endParaRPr lang="en-US" sz="970" dirty="0"/>
           </a:p>
@@ -18492,7 +18484,7 @@
                 <a:ea typeface="Calibri" pitchFamily="34" charset="-122"/>
                 <a:cs typeface="Calibri" pitchFamily="34" charset="-120"/>
               </a:rPr>
-              <a:t>Distance / 3-pt circle / angle measure, section plane, CSV export</a:t>
+              <a:t>Measure: distance, radius, angle, point, face-to-face; export to CSV</a:t>
             </a:r>
             <a:endParaRPr lang="en-US" sz="970" dirty="0"/>
           </a:p>
@@ -18554,7 +18546,7 @@
                 <a:ea typeface="Calibri" pitchFamily="34" charset="-122"/>
                 <a:cs typeface="Calibri" pitchFamily="34" charset="-120"/>
               </a:rPr>
-              <a:t>Runs in the browser — instant, no desktop install</a:t>
+              <a:t>Click a face for its exact type, radius and area; the matching result rows are outlined</a:t>
             </a:r>
             <a:endParaRPr lang="en-US" sz="970" dirty="0"/>
           </a:p>
@@ -18640,7 +18632,7 @@
                 <a:ea typeface="Calibri" pitchFamily="34" charset="-122"/>
                 <a:cs typeface="Calibri" pitchFamily="34" charset="-120"/>
               </a:rPr>
-              <a:t>△  The real gaps</a:t>
+              <a:t>Still open</a:t>
             </a:r>
             <a:endParaRPr lang="en-US" sz="1400" dirty="0"/>
           </a:p>
@@ -18661,7 +18653,7 @@
             <a:avLst/>
           </a:prstGeom>
           <a:solidFill>
-            <a:srgbClr val="FBBF24"/>
+            <a:srgbClr val="A78BFA"/>
           </a:solidFill>
           <a:ln/>
         </p:spPr>
@@ -18702,7 +18694,7 @@
                 <a:ea typeface="Calibri" pitchFamily="34" charset="-122"/>
                 <a:cs typeface="Calibri" pitchFamily="34" charset="-120"/>
               </a:rPr>
-              <a:t>No bigger / fullscreen viewer — fixed ~560px panel</a:t>
+              <a:t>No tolerances read from the CAD file (STEP AP242 PMI); the engineer types the tightest tolerance</a:t>
             </a:r>
             <a:endParaRPr lang="en-US" sz="970" dirty="0"/>
           </a:p>
@@ -18723,7 +18715,7 @@
             <a:avLst/>
           </a:prstGeom>
           <a:solidFill>
-            <a:srgbClr val="2DD4BF"/>
+            <a:srgbClr val="A78BFA"/>
           </a:solidFill>
           <a:ln/>
         </p:spPr>
@@ -18764,7 +18756,7 @@
                 <a:ea typeface="Calibri" pitchFamily="34" charset="-122"/>
                 <a:cs typeface="Calibri" pitchFamily="34" charset="-120"/>
               </a:rPr>
-              <a:t>We COMPUTE thickness, draft, setups — but never paint them on the model</a:t>
+              <a:t>STL has no feature table: no cycle time, tree or thickness map; the engineer types the cycle time</a:t>
             </a:r>
             <a:endParaRPr lang="en-US" sz="970" dirty="0"/>
           </a:p>
@@ -18785,7 +18777,7 @@
             <a:avLst/>
           </a:prstGeom>
           <a:solidFill>
-            <a:srgbClr val="FBBF24"/>
+            <a:srgbClr val="A78BFA"/>
           </a:solidFill>
           <a:ln/>
         </p:spPr>
@@ -18826,7 +18818,7 @@
                 <a:ea typeface="Calibri" pitchFamily="34" charset="-122"/>
                 <a:cs typeface="Calibri" pitchFamily="34" charset="-120"/>
               </a:rPr>
-              <a:t>No feature/model tree, no orientation cube, no exploded view</a:t>
+              <a:t>No chamfer, slot or thread-spec recognition yet</a:t>
             </a:r>
             <a:endParaRPr lang="en-US" sz="970" dirty="0"/>
           </a:p>
@@ -18888,7 +18880,7 @@
                 <a:ea typeface="Calibri" pitchFamily="34" charset="-122"/>
                 <a:cs typeface="Calibri" pitchFamily="34" charset="-120"/>
               </a:rPr>
-              <a:t>Mesh-only render; STEP is tessellated server-side (no live B-rep in browser)</a:t>
+              <a:t>The browser shows a mesh; the server turns STEP into triangles (no live B-rep in the browser)</a:t>
             </a:r>
             <a:endParaRPr lang="en-US" sz="970" dirty="0"/>
           </a:p>
@@ -18909,7 +18901,7 @@
             <a:avLst/>
           </a:prstGeom>
           <a:solidFill>
-            <a:srgbClr val="A78BFA"/>
+            <a:srgbClr val="FBBF24"/>
           </a:solidFill>
           <a:ln/>
         </p:spPr>
@@ -18950,7 +18942,7 @@
                 <a:ea typeface="Calibri" pitchFamily="34" charset="-122"/>
                 <a:cs typeface="Calibri" pitchFamily="34" charset="-120"/>
               </a:rPr>
-              <a:t>No PMI / GD&amp;T / tolerance capture from STEP AP242</a:t>
+              <a:t>Section planes have no solid caps on the cut</a:t>
             </a:r>
             <a:endParaRPr lang="en-US" sz="970" dirty="0"/>
           </a:p>
@@ -18971,7 +18963,7 @@
             <a:avLst/>
           </a:prstGeom>
           <a:solidFill>
-            <a:srgbClr val="A78BFA"/>
+            <a:srgbClr val="2DD4BF"/>
           </a:solidFill>
           <a:ln/>
         </p:spPr>
@@ -19012,7 +19004,7 @@
                 <a:ea typeface="Calibri" pitchFamily="34" charset="-122"/>
                 <a:cs typeface="Calibri" pitchFamily="34" charset="-120"/>
               </a:rPr>
-              <a:t>Feature recognition stops at holes/bosses — no fillet, chamfer, slot, thread specs</a:t>
+              <a:t>Extrusion has no CAD rules yet (its form still costs it)</a:t>
             </a:r>
             <a:endParaRPr lang="en-US" sz="970" dirty="0"/>
           </a:p>
@@ -19033,7 +19025,7 @@
             <a:avLst/>
           </a:prstGeom>
           <a:solidFill>
-            <a:srgbClr val="A78BFA"/>
+            <a:srgbClr val="2DD4BF"/>
           </a:solidFill>
           <a:ln/>
         </p:spPr>
@@ -19074,7 +19066,7 @@
                 <a:ea typeface="Calibri" pitchFamily="34" charset="-122"/>
                 <a:cs typeface="Calibri" pitchFamily="34" charset="-120"/>
               </a:rPr>
-              <a:t>STL uploads are feature-blind (holes/draft/setups all zero)</a:t>
+              <a:t>Route or material is asked, not guessed, when geometry cannot decide: by design, but it is typing</a:t>
             </a:r>
             <a:endParaRPr lang="en-US" sz="970" dirty="0"/>
           </a:p>
@@ -19095,7 +19087,7 @@
             <a:avLst/>
           </a:prstGeom>
           <a:solidFill>
-            <a:srgbClr val="FBBF24"/>
+            <a:srgbClr val="2DD4BF"/>
           </a:solidFill>
           <a:ln/>
         </p:spPr>
@@ -19136,7 +19128,7 @@
                 <a:ea typeface="Calibri" pitchFamily="34" charset="-122"/>
                 <a:cs typeface="Calibri" pitchFamily="34" charset="-120"/>
               </a:rPr>
-              <a:t>Report feature tables not click-linked back to the 3D model</a:t>
+              <a:t>No estimate has yet been compared with a price JLR actually paid</a:t>
             </a:r>
             <a:endParaRPr lang="en-US" sz="970" dirty="0"/>
           </a:p>
@@ -19312,7 +19304,7 @@
               <a:buNone/>
             </a:pPr>
             <a:r>
-              <a:rPr lang="en-US" sz="700" spc="150" kern="0" dirty="0">
+              <a:rPr lang="en-US" sz="750" spc="150" kern="0" dirty="0">
                 <a:solidFill>
                   <a:srgbClr val="5C6B85"/>
                 </a:solidFill>
@@ -19322,7 +19314,7 @@
               </a:rPr>
               <a:t>CAD-TO-COST  INTELLIGENCE</a:t>
             </a:r>
-            <a:endParaRPr lang="en-US" sz="700" dirty="0"/>
+            <a:endParaRPr lang="en-US" sz="750" dirty="0"/>
           </a:p>
         </p:txBody>
       </p:sp>
@@ -19418,7 +19410,7 @@
                 <a:ea typeface="Calibri" pitchFamily="34" charset="-122"/>
                 <a:cs typeface="Calibri" pitchFamily="34" charset="-120"/>
               </a:rPr>
-              <a:t>The strategic insight</a:t>
+              <a:t>The two ideas behind the plan</a:t>
             </a:r>
             <a:endParaRPr lang="en-US" sz="2500" dirty="0"/>
           </a:p>
@@ -19457,7 +19449,7 @@
                 <a:ea typeface="Calibri" pitchFamily="34" charset="-122"/>
                 <a:cs typeface="Calibri" pitchFamily="34" charset="-120"/>
               </a:rPr>
-              <a:t>CostVision  ·  Competitive study &amp; build plan  ·  Confidential</a:t>
+              <a:t>CostVision  ·  CAD viewer study &amp; roadmap  ·  Updated September 2026  ·  Confidential</a:t>
             </a:r>
             <a:endParaRPr lang="en-US" sz="750" dirty="0"/>
           </a:p>
@@ -19546,7 +19538,7 @@
                 <a:ea typeface="Calibri" pitchFamily="34" charset="-122"/>
                 <a:cs typeface="Calibri" pitchFamily="34" charset="-120"/>
               </a:rPr>
-              <a:t>“We already measure it —</a:t>
+              <a:t>“We measured it —</a:t>
             </a:r>
             <a:endParaRPr lang="en-US" sz="1900" dirty="0"/>
           </a:p>
@@ -19566,7 +19558,7 @@
                 <a:ea typeface="Calibri" pitchFamily="34" charset="-122"/>
                 <a:cs typeface="Calibri" pitchFamily="34" charset="-120"/>
               </a:rPr>
-              <a:t>we just don’t show it.”</a:t>
+              <a:t>now we show it.”</a:t>
             </a:r>
             <a:endParaRPr lang="en-US" sz="1900" dirty="0"/>
           </a:p>
@@ -19608,7 +19600,7 @@
                 <a:ea typeface="Calibri" pitchFamily="34" charset="-122"/>
                 <a:cs typeface="Calibri" pitchFamily="34" charset="-120"/>
               </a:rPr>
-              <a:t>Wall thickness, draft, undercuts, setups and manufacturability are all computed server-side today and thrown away visually. Painting them on the model is the single highest ratio of perceived value to engineering effort in this whole plan.</a:t>
+              <a:t>In July the engine already worked out wall thickness, draft and undercuts, but the viewer never drew them. Now thickness, draft and £ per face are coloured on the model. The data was there; the viewer just uses it.</a:t>
             </a:r>
             <a:endParaRPr lang="en-US" sz="1200" dirty="0"/>
           </a:p>
@@ -19717,7 +19709,7 @@
                 <a:ea typeface="Calibri" pitchFamily="34" charset="-122"/>
                 <a:cs typeface="Calibri" pitchFamily="34" charset="-120"/>
               </a:rPr>
-              <a:t>so users type less.”</a:t>
+              <a:t>so people type less.”</a:t>
             </a:r>
             <a:endParaRPr lang="en-US" sz="1900" dirty="0"/>
           </a:p>
@@ -19759,7 +19751,7 @@
                 <a:ea typeface="Calibri" pitchFamily="34" charset="-122"/>
                 <a:cs typeface="Calibri" pitchFamily="34" charset="-120"/>
               </a:rPr>
-              <a:t>Every feature we recognise from the CAD (fillets, chamfers, threads, and tolerances from AP242) is one less field a human fills in — and one less place the estimate can drift. More capture = faster, more defensible, more automatic.</a:t>
+              <a:t>Every feature read from the CAD is one less field someone fills in, and one less place for a typing slip. Tolerances, chamfers, slots and threads are next. Until then, the tool asks the engineer.</a:t>
             </a:r>
             <a:endParaRPr lang="en-US" sz="1200" dirty="0"/>
           </a:p>
@@ -19828,7 +19820,7 @@
                 <a:ea typeface="Calibri" pitchFamily="34" charset="-122"/>
                 <a:cs typeface="Calibri" pitchFamily="34" charset="-120"/>
               </a:rPr>
-              <a:t>Design principle we keep:  </a:t>
+              <a:t>The rule we keep:  </a:t>
             </a:r>
             <a:pPr indent="0" marL="0">
               <a:lnSpc>
@@ -19845,7 +19837,7 @@
                 <a:ea typeface="Calibri" pitchFamily="34" charset="-122"/>
                 <a:cs typeface="Calibri" pitchFamily="34" charset="-120"/>
               </a:rPr>
-              <a:t>the viewer is not decoration — it is an INPUT-CAPTURE surface. Every pixel earns its place by either capturing a cost driver or letting a human verify one. Glass-box, always: the AI reads geometry, it never sets a price in secret.</a:t>
+              <a:t>the viewer is a place to capture and check cost inputs, not decoration. The tool measures and calculates; every £ traces to a rate. AI never sets a price, and at JLR it is switched off.</a:t>
             </a:r>
             <a:endParaRPr lang="en-US" sz="1150" dirty="0"/>
           </a:p>
@@ -20021,7 +20013,7 @@
               <a:buNone/>
             </a:pPr>
             <a:r>
-              <a:rPr lang="en-US" sz="700" spc="150" kern="0" dirty="0">
+              <a:rPr lang="en-US" sz="750" spc="150" kern="0" dirty="0">
                 <a:solidFill>
                   <a:srgbClr val="5C6B85"/>
                 </a:solidFill>
@@ -20031,7 +20023,7 @@
               </a:rPr>
               <a:t>CAD-TO-COST  INTELLIGENCE</a:t>
             </a:r>
-            <a:endParaRPr lang="en-US" sz="700" dirty="0"/>
+            <a:endParaRPr lang="en-US" sz="750" dirty="0"/>
           </a:p>
         </p:txBody>
       </p:sp>
@@ -20088,7 +20080,7 @@
                 <a:ea typeface="Calibri" pitchFamily="34" charset="-122"/>
                 <a:cs typeface="Calibri" pitchFamily="34" charset="-120"/>
               </a:rPr>
-              <a:t>HOW · VERIFIED &amp; BUILDABLE</a:t>
+              <a:t>FUTURE OPTIONS · PUBLISHED AND OPEN SOURCE</a:t>
             </a:r>
             <a:endParaRPr lang="en-US" sz="1050" dirty="0"/>
           </a:p>
@@ -20127,7 +20119,7 @@
                 <a:ea typeface="Calibri" pitchFamily="34" charset="-122"/>
                 <a:cs typeface="Calibri" pitchFamily="34" charset="-120"/>
               </a:rPr>
-              <a:t>The technology we would build on</a:t>
+              <a:t>The technology we could build on</a:t>
             </a:r>
             <a:endParaRPr lang="en-US" sz="2500" dirty="0"/>
           </a:p>
@@ -20166,7 +20158,7 @@
                 <a:ea typeface="Calibri" pitchFamily="34" charset="-122"/>
                 <a:cs typeface="Calibri" pitchFamily="34" charset="-120"/>
               </a:rPr>
-              <a:t>CostVision  ·  Competitive study &amp; build plan  ·  Confidential</a:t>
+              <a:t>CostVision  ·  CAD viewer study &amp; roadmap  ·  Updated September 2026  ·  Confidential</a:t>
             </a:r>
             <a:endParaRPr lang="en-US" sz="750" dirty="0"/>
           </a:p>
@@ -20181,11 +20173,11 @@
         <p:spPr>
           <a:xfrm>
             <a:off x="457200" y="1828800"/>
-            <a:ext cx="5532120" cy="1965960"/>
+            <a:ext cx="5532120" cy="1828800"/>
           </a:xfrm>
           <a:prstGeom prst="roundRect">
             <a:avLst>
-              <a:gd name="adj" fmla="val 3256"/>
+              <a:gd name="adj" fmla="val 3500"/>
             </a:avLst>
           </a:prstGeom>
           <a:solidFill>
@@ -20208,7 +20200,7 @@
         <p:spPr>
           <a:xfrm>
             <a:off x="457200" y="1828800"/>
-            <a:ext cx="64008" cy="1965960"/>
+            <a:ext cx="64008" cy="1828800"/>
           </a:xfrm>
           <a:prstGeom prst="rect">
             <a:avLst/>
@@ -20252,7 +20244,7 @@
                 <a:ea typeface="Calibri" pitchFamily="34" charset="-122"/>
                 <a:cs typeface="Calibri" pitchFamily="34" charset="-120"/>
               </a:rPr>
-              <a:t>occt-import-js (OCCT → WASM)</a:t>
+              <a:t>occt-import-js (OpenCASCADE in the browser)</a:t>
             </a:r>
             <a:endParaRPr lang="en-US" sz="1200" dirty="0"/>
           </a:p>
@@ -20267,7 +20259,7 @@
         <p:spPr>
           <a:xfrm>
             <a:off x="640080" y="2249424"/>
-            <a:ext cx="5221224" cy="1508760"/>
+            <a:ext cx="5221224" cy="1371600"/>
           </a:xfrm>
           <a:prstGeom prst="rect">
             <a:avLst/>
@@ -20286,7 +20278,7 @@
               <a:buNone/>
             </a:pPr>
             <a:r>
-              <a:rPr lang="en-US" sz="1000" dirty="0">
+              <a:rPr lang="en-US" sz="1100" dirty="0">
                 <a:solidFill>
                   <a:srgbClr val="9AA7BD"/>
                 </a:solidFill>
@@ -20294,9 +20286,9 @@
                 <a:ea typeface="Calibri" pitchFamily="34" charset="-122"/>
                 <a:cs typeface="Calibri" pitchFamily="34" charset="-120"/>
               </a:rPr>
-              <a:t>Import STEP/IGES/BREP in the browser. Its JSON exposes a "brep_faces" map tying mesh triangles back to original B-rep faces — exactly what enables per-face selection &amp; highlighting linked to cost, live, with no server round-trip.</a:t>
-            </a:r>
-            <a:endParaRPr lang="en-US" sz="1000" dirty="0"/>
+              <a:t>An open-source build of our CAD kernel that runs in a web page (WebAssembly). It opens STEP and IGES directly and links each triangle back to its original face, so a click could select an exact face with no server call.</a:t>
+            </a:r>
+            <a:endParaRPr lang="en-US" sz="1100" dirty="0"/>
           </a:p>
         </p:txBody>
       </p:sp>
@@ -20308,12 +20300,12 @@
         </p:nvSpPr>
         <p:spPr>
           <a:xfrm>
-            <a:off x="6208776" y="1828800"/>
-            <a:ext cx="5532120" cy="1965960"/>
+            <a:off x="6172200" y="1828800"/>
+            <a:ext cx="5532120" cy="1828800"/>
           </a:xfrm>
           <a:prstGeom prst="roundRect">
             <a:avLst>
-              <a:gd name="adj" fmla="val 3256"/>
+              <a:gd name="adj" fmla="val 3500"/>
             </a:avLst>
           </a:prstGeom>
           <a:solidFill>
@@ -20335,8 +20327,8 @@
         </p:nvSpPr>
         <p:spPr>
           <a:xfrm>
-            <a:off x="6208776" y="1828800"/>
-            <a:ext cx="64008" cy="1965960"/>
+            <a:off x="6172200" y="1828800"/>
+            <a:ext cx="64008" cy="1828800"/>
           </a:xfrm>
           <a:prstGeom prst="rect">
             <a:avLst/>
@@ -20355,7 +20347,7 @@
         </p:nvSpPr>
         <p:spPr>
           <a:xfrm>
-            <a:off x="6391656" y="1938528"/>
+            <a:off x="6355080" y="1938528"/>
             <a:ext cx="5221224" cy="365760"/>
           </a:xfrm>
           <a:prstGeom prst="rect">
@@ -20380,7 +20372,7 @@
                 <a:ea typeface="Calibri" pitchFamily="34" charset="-122"/>
                 <a:cs typeface="Calibri" pitchFamily="34" charset="-120"/>
               </a:rPr>
-              <a:t>OCCT XDE — AP242 PMI</a:t>
+              <a:t>OpenCASCADE XDE — STEP AP242 PMI</a:t>
             </a:r>
             <a:endParaRPr lang="en-US" sz="1200" dirty="0"/>
           </a:p>
@@ -20394,8 +20386,8 @@
         </p:nvSpPr>
         <p:spPr>
           <a:xfrm>
-            <a:off x="6391656" y="2249424"/>
-            <a:ext cx="5221224" cy="1508760"/>
+            <a:off x="6355080" y="2249424"/>
+            <a:ext cx="5221224" cy="1371600"/>
           </a:xfrm>
           <a:prstGeom prst="rect">
             <a:avLst/>
@@ -20414,7 +20406,7 @@
               <a:buNone/>
             </a:pPr>
             <a:r>
-              <a:rPr lang="en-US" sz="1000" dirty="0">
+              <a:rPr lang="en-US" sz="1100" dirty="0">
                 <a:solidFill>
                   <a:srgbClr val="9AA7BD"/>
                 </a:solidFill>
@@ -20422,9 +20414,9 @@
                 <a:ea typeface="Calibri" pitchFamily="34" charset="-122"/>
                 <a:cs typeface="Calibri" pitchFamily="34" charset="-120"/>
               </a:rPr>
-              <a:t>OpenCascade's XDE / STEPCAFControl reads PMI (GD&amp;T) from STEP AP242: dimensions, tolerances, datums. This is the path to reading tolerances straight from the 3D file — not a separate drawing.</a:t>
-            </a:r>
-            <a:endParaRPr lang="en-US" sz="1000" dirty="0"/>
+              <a:t>The same kernel has a module that reads tolerances, dimensions and datums stored in STEP AP242 files. That is the route to reading tolerances from the 3D file, not a separate drawing.</a:t>
+            </a:r>
+            <a:endParaRPr lang="en-US" sz="1100" dirty="0"/>
           </a:p>
         </p:txBody>
       </p:sp>
@@ -20436,12 +20428,12 @@
         </p:nvSpPr>
         <p:spPr>
           <a:xfrm>
-            <a:off x="457200" y="4014216"/>
-            <a:ext cx="5532120" cy="1965960"/>
+            <a:off x="457200" y="3840480"/>
+            <a:ext cx="5532120" cy="1828800"/>
           </a:xfrm>
           <a:prstGeom prst="roundRect">
             <a:avLst>
-              <a:gd name="adj" fmla="val 3256"/>
+              <a:gd name="adj" fmla="val 3500"/>
             </a:avLst>
           </a:prstGeom>
           <a:solidFill>
@@ -20463,8 +20455,8 @@
         </p:nvSpPr>
         <p:spPr>
           <a:xfrm>
-            <a:off x="457200" y="4014216"/>
-            <a:ext cx="64008" cy="1965960"/>
+            <a:off x="457200" y="3840480"/>
+            <a:ext cx="64008" cy="1828800"/>
           </a:xfrm>
           <a:prstGeom prst="rect">
             <a:avLst/>
@@ -20483,7 +20475,7 @@
         </p:nvSpPr>
         <p:spPr>
           <a:xfrm>
-            <a:off x="640080" y="4123944"/>
+            <a:off x="640080" y="3950208"/>
             <a:ext cx="5221224" cy="365760"/>
           </a:xfrm>
           <a:prstGeom prst="rect">
@@ -20508,7 +20500,7 @@
                 <a:ea typeface="Calibri" pitchFamily="34" charset="-122"/>
                 <a:cs typeface="Calibri" pitchFamily="34" charset="-120"/>
               </a:rPr>
-              <a:t>Native B-rep AFR (deep learning)</a:t>
+              <a:t>Learned feature recognition (research)</a:t>
             </a:r>
             <a:endParaRPr lang="en-US" sz="1200" dirty="0"/>
           </a:p>
@@ -20522,8 +20514,8 @@
         </p:nvSpPr>
         <p:spPr>
           <a:xfrm>
-            <a:off x="640080" y="4434840"/>
-            <a:ext cx="5221224" cy="1508760"/>
+            <a:off x="640080" y="4261104"/>
+            <a:ext cx="5221224" cy="1371600"/>
           </a:xfrm>
           <a:prstGeom prst="rect">
             <a:avLst/>
@@ -20542,7 +20534,7 @@
               <a:buNone/>
             </a:pPr>
             <a:r>
-              <a:rPr lang="en-US" sz="1000" dirty="0">
+              <a:rPr lang="en-US" sz="1100" dirty="0">
                 <a:solidFill>
                   <a:srgbClr val="9AA7BD"/>
                 </a:solidFill>
@@ -20550,9 +20542,9 @@
                 <a:ea typeface="Calibri" pitchFamily="34" charset="-122"/>
                 <a:cs typeface="Calibri" pitchFamily="34" charset="-120"/>
               </a:rPr>
-              <a:t>UV-Net, BRepGAT, BrepMFR, AAGNet encode the B-rep as a face-adjacency graph and segment machining features per face — 98–99%+ on public benchmarks — WITHOUT lossy mesh/voxel conversion.</a:t>
-            </a:r>
-            <a:endParaRPr lang="en-US" sz="1000" dirty="0"/>
+              <a:t>Published research models (UV-Net, BRepGAT, BrepMFR, AAGNet) treat the B-rep as a graph of faces and label machining features face by face. Papers report 98–99% on public benchmarks.</a:t>
+            </a:r>
+            <a:endParaRPr lang="en-US" sz="1100" dirty="0"/>
           </a:p>
         </p:txBody>
       </p:sp>
@@ -20564,12 +20556,12 @@
         </p:nvSpPr>
         <p:spPr>
           <a:xfrm>
-            <a:off x="6208776" y="4014216"/>
-            <a:ext cx="5532120" cy="1965960"/>
+            <a:off x="6172200" y="3840480"/>
+            <a:ext cx="5532120" cy="1828800"/>
           </a:xfrm>
           <a:prstGeom prst="roundRect">
             <a:avLst>
-              <a:gd name="adj" fmla="val 3256"/>
+              <a:gd name="adj" fmla="val 3500"/>
             </a:avLst>
           </a:prstGeom>
           <a:solidFill>
@@ -20591,8 +20583,8 @@
         </p:nvSpPr>
         <p:spPr>
           <a:xfrm>
-            <a:off x="6208776" y="4014216"/>
-            <a:ext cx="64008" cy="1965960"/>
+            <a:off x="6172200" y="3840480"/>
+            <a:ext cx="64008" cy="1828800"/>
           </a:xfrm>
           <a:prstGeom prst="rect">
             <a:avLst/>
@@ -20611,7 +20603,7 @@
         </p:nvSpPr>
         <p:spPr>
           <a:xfrm>
-            <a:off x="6391656" y="4123944"/>
+            <a:off x="6355080" y="3950208"/>
             <a:ext cx="5221224" cy="365760"/>
           </a:xfrm>
           <a:prstGeom prst="rect">
@@ -20636,7 +20628,7 @@
                 <a:ea typeface="Calibri" pitchFamily="34" charset="-122"/>
                 <a:cs typeface="Calibri" pitchFamily="34" charset="-120"/>
               </a:rPr>
-              <a:t>Heatmap methods (well-trodden)</a:t>
+              <a:t>Heatmap methods (textbook)</a:t>
             </a:r>
             <a:endParaRPr lang="en-US" sz="1200" dirty="0"/>
           </a:p>
@@ -20650,8 +20642,8 @@
         </p:nvSpPr>
         <p:spPr>
           <a:xfrm>
-            <a:off x="6391656" y="4434840"/>
-            <a:ext cx="5221224" cy="1508760"/>
+            <a:off x="6355080" y="4261104"/>
+            <a:ext cx="5221224" cy="1371600"/>
           </a:xfrm>
           <a:prstGeom prst="rect">
             <a:avLst/>
@@ -20670,7 +20662,7 @@
               <a:buNone/>
             </a:pPr>
             <a:r>
-              <a:rPr lang="en-US" sz="1000" dirty="0">
+              <a:rPr lang="en-US" sz="1100" dirty="0">
                 <a:solidFill>
                   <a:srgbClr val="9AA7BD"/>
                 </a:solidFill>
@@ -20678,9 +20670,9 @@
                 <a:ea typeface="Calibri" pitchFamily="34" charset="-122"/>
                 <a:cs typeface="Calibri" pitchFamily="34" charset="-120"/>
               </a:rPr>
-              <a:t>Wall thickness = single-ray + fitted-ball (both textbook). Draft = face-normal vs pull direction. We already compute the numbers; rendering them is a shader/vertex-colour job.</a:t>
-            </a:r>
-            <a:endParaRPr lang="en-US" sz="1000" dirty="0"/>
+              <a:t>Wall thickness: cast a ray inward from each face. Draft: angle between the face normal and the pull direction. We already use both, in the engine and on the model.</a:t>
+            </a:r>
+            <a:endParaRPr lang="en-US" sz="1100" dirty="0"/>
           </a:p>
         </p:txBody>
       </p:sp>
@@ -20692,7 +20684,7 @@
         </p:nvSpPr>
         <p:spPr>
           <a:xfrm>
-            <a:off x="457200" y="5897880"/>
+            <a:off x="457200" y="5833872"/>
             <a:ext cx="11292840" cy="566928"/>
           </a:xfrm>
           <a:prstGeom prst="roundRect">
@@ -20719,7 +20711,7 @@
         </p:nvSpPr>
         <p:spPr>
           <a:xfrm>
-            <a:off x="685800" y="5897880"/>
+            <a:off x="685800" y="5833872"/>
             <a:ext cx="10881360" cy="566928"/>
           </a:xfrm>
           <a:prstGeom prst="rect">
@@ -20758,7 +20750,7 @@
                 <a:ea typeface="Calibri" pitchFamily="34" charset="-122"/>
                 <a:cs typeface="Calibri" pitchFamily="34" charset="-120"/>
               </a:rPr>
-              <a:t>those 98–99% AFR figures are per-face on SYNTHETIC datasets; vendor "seamless / 95%+" claims are marketing. Real STEP is messier — so we keep the human-in-the-loop correction step, always.</a:t>
+              <a:t>the 98–99% figures are research results on clean, synthetic datasets, not our results. Real STEP files are messier, so a person would always check what the model finds.</a:t>
             </a:r>
             <a:endParaRPr lang="en-US" sz="1000" dirty="0"/>
           </a:p>
@@ -20934,7 +20926,7 @@
               <a:buNone/>
             </a:pPr>
             <a:r>
-              <a:rPr lang="en-US" sz="700" spc="150" kern="0" dirty="0">
+              <a:rPr lang="en-US" sz="750" spc="150" kern="0" dirty="0">
                 <a:solidFill>
                   <a:srgbClr val="5C6B85"/>
                 </a:solidFill>
@@ -20944,7 +20936,7 @@
               </a:rPr>
               <a:t>CAD-TO-COST  INTELLIGENCE</a:t>
             </a:r>
-            <a:endParaRPr lang="en-US" sz="700" dirty="0"/>
+            <a:endParaRPr lang="en-US" sz="750" dirty="0"/>
           </a:p>
         </p:txBody>
       </p:sp>
@@ -21001,7 +20993,7 @@
                 <a:ea typeface="Calibri" pitchFamily="34" charset="-122"/>
                 <a:cs typeface="Calibri" pitchFamily="34" charset="-120"/>
               </a:rPr>
-              <a:t>ROADMAP</a:t>
+              <a:t>ROADMAP · STATUS SEPTEMBER 2026</a:t>
             </a:r>
             <a:endParaRPr lang="en-US" sz="1050" dirty="0"/>
           </a:p>
@@ -21040,7 +21032,7 @@
                 <a:ea typeface="Calibri" pitchFamily="34" charset="-122"/>
                 <a:cs typeface="Calibri" pitchFamily="34" charset="-120"/>
               </a:rPr>
-              <a:t>The build plan — four phases</a:t>
+              <a:t>The build plan — four phases, and where each stands</a:t>
             </a:r>
             <a:endParaRPr lang="en-US" sz="2500" dirty="0"/>
           </a:p>
@@ -21079,7 +21071,7 @@
                 <a:ea typeface="Calibri" pitchFamily="34" charset="-122"/>
                 <a:cs typeface="Calibri" pitchFamily="34" charset="-120"/>
               </a:rPr>
-              <a:t>CostVision  ·  Competitive study &amp; build plan  ·  Confidential</a:t>
+              <a:t>CostVision  ·  CAD viewer study &amp; roadmap  ·  Updated September 2026  ·  Confidential</a:t>
             </a:r>
             <a:endParaRPr lang="en-US" sz="750" dirty="0"/>
           </a:p>
@@ -21246,7 +21238,7 @@
                 <a:ea typeface="Calibri" pitchFamily="34" charset="-122"/>
                 <a:cs typeface="Calibri" pitchFamily="34" charset="-120"/>
               </a:rPr>
-              <a:t>Bigger viewer + paint the data we already compute. Highest value / effort.</a:t>
+              <a:t>Bigger viewer, and draw the data we already measured: thickness, draft, model tree, result-to-model links.</a:t>
             </a:r>
             <a:endParaRPr lang="en-US" sz="1050" dirty="0"/>
           </a:p>
@@ -21312,7 +21304,7 @@
                 <a:ea typeface="Calibri" pitchFamily="34" charset="-122"/>
                 <a:cs typeface="Calibri" pitchFamily="34" charset="-120"/>
               </a:rPr>
-              <a:t>~1–2 wks</a:t>
+              <a:t>Built</a:t>
             </a:r>
             <a:endParaRPr lang="en-US" sz="1000" dirty="0"/>
           </a:p>
@@ -21518,7 +21510,7 @@
                 <a:ea typeface="Calibri" pitchFamily="34" charset="-122"/>
                 <a:cs typeface="Calibri" pitchFamily="34" charset="-120"/>
               </a:rPr>
-              <a:t>Feature tree, orientation cube, exploded, multi-section, richer measure, per-face → cost.</a:t>
+              <a:t>Orientation cube, exploded view, X/Y/Z sections, richer measuring, £ per face. Solid section caps still to do.</a:t>
             </a:r>
             <a:endParaRPr lang="en-US" sz="1050" dirty="0"/>
           </a:p>
@@ -21584,7 +21576,7 @@
                 <a:ea typeface="Calibri" pitchFamily="34" charset="-122"/>
                 <a:cs typeface="Calibri" pitchFamily="34" charset="-120"/>
               </a:rPr>
-              <a:t>~2–4 wks</a:t>
+              <a:t>Mostly built</a:t>
             </a:r>
             <a:endParaRPr lang="en-US" sz="1000" dirty="0"/>
           </a:p>
@@ -21790,7 +21782,7 @@
                 <a:ea typeface="Calibri" pitchFamily="34" charset="-122"/>
                 <a:cs typeface="Calibri" pitchFamily="34" charset="-120"/>
               </a:rPr>
-              <a:t>Fillet/chamfer/slot/thread recognition + STEP AP242 PMI → tolerance-driven costing.</a:t>
+              <a:t>Fillets and cautious pockets found today. Chamfers, slots, threads, STL features and tolerances from STEP AP242 still to do.</a:t>
             </a:r>
             <a:endParaRPr lang="en-US" sz="1050" dirty="0"/>
           </a:p>
@@ -21856,7 +21848,7 @@
                 <a:ea typeface="Calibri" pitchFamily="34" charset="-122"/>
                 <a:cs typeface="Calibri" pitchFamily="34" charset="-120"/>
               </a:rPr>
-              <a:t>~3–5 wks</a:t>
+              <a:t>Partly started</a:t>
             </a:r>
             <a:endParaRPr lang="en-US" sz="1000" dirty="0"/>
           </a:p>
@@ -22020,7 +22012,7 @@
                 <a:ea typeface="Calibri" pitchFamily="34" charset="-122"/>
                 <a:cs typeface="Calibri" pitchFamily="34" charset="-120"/>
               </a:rPr>
-              <a:t>Best-in-class AFR</a:t>
+              <a:t>Research track</a:t>
             </a:r>
             <a:endParaRPr lang="en-US" sz="1400" dirty="0"/>
           </a:p>
@@ -22062,7 +22054,7 @@
                 <a:ea typeface="Calibri" pitchFamily="34" charset="-122"/>
                 <a:cs typeface="Calibri" pitchFamily="34" charset="-120"/>
               </a:rPr>
-              <a:t>Client-side B-rep kernel + graph-neural feature recognition. Rivals the leaders.</a:t>
+              <a:t>Browser-side B-rep kernel and learned feature recognition. Not started and not committed.</a:t>
             </a:r>
             <a:endParaRPr lang="en-US" sz="1050" dirty="0"/>
           </a:p>
@@ -22128,7 +22120,7 @@
                 <a:ea typeface="Calibri" pitchFamily="34" charset="-122"/>
                 <a:cs typeface="Calibri" pitchFamily="34" charset="-120"/>
               </a:rPr>
-              <a:t>research</a:t>
+              <a:t>Future</a:t>
             </a:r>
             <a:endParaRPr lang="en-US" sz="1000" dirty="0"/>
           </a:p>
@@ -22167,7 +22159,7 @@
                 <a:ea typeface="Calibri" pitchFamily="34" charset="-122"/>
                 <a:cs typeface="Calibri" pitchFamily="34" charset="-120"/>
               </a:rPr>
-              <a:t>Ship each phase on its own — value lands early. The two things you asked for (a bigger viewer, a CAD-software feel) are Phase 0 and Phase 1.</a:t>
+              <a:t>Each phase ships on its own. The two things you asked for — a bigger viewer and a CAD-software feel — were Phases 0 and 1, and both are now in the tool.</a:t>
             </a:r>
             <a:endParaRPr lang="en-US" sz="1100" dirty="0"/>
           </a:p>

--- a/CostVision-3D-CAD-Viewer-Study-and-Roadmap.pptx
+++ b/CostVision-3D-CAD-Viewer-Study-and-Roadmap.pptx
@@ -517,7 +517,7 @@
           <a:p>
             <a:r>
               <a:rPr lang="en-US" dirty="0"/>
-              <a:t>This deck started in July as an answer to a fair challenge. Someone had seen a rival should-cost tool and liked its 3D viewer. It felt like real CAD software, and it seemed to pull data straight off the model. So I did two things. I read up on how the leading tools do this, and I went through our own viewer and geometry engine line by line. Since July we have built a good part of that plan. So I've updated the deck to say plainly what is in the tool today and what is still future. One thing to hold on to all the way through. At JLR the AI is switched off. The CAD path runs on measured geometry and plain rules. Where the geometry can't decide something, the tool asks the engineer. Nothing on these slides depends on AI.</a:t>
+              <a:t>This deck started in July as an answer to a fair challenge. Someone had seen a rival should-cost tool and liked its 3D viewer. It felt like real CAD software, and it seemed to pull data straight off the model. So I did two things. I read up on how the leading tools do this, and I went through our own viewer and geometry engine line by line. Since July we have built a good part of that plan. So I've updated the deck to say plainly what is in the tool today and what is still future. One thing to hold on to all the way through. At JLR the AI waits for an API key. The CAD path runs on measured geometry and plain rules. Where the geometry can't decide something, the tool asks the engineer. Nothing on these slides depends on AI.</a:t>
             </a:r>
             <a:endParaRPr lang="en-US" dirty="0"/>
           </a:p>
@@ -1661,7 +1661,7 @@
           <a:p>
             <a:r>
               <a:rPr lang="en-US" dirty="0"/>
-              <a:t>The whole plan comes down to two ideas. The first one is mostly done. In July the engine was already working out wall thickness, draft and undercuts, and then throwing them away as far as the viewer was concerned. Now they're coloured on the model, along with the cost per face after you run a costing. That was cheap to build because the numbers already existed. The second idea is still ahead of us. Every feature we can read from the CAD file is a field nobody has to type. Tolerances, chamfers, slots and threads are next. Until we can read them, the tool asks the engineer, and I think that's the right default. And the rule at the bottom doesn't change. The viewer is there to capture and check inputs. The tool measures and calculates. AI never sets a price, and at JLR it's switched off anyway.</a:t>
+              <a:t>The whole plan comes down to two ideas. The first one is mostly done. In July the engine was already working out wall thickness, draft and undercuts, and then throwing them away as far as the viewer was concerned. Now they're coloured on the model, along with the cost per face after you run a costing. That was cheap to build because the numbers already existed. The second idea is still ahead of us. Every feature we can read from the CAD file is a field nobody has to type. Tolerances, chamfers, slots and threads are next. Until we can read them, the tool asks the engineer, and I think that's the right default. And the rule at the bottom doesn't change. The viewer is there to capture and check inputs. The tool measures and calculates. AI never sets a price, and runs only once an API key is added.</a:t>
             </a:r>
             <a:endParaRPr lang="en-US" dirty="0"/>
           </a:p>
@@ -9774,7 +9774,7 @@
                 <a:ea typeface="Calibri" pitchFamily="34" charset="-122"/>
                 <a:cs typeface="Calibri" pitchFamily="34" charset="-120"/>
               </a:rPr>
-              <a:t>The tool measures and calculates. AI never sets a price, and at JLR it is switched off.</a:t>
+              <a:t>The tool measures and calculates. AI never sets a price, and runs only once an API key is added.</a:t>
             </a:r>
             <a:endParaRPr lang="en-US" sz="1050" dirty="0"/>
           </a:p>
@@ -11633,7 +11633,7 @@
                 <a:ea typeface="Calibri" pitchFamily="34" charset="-122"/>
                 <a:cs typeface="Calibri" pitchFamily="34" charset="-120"/>
               </a:rPr>
-              <a:t>AI never sets a price. At JLR it is switched off. The CAD path runs on measured geometry and rules, for 13 commodities. Every £ is plain arithmetic, traceable to a rate.</a:t>
+              <a:t>AI never sets a price, and runs only once an API key is added. The CAD path runs on measured geometry and rules, for 13 commodities. Every £ is plain arithmetic, traceable to a rate.</a:t>
             </a:r>
             <a:endParaRPr lang="en-US" sz="950" dirty="0"/>
           </a:p>
@@ -19837,7 +19837,7 @@
                 <a:ea typeface="Calibri" pitchFamily="34" charset="-122"/>
                 <a:cs typeface="Calibri" pitchFamily="34" charset="-120"/>
               </a:rPr>
-              <a:t>the viewer is a place to capture and check cost inputs, not decoration. The tool measures and calculates; every £ traces to a rate. AI never sets a price, and at JLR it is switched off.</a:t>
+              <a:t>the viewer is a place to capture and check cost inputs, not decoration. The tool measures and calculates; every £ traces to a rate. AI never sets a price, and runs only once an API key is added.</a:t>
             </a:r>
             <a:endParaRPr lang="en-US" sz="1150" dirty="0"/>
           </a:p>
